--- a/Lecture slides/NYT B01 - What is Science.pptx
+++ b/Lecture slides/NYT B01 - What is Science.pptx
@@ -54,6 +54,7 @@
     <p:sldId id="299" r:id="rId50"/>
     <p:sldId id="300" r:id="rId51"/>
     <p:sldId id="301" r:id="rId52"/>
+    <p:sldId id="302" r:id="rId53"/>
   </p:sldIdLst>
   <p:sldSz cy="5143500" cx="9144000"/>
   <p:notesSz cx="6858000" cy="9144000"/>
@@ -2730,7 +2731,7 @@
       </p:grpSpPr>
       <p:sp>
         <p:nvSpPr>
-          <p:cNvPr id="228" name="Google Shape;228;g10e751f47f0_0_45:notes"/>
+          <p:cNvPr id="228" name="Google Shape;228;g350db62341d_0_6:notes"/>
           <p:cNvSpPr/>
           <p:nvPr>
             <p:ph idx="2" type="sldImg"/>
@@ -2765,7 +2766,7 @@
       </p:sp>
       <p:sp>
         <p:nvSpPr>
-          <p:cNvPr id="229" name="Google Shape;229;g10e751f47f0_0_45:notes"/>
+          <p:cNvPr id="229" name="Google Shape;229;g350db62341d_0_6:notes"/>
           <p:cNvSpPr txBox="1"/>
           <p:nvPr>
             <p:ph idx="1" type="body"/>
@@ -2829,7 +2830,7 @@
       </p:grpSpPr>
       <p:sp>
         <p:nvSpPr>
-          <p:cNvPr id="235" name="Google Shape;235;g10b1f6a61c9_2_45:notes"/>
+          <p:cNvPr id="235" name="Google Shape;235;g10e751f47f0_0_45:notes"/>
           <p:cNvSpPr/>
           <p:nvPr>
             <p:ph idx="2" type="sldImg"/>
@@ -2864,7 +2865,7 @@
       </p:sp>
       <p:sp>
         <p:nvSpPr>
-          <p:cNvPr id="236" name="Google Shape;236;g10b1f6a61c9_2_45:notes"/>
+          <p:cNvPr id="236" name="Google Shape;236;g10e751f47f0_0_45:notes"/>
           <p:cNvSpPr txBox="1"/>
           <p:nvPr>
             <p:ph idx="1" type="body"/>
@@ -3013,7 +3014,7 @@
   <p:cSld>
     <p:spTree>
       <p:nvGrpSpPr>
-        <p:cNvPr id="239" name="Shape 239"/>
+        <p:cNvPr id="241" name="Shape 241"/>
         <p:cNvGrpSpPr/>
         <p:nvPr/>
       </p:nvGrpSpPr>
@@ -3027,7 +3028,7 @@
       </p:grpSpPr>
       <p:sp>
         <p:nvSpPr>
-          <p:cNvPr id="240" name="Google Shape;240;g10e751f47f0_0_57:notes"/>
+          <p:cNvPr id="242" name="Google Shape;242;g10b1f6a61c9_2_45:notes"/>
           <p:cNvSpPr/>
           <p:nvPr>
             <p:ph idx="2" type="sldImg"/>
@@ -3062,7 +3063,7 @@
       </p:sp>
       <p:sp>
         <p:nvSpPr>
-          <p:cNvPr id="241" name="Google Shape;241;g10e751f47f0_0_57:notes"/>
+          <p:cNvPr id="243" name="Google Shape;243;g10b1f6a61c9_2_45:notes"/>
           <p:cNvSpPr txBox="1"/>
           <p:nvPr>
             <p:ph idx="1" type="body"/>
@@ -3126,7 +3127,7 @@
       </p:grpSpPr>
       <p:sp>
         <p:nvSpPr>
-          <p:cNvPr id="247" name="Google Shape;247;g10e751f47f0_0_70:notes"/>
+          <p:cNvPr id="247" name="Google Shape;247;g10e751f47f0_0_57:notes"/>
           <p:cNvSpPr/>
           <p:nvPr>
             <p:ph idx="2" type="sldImg"/>
@@ -3161,7 +3162,7 @@
       </p:sp>
       <p:sp>
         <p:nvSpPr>
-          <p:cNvPr id="248" name="Google Shape;248;g10e751f47f0_0_70:notes"/>
+          <p:cNvPr id="248" name="Google Shape;248;g10e751f47f0_0_57:notes"/>
           <p:cNvSpPr txBox="1"/>
           <p:nvPr>
             <p:ph idx="1" type="body"/>
@@ -3225,7 +3226,7 @@
       </p:grpSpPr>
       <p:sp>
         <p:nvSpPr>
-          <p:cNvPr id="254" name="Google Shape;254;g10e751f47f0_0_76:notes"/>
+          <p:cNvPr id="254" name="Google Shape;254;g10e751f47f0_0_70:notes"/>
           <p:cNvSpPr/>
           <p:nvPr>
             <p:ph idx="2" type="sldImg"/>
@@ -3260,7 +3261,7 @@
       </p:sp>
       <p:sp>
         <p:nvSpPr>
-          <p:cNvPr id="255" name="Google Shape;255;g10e751f47f0_0_76:notes"/>
+          <p:cNvPr id="255" name="Google Shape;255;g10e751f47f0_0_70:notes"/>
           <p:cNvSpPr txBox="1"/>
           <p:nvPr>
             <p:ph idx="1" type="body"/>
@@ -3324,7 +3325,7 @@
       </p:grpSpPr>
       <p:sp>
         <p:nvSpPr>
-          <p:cNvPr id="261" name="Google Shape;261;g10e751f47f0_0_82:notes"/>
+          <p:cNvPr id="261" name="Google Shape;261;g10e751f47f0_0_76:notes"/>
           <p:cNvSpPr/>
           <p:nvPr>
             <p:ph idx="2" type="sldImg"/>
@@ -3359,7 +3360,7 @@
       </p:sp>
       <p:sp>
         <p:nvSpPr>
-          <p:cNvPr id="262" name="Google Shape;262;g10e751f47f0_0_82:notes"/>
+          <p:cNvPr id="262" name="Google Shape;262;g10e751f47f0_0_76:notes"/>
           <p:cNvSpPr txBox="1"/>
           <p:nvPr>
             <p:ph idx="1" type="body"/>
@@ -3423,7 +3424,7 @@
       </p:grpSpPr>
       <p:sp>
         <p:nvSpPr>
-          <p:cNvPr id="268" name="Google Shape;268;g10b1f6a61c9_0_134:notes"/>
+          <p:cNvPr id="268" name="Google Shape;268;g10e751f47f0_0_82:notes"/>
           <p:cNvSpPr/>
           <p:nvPr>
             <p:ph idx="2" type="sldImg"/>
@@ -3458,7 +3459,7 @@
       </p:sp>
       <p:sp>
         <p:nvSpPr>
-          <p:cNvPr id="269" name="Google Shape;269;g10b1f6a61c9_0_134:notes"/>
+          <p:cNvPr id="269" name="Google Shape;269;g10e751f47f0_0_82:notes"/>
           <p:cNvSpPr txBox="1"/>
           <p:nvPr>
             <p:ph idx="1" type="body"/>
@@ -3508,7 +3509,7 @@
   <p:cSld>
     <p:spTree>
       <p:nvGrpSpPr>
-        <p:cNvPr id="272" name="Shape 272"/>
+        <p:cNvPr id="274" name="Shape 274"/>
         <p:cNvGrpSpPr/>
         <p:nvPr/>
       </p:nvGrpSpPr>
@@ -3522,7 +3523,7 @@
       </p:grpSpPr>
       <p:sp>
         <p:nvSpPr>
-          <p:cNvPr id="273" name="Google Shape;273;g10b1f6a61c9_0_144:notes"/>
+          <p:cNvPr id="275" name="Google Shape;275;g10b1f6a61c9_0_134:notes"/>
           <p:cNvSpPr/>
           <p:nvPr>
             <p:ph idx="2" type="sldImg"/>
@@ -3557,7 +3558,7 @@
       </p:sp>
       <p:sp>
         <p:nvSpPr>
-          <p:cNvPr id="274" name="Google Shape;274;g10b1f6a61c9_0_144:notes"/>
+          <p:cNvPr id="276" name="Google Shape;276;g10b1f6a61c9_0_134:notes"/>
           <p:cNvSpPr txBox="1"/>
           <p:nvPr>
             <p:ph idx="1" type="body"/>
@@ -3607,7 +3608,7 @@
   <p:cSld>
     <p:spTree>
       <p:nvGrpSpPr>
-        <p:cNvPr id="280" name="Shape 280"/>
+        <p:cNvPr id="279" name="Shape 279"/>
         <p:cNvGrpSpPr/>
         <p:nvPr/>
       </p:nvGrpSpPr>
@@ -3621,7 +3622,7 @@
       </p:grpSpPr>
       <p:sp>
         <p:nvSpPr>
-          <p:cNvPr id="281" name="Google Shape;281;g10b1f6a61c9_1_0:notes"/>
+          <p:cNvPr id="280" name="Google Shape;280;g10b1f6a61c9_0_144:notes"/>
           <p:cNvSpPr/>
           <p:nvPr>
             <p:ph idx="2" type="sldImg"/>
@@ -3656,7 +3657,7 @@
       </p:sp>
       <p:sp>
         <p:nvSpPr>
-          <p:cNvPr id="282" name="Google Shape;282;g10b1f6a61c9_1_0:notes"/>
+          <p:cNvPr id="281" name="Google Shape;281;g10b1f6a61c9_0_144:notes"/>
           <p:cNvSpPr txBox="1"/>
           <p:nvPr>
             <p:ph idx="1" type="body"/>
@@ -3706,7 +3707,7 @@
   <p:cSld>
     <p:spTree>
       <p:nvGrpSpPr>
-        <p:cNvPr id="288" name="Shape 288"/>
+        <p:cNvPr id="287" name="Shape 287"/>
         <p:cNvGrpSpPr/>
         <p:nvPr/>
       </p:nvGrpSpPr>
@@ -3720,7 +3721,7 @@
       </p:grpSpPr>
       <p:sp>
         <p:nvSpPr>
-          <p:cNvPr id="289" name="Google Shape;289;g10b1f6a61c9_0_158:notes"/>
+          <p:cNvPr id="288" name="Google Shape;288;g10b1f6a61c9_1_0:notes"/>
           <p:cNvSpPr/>
           <p:nvPr>
             <p:ph idx="2" type="sldImg"/>
@@ -3755,7 +3756,7 @@
       </p:sp>
       <p:sp>
         <p:nvSpPr>
-          <p:cNvPr id="290" name="Google Shape;290;g10b1f6a61c9_0_158:notes"/>
+          <p:cNvPr id="289" name="Google Shape;289;g10b1f6a61c9_1_0:notes"/>
           <p:cNvSpPr txBox="1"/>
           <p:nvPr>
             <p:ph idx="1" type="body"/>
@@ -3805,7 +3806,7 @@
   <p:cSld>
     <p:spTree>
       <p:nvGrpSpPr>
-        <p:cNvPr id="297" name="Shape 297"/>
+        <p:cNvPr id="295" name="Shape 295"/>
         <p:cNvGrpSpPr/>
         <p:nvPr/>
       </p:nvGrpSpPr>
@@ -3819,7 +3820,7 @@
       </p:grpSpPr>
       <p:sp>
         <p:nvSpPr>
-          <p:cNvPr id="298" name="Google Shape;298;g10b1f6a61c9_0_174:notes"/>
+          <p:cNvPr id="296" name="Google Shape;296;g10b1f6a61c9_0_158:notes"/>
           <p:cNvSpPr/>
           <p:nvPr>
             <p:ph idx="2" type="sldImg"/>
@@ -3854,7 +3855,7 @@
       </p:sp>
       <p:sp>
         <p:nvSpPr>
-          <p:cNvPr id="299" name="Google Shape;299;g10b1f6a61c9_0_174:notes"/>
+          <p:cNvPr id="297" name="Google Shape;297;g10b1f6a61c9_0_158:notes"/>
           <p:cNvSpPr txBox="1"/>
           <p:nvPr>
             <p:ph idx="1" type="body"/>
@@ -3904,7 +3905,7 @@
   <p:cSld>
     <p:spTree>
       <p:nvGrpSpPr>
-        <p:cNvPr id="302" name="Shape 302"/>
+        <p:cNvPr id="304" name="Shape 304"/>
         <p:cNvGrpSpPr/>
         <p:nvPr/>
       </p:nvGrpSpPr>
@@ -3918,7 +3919,7 @@
       </p:grpSpPr>
       <p:sp>
         <p:nvSpPr>
-          <p:cNvPr id="303" name="Google Shape;303;g10b1f6a61c9_4_1:notes"/>
+          <p:cNvPr id="305" name="Google Shape;305;g10b1f6a61c9_0_174:notes"/>
           <p:cNvSpPr/>
           <p:nvPr>
             <p:ph idx="2" type="sldImg"/>
@@ -3953,7 +3954,7 @@
       </p:sp>
       <p:sp>
         <p:nvSpPr>
-          <p:cNvPr id="304" name="Google Shape;304;g10b1f6a61c9_4_1:notes"/>
+          <p:cNvPr id="306" name="Google Shape;306;g10b1f6a61c9_0_174:notes"/>
           <p:cNvSpPr txBox="1"/>
           <p:nvPr>
             <p:ph idx="1" type="body"/>
@@ -4116,7 +4117,7 @@
       </p:grpSpPr>
       <p:sp>
         <p:nvSpPr>
-          <p:cNvPr id="310" name="Google Shape;310;g1246c69a0e8_0_6:notes"/>
+          <p:cNvPr id="310" name="Google Shape;310;g10b1f6a61c9_4_1:notes"/>
           <p:cNvSpPr/>
           <p:nvPr>
             <p:ph idx="2" type="sldImg"/>
@@ -4151,7 +4152,7 @@
       </p:sp>
       <p:sp>
         <p:nvSpPr>
-          <p:cNvPr id="311" name="Google Shape;311;g1246c69a0e8_0_6:notes"/>
+          <p:cNvPr id="311" name="Google Shape;311;g10b1f6a61c9_4_1:notes"/>
           <p:cNvSpPr txBox="1"/>
           <p:nvPr>
             <p:ph idx="1" type="body"/>
@@ -4215,7 +4216,7 @@
       </p:grpSpPr>
       <p:sp>
         <p:nvSpPr>
-          <p:cNvPr id="317" name="Google Shape;317;g1246c69a0e8_0_0:notes"/>
+          <p:cNvPr id="317" name="Google Shape;317;g1246c69a0e8_0_6:notes"/>
           <p:cNvSpPr/>
           <p:nvPr>
             <p:ph idx="2" type="sldImg"/>
@@ -4250,7 +4251,7 @@
       </p:sp>
       <p:sp>
         <p:nvSpPr>
-          <p:cNvPr id="318" name="Google Shape;318;g1246c69a0e8_0_0:notes"/>
+          <p:cNvPr id="318" name="Google Shape;318;g1246c69a0e8_0_6:notes"/>
           <p:cNvSpPr txBox="1"/>
           <p:nvPr>
             <p:ph idx="1" type="body"/>
@@ -4300,7 +4301,7 @@
   <p:cSld>
     <p:spTree>
       <p:nvGrpSpPr>
-        <p:cNvPr id="325" name="Shape 325"/>
+        <p:cNvPr id="323" name="Shape 323"/>
         <p:cNvGrpSpPr/>
         <p:nvPr/>
       </p:nvGrpSpPr>
@@ -4314,7 +4315,7 @@
       </p:grpSpPr>
       <p:sp>
         <p:nvSpPr>
-          <p:cNvPr id="326" name="Google Shape;326;g10e751f47f0_0_92:notes"/>
+          <p:cNvPr id="324" name="Google Shape;324;g1246c69a0e8_0_0:notes"/>
           <p:cNvSpPr/>
           <p:nvPr>
             <p:ph idx="2" type="sldImg"/>
@@ -4349,7 +4350,7 @@
       </p:sp>
       <p:sp>
         <p:nvSpPr>
-          <p:cNvPr id="327" name="Google Shape;327;g10e751f47f0_0_92:notes"/>
+          <p:cNvPr id="325" name="Google Shape;325;g1246c69a0e8_0_0:notes"/>
           <p:cNvSpPr txBox="1"/>
           <p:nvPr>
             <p:ph idx="1" type="body"/>
@@ -4399,7 +4400,7 @@
   <p:cSld>
     <p:spTree>
       <p:nvGrpSpPr>
-        <p:cNvPr id="334" name="Shape 334"/>
+        <p:cNvPr id="332" name="Shape 332"/>
         <p:cNvGrpSpPr/>
         <p:nvPr/>
       </p:nvGrpSpPr>
@@ -4413,7 +4414,7 @@
       </p:grpSpPr>
       <p:sp>
         <p:nvSpPr>
-          <p:cNvPr id="335" name="Google Shape;335;g10e751f47f0_0_98:notes"/>
+          <p:cNvPr id="333" name="Google Shape;333;g10e751f47f0_0_92:notes"/>
           <p:cNvSpPr/>
           <p:nvPr>
             <p:ph idx="2" type="sldImg"/>
@@ -4448,7 +4449,7 @@
       </p:sp>
       <p:sp>
         <p:nvSpPr>
-          <p:cNvPr id="336" name="Google Shape;336;g10e751f47f0_0_98:notes"/>
+          <p:cNvPr id="334" name="Google Shape;334;g10e751f47f0_0_92:notes"/>
           <p:cNvSpPr txBox="1"/>
           <p:nvPr>
             <p:ph idx="1" type="body"/>
@@ -4498,7 +4499,7 @@
   <p:cSld>
     <p:spTree>
       <p:nvGrpSpPr>
-        <p:cNvPr id="342" name="Shape 342"/>
+        <p:cNvPr id="341" name="Shape 341"/>
         <p:cNvGrpSpPr/>
         <p:nvPr/>
       </p:nvGrpSpPr>
@@ -4512,7 +4513,7 @@
       </p:grpSpPr>
       <p:sp>
         <p:nvSpPr>
-          <p:cNvPr id="343" name="Google Shape;343;g10b1f6a61c9_2_0:notes"/>
+          <p:cNvPr id="342" name="Google Shape;342;g10e751f47f0_0_98:notes"/>
           <p:cNvSpPr/>
           <p:nvPr>
             <p:ph idx="2" type="sldImg"/>
@@ -4547,7 +4548,7 @@
       </p:sp>
       <p:sp>
         <p:nvSpPr>
-          <p:cNvPr id="344" name="Google Shape;344;g10b1f6a61c9_2_0:notes"/>
+          <p:cNvPr id="343" name="Google Shape;343;g10e751f47f0_0_98:notes"/>
           <p:cNvSpPr txBox="1"/>
           <p:nvPr>
             <p:ph idx="1" type="body"/>
@@ -4611,7 +4612,7 @@
       </p:grpSpPr>
       <p:sp>
         <p:nvSpPr>
-          <p:cNvPr id="350" name="Google Shape;350;g239613ad45a_0_38:notes"/>
+          <p:cNvPr id="350" name="Google Shape;350;g10b1f6a61c9_2_0:notes"/>
           <p:cNvSpPr/>
           <p:nvPr>
             <p:ph idx="2" type="sldImg"/>
@@ -4646,7 +4647,7 @@
       </p:sp>
       <p:sp>
         <p:nvSpPr>
-          <p:cNvPr id="351" name="Google Shape;351;g239613ad45a_0_38:notes"/>
+          <p:cNvPr id="351" name="Google Shape;351;g10b1f6a61c9_2_0:notes"/>
           <p:cNvSpPr txBox="1"/>
           <p:nvPr>
             <p:ph idx="1" type="body"/>
@@ -4696,7 +4697,7 @@
   <p:cSld>
     <p:spTree>
       <p:nvGrpSpPr>
-        <p:cNvPr id="355" name="Shape 355"/>
+        <p:cNvPr id="356" name="Shape 356"/>
         <p:cNvGrpSpPr/>
         <p:nvPr/>
       </p:nvGrpSpPr>
@@ -4710,7 +4711,7 @@
       </p:grpSpPr>
       <p:sp>
         <p:nvSpPr>
-          <p:cNvPr id="356" name="Google Shape;356;g239613ad45a_0_43:notes"/>
+          <p:cNvPr id="357" name="Google Shape;357;g239613ad45a_0_38:notes"/>
           <p:cNvSpPr/>
           <p:nvPr>
             <p:ph idx="2" type="sldImg"/>
@@ -4745,7 +4746,106 @@
       </p:sp>
       <p:sp>
         <p:nvSpPr>
-          <p:cNvPr id="357" name="Google Shape;357;g239613ad45a_0_43:notes"/>
+          <p:cNvPr id="358" name="Google Shape;358;g239613ad45a_0_38:notes"/>
+          <p:cNvSpPr txBox="1"/>
+          <p:nvPr>
+            <p:ph idx="1" type="body"/>
+          </p:nvPr>
+        </p:nvSpPr>
+        <p:spPr>
+          <a:xfrm>
+            <a:off x="685800" y="4343400"/>
+            <a:ext cx="5486400" cy="4114800"/>
+          </a:xfrm>
+          <a:prstGeom prst="rect">
+            <a:avLst/>
+          </a:prstGeom>
+        </p:spPr>
+        <p:txBody>
+          <a:bodyPr anchorCtr="0" anchor="t" bIns="91425" lIns="91425" spcFirstLastPara="1" rIns="91425" wrap="square" tIns="91425">
+            <a:noAutofit/>
+          </a:bodyPr>
+          <a:lstStyle/>
+          <a:p>
+            <a:pPr indent="0" lvl="0" marL="0" rtl="0" algn="l">
+              <a:spcBef>
+                <a:spcPts val="0"/>
+              </a:spcBef>
+              <a:spcAft>
+                <a:spcPts val="0"/>
+              </a:spcAft>
+              <a:buNone/>
+            </a:pPr>
+            <a:r>
+              <a:t/>
+            </a:r>
+            <a:endParaRPr/>
+          </a:p>
+        </p:txBody>
+      </p:sp>
+    </p:spTree>
+  </p:cSld>
+  <p:clrMapOvr>
+    <a:masterClrMapping/>
+  </p:clrMapOvr>
+</p:notes>
+</file>
+
+<file path=ppt/notesSlides/notesSlide47.xml><?xml version="1.0" encoding="utf-8"?>
+<p:notes xmlns:a="http://schemas.openxmlformats.org/drawingml/2006/main" xmlns:r="http://schemas.openxmlformats.org/officeDocument/2006/relationships" xmlns:mc="http://schemas.openxmlformats.org/markup-compatibility/2006" xmlns:mv="urn:schemas-microsoft-com:mac:vml" xmlns:p="http://schemas.openxmlformats.org/presentationml/2006/main" xmlns:c="http://schemas.openxmlformats.org/drawingml/2006/chart" xmlns:dgm="http://schemas.openxmlformats.org/drawingml/2006/diagram" xmlns:o="urn:schemas-microsoft-com:office:office" xmlns:v="urn:schemas-microsoft-com:vml" xmlns:pvml="urn:schemas-microsoft-com:office:powerpoint" xmlns:com="http://schemas.openxmlformats.org/drawingml/2006/compatibility" xmlns:p14="http://schemas.microsoft.com/office/powerpoint/2010/main" xmlns:p15="http://schemas.microsoft.com/office/powerpoint/2012/main" xmlns:ahyp="http://schemas.microsoft.com/office/drawing/2018/hyperlinkcolor" showMasterPhAnim="0" showMasterSp="0">
+  <p:cSld>
+    <p:spTree>
+      <p:nvGrpSpPr>
+        <p:cNvPr id="362" name="Shape 362"/>
+        <p:cNvGrpSpPr/>
+        <p:nvPr/>
+      </p:nvGrpSpPr>
+      <p:grpSpPr>
+        <a:xfrm>
+          <a:off x="0" y="0"/>
+          <a:ext cx="0" cy="0"/>
+          <a:chOff x="0" y="0"/>
+          <a:chExt cx="0" cy="0"/>
+        </a:xfrm>
+      </p:grpSpPr>
+      <p:sp>
+        <p:nvSpPr>
+          <p:cNvPr id="363" name="Google Shape;363;g239613ad45a_0_43:notes"/>
+          <p:cNvSpPr/>
+          <p:nvPr>
+            <p:ph idx="2" type="sldImg"/>
+          </p:nvPr>
+        </p:nvSpPr>
+        <p:spPr>
+          <a:xfrm>
+            <a:off x="381300" y="685800"/>
+            <a:ext cx="6096000" cy="3429000"/>
+          </a:xfrm>
+          <a:custGeom>
+            <a:rect b="b" l="l" r="r" t="t"/>
+            <a:pathLst>
+              <a:path extrusionOk="0" h="120000" w="120000">
+                <a:moveTo>
+                  <a:pt x="0" y="0"/>
+                </a:moveTo>
+                <a:lnTo>
+                  <a:pt x="120000" y="0"/>
+                </a:lnTo>
+                <a:lnTo>
+                  <a:pt x="120000" y="120000"/>
+                </a:lnTo>
+                <a:lnTo>
+                  <a:pt x="0" y="120000"/>
+                </a:lnTo>
+                <a:close/>
+              </a:path>
+            </a:pathLst>
+          </a:custGeom>
+        </p:spPr>
+      </p:sp>
+      <p:sp>
+        <p:nvSpPr>
+          <p:cNvPr id="364" name="Google Shape;364;g239613ad45a_0_43:notes"/>
           <p:cNvSpPr txBox="1"/>
           <p:nvPr>
             <p:ph idx="1" type="body"/>
@@ -8737,7 +8837,7 @@
             </a:pPr>
             <a:r>
               <a:rPr lang="en"/>
-              <a:t>Dirk Riehle, Univ. Erlangen</a:t>
+              <a:t>Dirk Riehle, FAU Erlangen</a:t>
             </a:r>
             <a:endParaRPr/>
           </a:p>
@@ -8952,7 +9052,20 @@
             </a:pPr>
             <a:r>
               <a:rPr lang="en"/>
-              <a:t>[1] See Trinkenreich et al. (2023): Do I belong?</a:t>
+              <a:t>[1] See </a:t>
+            </a:r>
+            <a:r>
+              <a:rPr lang="en" u="sng">
+                <a:solidFill>
+                  <a:schemeClr val="hlink"/>
+                </a:solidFill>
+                <a:hlinkClick r:id="rId3"/>
+              </a:rPr>
+              <a:t>Trinkenreich et al. (2023)</a:t>
+            </a:r>
+            <a:r>
+              <a:rPr lang="en"/>
+              <a:t>: Do I belong?</a:t>
             </a:r>
             <a:endParaRPr/>
           </a:p>
@@ -9051,7 +9164,7 @@
                 <a:solidFill>
                   <a:schemeClr val="hlink"/>
                 </a:solidFill>
-                <a:hlinkClick r:id="rId3"/>
+                <a:hlinkClick r:id="rId4"/>
               </a:rPr>
               <a:t>uni1.de/nyt</a:t>
             </a:r>
@@ -9070,7 +9183,7 @@
           <p:nvPr/>
         </p:nvPicPr>
         <p:blipFill>
-          <a:blip r:embed="rId4">
+          <a:blip r:embed="rId5">
             <a:alphaModFix/>
           </a:blip>
           <a:stretch>
@@ -9889,7 +10002,7 @@
         <p:spPr>
           <a:xfrm>
             <a:off x="274320" y="914400"/>
-            <a:ext cx="8595360" cy="3502840"/>
+            <a:ext cx="8595360" cy="3493598"/>
           </a:xfrm>
           <a:prstGeom prst="rect">
             <a:avLst/>
@@ -10047,7 +10160,7 @@
         <p:spPr>
           <a:xfrm>
             <a:off x="274320" y="914400"/>
-            <a:ext cx="8595360" cy="3502840"/>
+            <a:ext cx="8595360" cy="3493598"/>
           </a:xfrm>
           <a:prstGeom prst="rect">
             <a:avLst/>
@@ -10178,7 +10291,7 @@
             </a:pPr>
             <a:r>
               <a:rPr lang="en"/>
-              <a:t>as defined before (“build to learn”, design science research)</a:t>
+              <a:t>As defined before (“build to learn”, design science research)</a:t>
             </a:r>
             <a:endParaRPr/>
           </a:p>
@@ -10322,11 +10435,20 @@
             </a:pPr>
             <a:r>
               <a:rPr lang="en"/>
-              <a:t>[1] Derived from </a:t>
-            </a:r>
-            <a:r>
-              <a:rPr lang="en"/>
-              <a:t>Brooks, (1996): The computer scientist as toolsmith II.</a:t>
+              <a:t>[1] See </a:t>
+            </a:r>
+            <a:r>
+              <a:rPr lang="en" u="sng">
+                <a:solidFill>
+                  <a:schemeClr val="hlink"/>
+                </a:solidFill>
+                <a:hlinkClick r:id="rId4"/>
+              </a:rPr>
+              <a:t>Brooks (1996)</a:t>
+            </a:r>
+            <a:r>
+              <a:rPr lang="en"/>
+              <a:t>: The computer scientist as toolsmith II.</a:t>
             </a:r>
             <a:endParaRPr/>
           </a:p>
@@ -10865,7 +10987,7 @@
         <p:spPr>
           <a:xfrm>
             <a:off x="274320" y="914400"/>
-            <a:ext cx="8595360" cy="3504997"/>
+            <a:ext cx="8595360" cy="3493598"/>
           </a:xfrm>
           <a:prstGeom prst="rect">
             <a:avLst/>
@@ -12305,7 +12427,7 @@
             <a:tbl>
               <a:tblPr>
                 <a:noFill/>
-                <a:tableStyleId>{6B152514-A711-4921-878E-315DFE35F5D9}</a:tableStyleId>
+                <a:tableStyleId>{318B765E-CCCD-40CA-A58D-B966A8F26E5C}</a:tableStyleId>
               </a:tblPr>
               <a:tblGrid>
                 <a:gridCol w="4297675"/>
@@ -12327,14 +12449,14 @@
                         <a:buNone/>
                       </a:pPr>
                       <a:r>
-                        <a:rPr b="1" lang="en" sz="1800">
+                        <a:rPr b="1" lang="en">
                           <a:solidFill>
                             <a:schemeClr val="lt1"/>
                           </a:solidFill>
                         </a:rPr>
                         <a:t>Theory building</a:t>
                       </a:r>
-                      <a:endParaRPr b="1" sz="1800">
+                      <a:endParaRPr b="1">
                         <a:solidFill>
                           <a:schemeClr val="lt1"/>
                         </a:solidFill>
@@ -12398,14 +12520,14 @@
                         <a:buNone/>
                       </a:pPr>
                       <a:r>
-                        <a:rPr b="1" lang="en" sz="1800">
+                        <a:rPr b="1" lang="en">
                           <a:solidFill>
                             <a:schemeClr val="lt1"/>
                           </a:solidFill>
                         </a:rPr>
                         <a:t>Theory validation</a:t>
                       </a:r>
-                      <a:endParaRPr b="1" sz="1800">
+                      <a:endParaRPr b="1">
                         <a:solidFill>
                           <a:schemeClr val="lt1"/>
                         </a:solidFill>
@@ -13219,7 +13341,7 @@
         <p:spPr>
           <a:xfrm>
             <a:off x="274320" y="914400"/>
-            <a:ext cx="8595360" cy="3502840"/>
+            <a:ext cx="8595360" cy="3493598"/>
           </a:xfrm>
           <a:prstGeom prst="rect">
             <a:avLst/>
@@ -13419,7 +13541,7 @@
             </a:pPr>
             <a:r>
               <a:rPr lang="en"/>
-              <a:t>A (written) article published in an accredited publication outlet like</a:t>
+              <a:t>A (written) article published in an accredited publication venue like</a:t>
             </a:r>
             <a:endParaRPr/>
           </a:p>
@@ -13686,7 +13808,7 @@
             </a:pPr>
             <a:r>
               <a:rPr lang="en"/>
-              <a:t>Scientific Quality Assurance</a:t>
+              <a:t>Scientific Quality Assurance (Peer Review)</a:t>
             </a:r>
             <a:endParaRPr/>
           </a:p>
@@ -13848,64 +13970,6 @@
             <a:r>
               <a:rPr lang="en"/>
               <a:t>Editorial / committee deliberation </a:t>
-            </a:r>
-            <a:endParaRPr/>
-          </a:p>
-          <a:p>
-            <a:pPr indent="0" lvl="0" marL="0" rtl="0" algn="l">
-              <a:spcBef>
-                <a:spcPts val="1200"/>
-              </a:spcBef>
-              <a:spcAft>
-                <a:spcPts val="0"/>
-              </a:spcAft>
-              <a:buNone/>
-            </a:pPr>
-            <a:r>
-              <a:rPr lang="en"/>
-              <a:t>The number of </a:t>
-            </a:r>
-            <a:r>
-              <a:rPr b="1" lang="en"/>
-              <a:t>paper citations</a:t>
-            </a:r>
-            <a:r>
-              <a:rPr lang="en"/>
-              <a:t> is</a:t>
-            </a:r>
-            <a:endParaRPr/>
-          </a:p>
-          <a:p>
-            <a:pPr indent="-342900" lvl="0" marL="457200" rtl="0" algn="l">
-              <a:spcBef>
-                <a:spcPts val="1200"/>
-              </a:spcBef>
-              <a:spcAft>
-                <a:spcPts val="0"/>
-              </a:spcAft>
-              <a:buSzPts val="1800"/>
-              <a:buChar char="●"/>
-            </a:pPr>
-            <a:r>
-              <a:rPr lang="en"/>
-              <a:t>The count of other research papers referencing your work</a:t>
-            </a:r>
-            <a:endParaRPr/>
-          </a:p>
-          <a:p>
-            <a:pPr indent="-342900" lvl="0" marL="457200" rtl="0" algn="l">
-              <a:spcBef>
-                <a:spcPts val="0"/>
-              </a:spcBef>
-              <a:spcAft>
-                <a:spcPts val="0"/>
-              </a:spcAft>
-              <a:buSzPts val="1800"/>
-              <a:buChar char="●"/>
-            </a:pPr>
-            <a:r>
-              <a:rPr lang="en"/>
-              <a:t>A key metric in assessing impact (not necessarily quality)</a:t>
             </a:r>
             <a:endParaRPr/>
           </a:p>
@@ -14035,7 +14099,7 @@
             </a:pPr>
             <a:r>
               <a:rPr lang="en"/>
-              <a:t>Who Can be a Researcher / Scientist?</a:t>
+              <a:t>Scientific Quality Assurance (Test of Time)</a:t>
             </a:r>
             <a:endParaRPr/>
           </a:p>
@@ -14075,51 +14139,49 @@
             </a:pPr>
             <a:r>
               <a:rPr lang="en"/>
-              <a:t>Everyone</a:t>
-            </a:r>
-            <a:r>
-              <a:rPr lang="en"/>
-              <a:t>.</a:t>
-            </a:r>
-            <a:endParaRPr/>
-          </a:p>
-          <a:p>
-            <a:pPr indent="0" lvl="0" marL="0" rtl="0" algn="l">
+              <a:t>The number of </a:t>
+            </a:r>
+            <a:r>
+              <a:rPr b="1" lang="en"/>
+              <a:t>paper citations</a:t>
+            </a:r>
+            <a:r>
+              <a:rPr lang="en"/>
+              <a:t> is</a:t>
+            </a:r>
+            <a:endParaRPr/>
+          </a:p>
+          <a:p>
+            <a:pPr indent="-342900" lvl="0" marL="457200" rtl="0" algn="l">
               <a:spcBef>
                 <a:spcPts val="1200"/>
               </a:spcBef>
               <a:spcAft>
                 <a:spcPts val="0"/>
               </a:spcAft>
-              <a:buNone/>
-            </a:pPr>
-            <a:r>
-              <a:rPr lang="en"/>
-              <a:t>We are all peers</a:t>
-            </a:r>
-            <a:r>
-              <a:rPr lang="en"/>
-              <a:t>.</a:t>
-            </a:r>
-            <a:endParaRPr/>
-          </a:p>
-          <a:p>
-            <a:pPr indent="0" lvl="0" marL="0" rtl="0" algn="l">
-              <a:spcBef>
-                <a:spcPts val="1200"/>
-              </a:spcBef>
-              <a:spcAft>
-                <a:spcPts val="1200"/>
-              </a:spcAft>
-              <a:buNone/>
-            </a:pPr>
-            <a:r>
-              <a:rPr lang="en"/>
-              <a:t>Some are more peer than others</a:t>
-            </a:r>
-            <a:r>
-              <a:rPr lang="en"/>
-              <a:t>.</a:t>
+              <a:buSzPts val="1800"/>
+              <a:buChar char="●"/>
+            </a:pPr>
+            <a:r>
+              <a:rPr lang="en"/>
+              <a:t>The count of other research papers referencing your work</a:t>
+            </a:r>
+            <a:endParaRPr/>
+          </a:p>
+          <a:p>
+            <a:pPr indent="-342900" lvl="0" marL="457200" rtl="0" algn="l">
+              <a:spcBef>
+                <a:spcPts val="0"/>
+              </a:spcBef>
+              <a:spcAft>
+                <a:spcPts val="0"/>
+              </a:spcAft>
+              <a:buSzPts val="1800"/>
+              <a:buChar char="●"/>
+            </a:pPr>
+            <a:r>
+              <a:rPr lang="en"/>
+              <a:t>A key metric in assessing impact (not necessarily quality)</a:t>
             </a:r>
             <a:endParaRPr/>
           </a:p>
@@ -14225,33 +14287,182 @@
         </p:nvSpPr>
         <p:spPr>
           <a:xfrm>
-            <a:off x="0" y="-7"/>
-            <a:ext cx="9144000" cy="2386500"/>
+            <a:off x="0" y="0"/>
+            <a:ext cx="9144000" cy="685800"/>
           </a:xfrm>
           <a:prstGeom prst="rect">
             <a:avLst/>
           </a:prstGeom>
         </p:spPr>
         <p:txBody>
-          <a:bodyPr anchorCtr="0" anchor="b" bIns="274300" lIns="91425" spcFirstLastPara="1" rIns="91425" wrap="square" tIns="91425">
+          <a:bodyPr anchorCtr="0" anchor="ctr" bIns="91425" lIns="274300" spcFirstLastPara="1" rIns="91425" wrap="square" tIns="91425">
             <a:noAutofit/>
           </a:bodyPr>
           <a:lstStyle/>
           <a:p>
-            <a:pPr indent="0" lvl="0" marL="0" rtl="0" algn="ctr">
-              <a:spcBef>
-                <a:spcPts val="0"/>
-              </a:spcBef>
-              <a:spcAft>
-                <a:spcPts val="0"/>
-              </a:spcAft>
-              <a:buNone/>
-            </a:pPr>
-            <a:r>
-              <a:rPr lang="en"/>
-              <a:t>4. Programs and Projects </a:t>
-            </a:r>
-            <a:endParaRPr/>
+            <a:pPr indent="0" lvl="0" marL="0" rtl="0" algn="l">
+              <a:spcBef>
+                <a:spcPts val="0"/>
+              </a:spcBef>
+              <a:spcAft>
+                <a:spcPts val="0"/>
+              </a:spcAft>
+              <a:buNone/>
+            </a:pPr>
+            <a:r>
+              <a:rPr lang="en"/>
+              <a:t>Who Can be a Researcher / Scientist?</a:t>
+            </a:r>
+            <a:endParaRPr/>
+          </a:p>
+        </p:txBody>
+      </p:sp>
+      <p:sp>
+        <p:nvSpPr>
+          <p:cNvPr id="239" name="Google Shape;239;p36"/>
+          <p:cNvSpPr txBox="1"/>
+          <p:nvPr>
+            <p:ph idx="1" type="body"/>
+          </p:nvPr>
+        </p:nvSpPr>
+        <p:spPr>
+          <a:xfrm>
+            <a:off x="274320" y="914400"/>
+            <a:ext cx="8595300" cy="4114800"/>
+          </a:xfrm>
+          <a:prstGeom prst="rect">
+            <a:avLst/>
+          </a:prstGeom>
+        </p:spPr>
+        <p:txBody>
+          <a:bodyPr anchorCtr="0" anchor="t" bIns="0" lIns="0" spcFirstLastPara="1" rIns="0" wrap="square" tIns="0">
+            <a:noAutofit/>
+          </a:bodyPr>
+          <a:lstStyle/>
+          <a:p>
+            <a:pPr indent="0" lvl="0" marL="0" rtl="0" algn="l">
+              <a:spcBef>
+                <a:spcPts val="0"/>
+              </a:spcBef>
+              <a:spcAft>
+                <a:spcPts val="0"/>
+              </a:spcAft>
+              <a:buNone/>
+            </a:pPr>
+            <a:r>
+              <a:rPr lang="en"/>
+              <a:t>Everyone</a:t>
+            </a:r>
+            <a:r>
+              <a:rPr lang="en"/>
+              <a:t>.</a:t>
+            </a:r>
+            <a:endParaRPr/>
+          </a:p>
+          <a:p>
+            <a:pPr indent="0" lvl="0" marL="0" rtl="0" algn="l">
+              <a:spcBef>
+                <a:spcPts val="1200"/>
+              </a:spcBef>
+              <a:spcAft>
+                <a:spcPts val="0"/>
+              </a:spcAft>
+              <a:buNone/>
+            </a:pPr>
+            <a:r>
+              <a:rPr lang="en"/>
+              <a:t>We are all peers</a:t>
+            </a:r>
+            <a:r>
+              <a:rPr lang="en"/>
+              <a:t>.</a:t>
+            </a:r>
+            <a:endParaRPr/>
+          </a:p>
+          <a:p>
+            <a:pPr indent="0" lvl="0" marL="0" rtl="0" algn="l">
+              <a:spcBef>
+                <a:spcPts val="1200"/>
+              </a:spcBef>
+              <a:spcAft>
+                <a:spcPts val="1200"/>
+              </a:spcAft>
+              <a:buNone/>
+            </a:pPr>
+            <a:r>
+              <a:rPr lang="en"/>
+              <a:t>Some are more peer than others</a:t>
+            </a:r>
+            <a:r>
+              <a:rPr lang="en"/>
+              <a:t>.</a:t>
+            </a:r>
+            <a:endParaRPr/>
+          </a:p>
+        </p:txBody>
+      </p:sp>
+      <p:sp>
+        <p:nvSpPr>
+          <p:cNvPr id="240" name="Google Shape;240;p36"/>
+          <p:cNvSpPr txBox="1"/>
+          <p:nvPr>
+            <p:ph idx="12" type="sldNum"/>
+          </p:nvPr>
+        </p:nvSpPr>
+        <p:spPr>
+          <a:xfrm>
+            <a:off x="7315209" y="4229101"/>
+            <a:ext cx="1828800" cy="914400"/>
+          </a:xfrm>
+          <a:prstGeom prst="rect">
+            <a:avLst/>
+          </a:prstGeom>
+        </p:spPr>
+        <p:txBody>
+          <a:bodyPr anchorCtr="0" anchor="b" bIns="91425" lIns="91425" spcFirstLastPara="1" rIns="91425" wrap="square" tIns="91425">
+            <a:noAutofit/>
+          </a:bodyPr>
+          <a:lstStyle/>
+          <a:p>
+            <a:pPr indent="0" lvl="0" marL="0" rtl="0" algn="r">
+              <a:spcBef>
+                <a:spcPts val="0"/>
+              </a:spcBef>
+              <a:spcAft>
+                <a:spcPts val="0"/>
+              </a:spcAft>
+              <a:buNone/>
+            </a:pPr>
+            <a:fld id="{00000000-1234-1234-1234-123412341234}" type="slidenum">
+              <a:rPr lang="en"/>
+              <a:t>‹#›</a:t>
+            </a:fld>
+            <a:endParaRPr/>
+          </a:p>
+          <a:p>
+            <a:pPr indent="0" lvl="0" marL="0" rtl="0" algn="r">
+              <a:spcBef>
+                <a:spcPts val="0"/>
+              </a:spcBef>
+              <a:spcAft>
+                <a:spcPts val="0"/>
+              </a:spcAft>
+              <a:buNone/>
+            </a:pPr>
+            <a:r>
+              <a:rPr b="0" lang="en" sz="1000" u="sng">
+                <a:solidFill>
+                  <a:schemeClr val="hlink"/>
+                </a:solidFill>
+                <a:hlinkClick r:id="rId3"/>
+              </a:rPr>
+              <a:t>uni1.de/nyt</a:t>
+            </a:r>
+            <a:r>
+              <a:rPr b="0" lang="en" sz="1000"/>
+              <a:t> </a:t>
+            </a:r>
+            <a:endParaRPr b="0" sz="1000"/>
           </a:p>
         </p:txBody>
       </p:sp>
@@ -14333,7 +14544,7 @@
   <p:cSld>
     <p:spTree>
       <p:nvGrpSpPr>
-        <p:cNvPr id="242" name="Shape 242"/>
+        <p:cNvPr id="244" name="Shape 244"/>
         <p:cNvGrpSpPr/>
         <p:nvPr/>
       </p:nvGrpSpPr>
@@ -14347,7 +14558,7 @@
       </p:grpSpPr>
       <p:sp>
         <p:nvSpPr>
-          <p:cNvPr id="243" name="Google Shape;243;p37"/>
+          <p:cNvPr id="245" name="Google Shape;245;p37"/>
           <p:cNvSpPr txBox="1"/>
           <p:nvPr>
             <p:ph type="title"/>
@@ -14355,6 +14566,71 @@
         </p:nvSpPr>
         <p:spPr>
           <a:xfrm>
+            <a:off x="0" y="-7"/>
+            <a:ext cx="9144000" cy="2386500"/>
+          </a:xfrm>
+          <a:prstGeom prst="rect">
+            <a:avLst/>
+          </a:prstGeom>
+        </p:spPr>
+        <p:txBody>
+          <a:bodyPr anchorCtr="0" anchor="b" bIns="274300" lIns="91425" spcFirstLastPara="1" rIns="91425" wrap="square" tIns="91425">
+            <a:noAutofit/>
+          </a:bodyPr>
+          <a:lstStyle/>
+          <a:p>
+            <a:pPr indent="0" lvl="0" marL="0" rtl="0" algn="ctr">
+              <a:spcBef>
+                <a:spcPts val="0"/>
+              </a:spcBef>
+              <a:spcAft>
+                <a:spcPts val="0"/>
+              </a:spcAft>
+              <a:buNone/>
+            </a:pPr>
+            <a:r>
+              <a:rPr lang="en"/>
+              <a:t>4. Programs and Projects </a:t>
+            </a:r>
+            <a:endParaRPr/>
+          </a:p>
+        </p:txBody>
+      </p:sp>
+    </p:spTree>
+  </p:cSld>
+  <p:clrMapOvr>
+    <a:masterClrMapping/>
+  </p:clrMapOvr>
+</p:sld>
+</file>
+
+<file path=ppt/slides/slide31.xml><?xml version="1.0" encoding="utf-8"?>
+<p:sld xmlns:a="http://schemas.openxmlformats.org/drawingml/2006/main" xmlns:r="http://schemas.openxmlformats.org/officeDocument/2006/relationships" xmlns:mc="http://schemas.openxmlformats.org/markup-compatibility/2006" xmlns:mv="urn:schemas-microsoft-com:mac:vml" xmlns:p="http://schemas.openxmlformats.org/presentationml/2006/main" xmlns:c="http://schemas.openxmlformats.org/drawingml/2006/chart" xmlns:dgm="http://schemas.openxmlformats.org/drawingml/2006/diagram" xmlns:o="urn:schemas-microsoft-com:office:office" xmlns:v="urn:schemas-microsoft-com:vml" xmlns:pvml="urn:schemas-microsoft-com:office:powerpoint" xmlns:com="http://schemas.openxmlformats.org/drawingml/2006/compatibility" xmlns:p14="http://schemas.microsoft.com/office/powerpoint/2010/main" xmlns:p15="http://schemas.microsoft.com/office/powerpoint/2012/main" xmlns:ahyp="http://schemas.microsoft.com/office/drawing/2018/hyperlinkcolor">
+  <p:cSld>
+    <p:spTree>
+      <p:nvGrpSpPr>
+        <p:cNvPr id="249" name="Shape 249"/>
+        <p:cNvGrpSpPr/>
+        <p:nvPr/>
+      </p:nvGrpSpPr>
+      <p:grpSpPr>
+        <a:xfrm>
+          <a:off x="0" y="0"/>
+          <a:ext cx="0" cy="0"/>
+          <a:chOff x="0" y="0"/>
+          <a:chExt cx="0" cy="0"/>
+        </a:xfrm>
+      </p:grpSpPr>
+      <p:sp>
+        <p:nvSpPr>
+          <p:cNvPr id="250" name="Google Shape;250;p38"/>
+          <p:cNvSpPr txBox="1"/>
+          <p:nvPr>
+            <p:ph type="title"/>
+          </p:nvPr>
+        </p:nvSpPr>
+        <p:spPr>
+          <a:xfrm>
             <a:off x="0" y="0"/>
             <a:ext cx="9144000" cy="685800"/>
           </a:xfrm>
@@ -14387,7 +14663,7 @@
       </p:sp>
       <p:sp>
         <p:nvSpPr>
-          <p:cNvPr id="244" name="Google Shape;244;p37"/>
+          <p:cNvPr id="251" name="Google Shape;251;p38"/>
           <p:cNvSpPr txBox="1"/>
           <p:nvPr>
             <p:ph idx="12" type="sldNum"/>
@@ -14452,7 +14728,7 @@
       </p:sp>
       <p:graphicFrame>
         <p:nvGraphicFramePr>
-          <p:cNvPr id="245" name="Google Shape;245;p37"/>
+          <p:cNvPr id="252" name="Google Shape;252;p38"/>
           <p:cNvGraphicFramePr/>
           <p:nvPr/>
         </p:nvGraphicFramePr>
@@ -14465,7 +14741,7 @@
             <a:tbl>
               <a:tblPr>
                 <a:noFill/>
-                <a:tableStyleId>{6B152514-A711-4921-878E-315DFE35F5D9}</a:tableStyleId>
+                <a:tableStyleId>{318B765E-CCCD-40CA-A58D-B966A8F26E5C}</a:tableStyleId>
               </a:tblPr>
               <a:tblGrid>
                 <a:gridCol w="1689175"/>
@@ -14488,14 +14764,14 @@
                         <a:buNone/>
                       </a:pPr>
                       <a:r>
-                        <a:rPr b="1" lang="en" sz="1800">
+                        <a:rPr b="1" lang="en">
                           <a:solidFill>
                             <a:schemeClr val="lt1"/>
                           </a:solidFill>
                         </a:rPr>
                         <a:t>Role</a:t>
                       </a:r>
-                      <a:endParaRPr b="1" sz="1800">
+                      <a:endParaRPr b="1">
                         <a:solidFill>
                           <a:schemeClr val="lt1"/>
                         </a:solidFill>
@@ -14559,14 +14835,14 @@
                         <a:buNone/>
                       </a:pPr>
                       <a:r>
-                        <a:rPr b="1" lang="en" sz="1800">
+                        <a:rPr b="1" lang="en">
                           <a:solidFill>
                             <a:schemeClr val="lt1"/>
                           </a:solidFill>
                         </a:rPr>
                         <a:t>Level</a:t>
                       </a:r>
-                      <a:endParaRPr b="1" sz="1800">
+                      <a:endParaRPr b="1">
                         <a:solidFill>
                           <a:schemeClr val="lt1"/>
                         </a:solidFill>
@@ -14630,14 +14906,14 @@
                         <a:buNone/>
                       </a:pPr>
                       <a:r>
-                        <a:rPr b="1" lang="en" sz="1800">
+                        <a:rPr b="1" lang="en">
                           <a:solidFill>
                             <a:schemeClr val="lt1"/>
                           </a:solidFill>
                         </a:rPr>
                         <a:t>Purpose</a:t>
                       </a:r>
-                      <a:endParaRPr b="1" sz="1800">
+                      <a:endParaRPr b="1">
                         <a:solidFill>
                           <a:schemeClr val="lt1"/>
                         </a:solidFill>
@@ -15482,12 +15758,12 @@
 </p:sld>
 </file>
 
-<file path=ppt/slides/slide31.xml><?xml version="1.0" encoding="utf-8"?>
+<file path=ppt/slides/slide32.xml><?xml version="1.0" encoding="utf-8"?>
 <p:sld xmlns:a="http://schemas.openxmlformats.org/drawingml/2006/main" xmlns:r="http://schemas.openxmlformats.org/officeDocument/2006/relationships" xmlns:mc="http://schemas.openxmlformats.org/markup-compatibility/2006" xmlns:mv="urn:schemas-microsoft-com:mac:vml" xmlns:p="http://schemas.openxmlformats.org/presentationml/2006/main" xmlns:c="http://schemas.openxmlformats.org/drawingml/2006/chart" xmlns:dgm="http://schemas.openxmlformats.org/drawingml/2006/diagram" xmlns:o="urn:schemas-microsoft-com:office:office" xmlns:v="urn:schemas-microsoft-com:vml" xmlns:pvml="urn:schemas-microsoft-com:office:powerpoint" xmlns:com="http://schemas.openxmlformats.org/drawingml/2006/compatibility" xmlns:p14="http://schemas.microsoft.com/office/powerpoint/2010/main" xmlns:p15="http://schemas.microsoft.com/office/powerpoint/2012/main" xmlns:ahyp="http://schemas.microsoft.com/office/drawing/2018/hyperlinkcolor">
   <p:cSld>
     <p:spTree>
       <p:nvGrpSpPr>
-        <p:cNvPr id="249" name="Shape 249"/>
+        <p:cNvPr id="256" name="Shape 256"/>
         <p:cNvGrpSpPr/>
         <p:nvPr/>
       </p:nvGrpSpPr>
@@ -15501,7 +15777,7 @@
       </p:grpSpPr>
       <p:sp>
         <p:nvSpPr>
-          <p:cNvPr id="250" name="Google Shape;250;p38"/>
+          <p:cNvPr id="257" name="Google Shape;257;p39"/>
           <p:cNvSpPr txBox="1"/>
           <p:nvPr>
             <p:ph type="title"/>
@@ -15541,7 +15817,7 @@
       </p:sp>
       <p:sp>
         <p:nvSpPr>
-          <p:cNvPr id="251" name="Google Shape;251;p38"/>
+          <p:cNvPr id="258" name="Google Shape;258;p39"/>
           <p:cNvSpPr txBox="1"/>
           <p:nvPr>
             <p:ph idx="12" type="sldNum"/>
@@ -15606,7 +15882,7 @@
       </p:sp>
       <p:graphicFrame>
         <p:nvGraphicFramePr>
-          <p:cNvPr id="252" name="Google Shape;252;p38"/>
+          <p:cNvPr id="259" name="Google Shape;259;p39"/>
           <p:cNvGraphicFramePr/>
           <p:nvPr/>
         </p:nvGraphicFramePr>
@@ -15619,7 +15895,7 @@
             <a:tbl>
               <a:tblPr>
                 <a:noFill/>
-                <a:tableStyleId>{6B152514-A711-4921-878E-315DFE35F5D9}</a:tableStyleId>
+                <a:tableStyleId>{318B765E-CCCD-40CA-A58D-B966A8F26E5C}</a:tableStyleId>
               </a:tblPr>
               <a:tblGrid>
                 <a:gridCol w="2932275"/>
@@ -15641,14 +15917,14 @@
                         <a:buNone/>
                       </a:pPr>
                       <a:r>
-                        <a:rPr b="1" lang="en" sz="1800">
+                        <a:rPr b="1" lang="en">
                           <a:solidFill>
                             <a:schemeClr val="lt1"/>
                           </a:solidFill>
                         </a:rPr>
                         <a:t>Role</a:t>
                       </a:r>
-                      <a:endParaRPr b="1" sz="1800">
+                      <a:endParaRPr b="1">
                         <a:solidFill>
                           <a:schemeClr val="lt1"/>
                         </a:solidFill>
@@ -15712,14 +15988,14 @@
                         <a:buNone/>
                       </a:pPr>
                       <a:r>
-                        <a:rPr b="1" lang="en" sz="1800">
+                        <a:rPr b="1" lang="en">
                           <a:solidFill>
                             <a:schemeClr val="lt1"/>
                           </a:solidFill>
                         </a:rPr>
                         <a:t>Example</a:t>
                       </a:r>
-                      <a:endParaRPr b="1" sz="1800">
+                      <a:endParaRPr b="1">
                         <a:solidFill>
                           <a:schemeClr val="lt1"/>
                         </a:solidFill>
@@ -16189,12 +16465,12 @@
 </p:sld>
 </file>
 
-<file path=ppt/slides/slide32.xml><?xml version="1.0" encoding="utf-8"?>
+<file path=ppt/slides/slide33.xml><?xml version="1.0" encoding="utf-8"?>
 <p:sld xmlns:a="http://schemas.openxmlformats.org/drawingml/2006/main" xmlns:r="http://schemas.openxmlformats.org/officeDocument/2006/relationships" xmlns:mc="http://schemas.openxmlformats.org/markup-compatibility/2006" xmlns:mv="urn:schemas-microsoft-com:mac:vml" xmlns:p="http://schemas.openxmlformats.org/presentationml/2006/main" xmlns:c="http://schemas.openxmlformats.org/drawingml/2006/chart" xmlns:dgm="http://schemas.openxmlformats.org/drawingml/2006/diagram" xmlns:o="urn:schemas-microsoft-com:office:office" xmlns:v="urn:schemas-microsoft-com:vml" xmlns:pvml="urn:schemas-microsoft-com:office:powerpoint" xmlns:com="http://schemas.openxmlformats.org/drawingml/2006/compatibility" xmlns:p14="http://schemas.microsoft.com/office/powerpoint/2010/main" xmlns:p15="http://schemas.microsoft.com/office/powerpoint/2012/main" xmlns:ahyp="http://schemas.microsoft.com/office/drawing/2018/hyperlinkcolor">
   <p:cSld>
     <p:spTree>
       <p:nvGrpSpPr>
-        <p:cNvPr id="256" name="Shape 256"/>
+        <p:cNvPr id="263" name="Shape 263"/>
         <p:cNvGrpSpPr/>
         <p:nvPr/>
       </p:nvGrpSpPr>
@@ -16208,7 +16484,7 @@
       </p:grpSpPr>
       <p:sp>
         <p:nvSpPr>
-          <p:cNvPr id="257" name="Google Shape;257;p39"/>
+          <p:cNvPr id="264" name="Google Shape;264;p40"/>
           <p:cNvSpPr txBox="1"/>
           <p:nvPr>
             <p:ph type="title"/>
@@ -16248,7 +16524,7 @@
       </p:sp>
       <p:sp>
         <p:nvSpPr>
-          <p:cNvPr id="258" name="Google Shape;258;p39"/>
+          <p:cNvPr id="265" name="Google Shape;265;p40"/>
           <p:cNvSpPr txBox="1"/>
           <p:nvPr>
             <p:ph idx="12" type="sldNum"/>
@@ -16313,7 +16589,7 @@
       </p:sp>
       <p:graphicFrame>
         <p:nvGraphicFramePr>
-          <p:cNvPr id="259" name="Google Shape;259;p39"/>
+          <p:cNvPr id="266" name="Google Shape;266;p40"/>
           <p:cNvGraphicFramePr/>
           <p:nvPr/>
         </p:nvGraphicFramePr>
@@ -16326,7 +16602,7 @@
             <a:tbl>
               <a:tblPr>
                 <a:noFill/>
-                <a:tableStyleId>{6B152514-A711-4921-878E-315DFE35F5D9}</a:tableStyleId>
+                <a:tableStyleId>{318B765E-CCCD-40CA-A58D-B966A8F26E5C}</a:tableStyleId>
               </a:tblPr>
               <a:tblGrid>
                 <a:gridCol w="2932275"/>
@@ -16348,14 +16624,14 @@
                         <a:buNone/>
                       </a:pPr>
                       <a:r>
-                        <a:rPr b="1" lang="en" sz="1800">
+                        <a:rPr b="1" lang="en">
                           <a:solidFill>
                             <a:schemeClr val="lt1"/>
                           </a:solidFill>
                         </a:rPr>
                         <a:t>Level</a:t>
                       </a:r>
-                      <a:endParaRPr b="1" sz="1800">
+                      <a:endParaRPr b="1">
                         <a:solidFill>
                           <a:schemeClr val="lt1"/>
                         </a:solidFill>
@@ -16419,14 +16695,14 @@
                         <a:buNone/>
                       </a:pPr>
                       <a:r>
-                        <a:rPr b="1" lang="en" sz="1800">
+                        <a:rPr b="1" lang="en">
                           <a:solidFill>
                             <a:schemeClr val="lt1"/>
                           </a:solidFill>
                         </a:rPr>
                         <a:t>Example</a:t>
                       </a:r>
-                      <a:endParaRPr b="1" sz="1800">
+                      <a:endParaRPr b="1">
                         <a:solidFill>
                           <a:schemeClr val="lt1"/>
                         </a:solidFill>
@@ -16948,12 +17224,12 @@
 </p:sld>
 </file>
 
-<file path=ppt/slides/slide33.xml><?xml version="1.0" encoding="utf-8"?>
+<file path=ppt/slides/slide34.xml><?xml version="1.0" encoding="utf-8"?>
 <p:sld xmlns:a="http://schemas.openxmlformats.org/drawingml/2006/main" xmlns:r="http://schemas.openxmlformats.org/officeDocument/2006/relationships" xmlns:mc="http://schemas.openxmlformats.org/markup-compatibility/2006" xmlns:mv="urn:schemas-microsoft-com:mac:vml" xmlns:p="http://schemas.openxmlformats.org/presentationml/2006/main" xmlns:c="http://schemas.openxmlformats.org/drawingml/2006/chart" xmlns:dgm="http://schemas.openxmlformats.org/drawingml/2006/diagram" xmlns:o="urn:schemas-microsoft-com:office:office" xmlns:v="urn:schemas-microsoft-com:vml" xmlns:pvml="urn:schemas-microsoft-com:office:powerpoint" xmlns:com="http://schemas.openxmlformats.org/drawingml/2006/compatibility" xmlns:p14="http://schemas.microsoft.com/office/powerpoint/2010/main" xmlns:p15="http://schemas.microsoft.com/office/powerpoint/2012/main" xmlns:ahyp="http://schemas.microsoft.com/office/drawing/2018/hyperlinkcolor">
   <p:cSld>
     <p:spTree>
       <p:nvGrpSpPr>
-        <p:cNvPr id="263" name="Shape 263"/>
+        <p:cNvPr id="270" name="Shape 270"/>
         <p:cNvGrpSpPr/>
         <p:nvPr/>
       </p:nvGrpSpPr>
@@ -16967,7 +17243,7 @@
       </p:grpSpPr>
       <p:sp>
         <p:nvSpPr>
-          <p:cNvPr id="264" name="Google Shape;264;p40"/>
+          <p:cNvPr id="271" name="Google Shape;271;p41"/>
           <p:cNvSpPr txBox="1"/>
           <p:nvPr>
             <p:ph type="title"/>
@@ -17007,7 +17283,7 @@
       </p:sp>
       <p:sp>
         <p:nvSpPr>
-          <p:cNvPr id="265" name="Google Shape;265;p40"/>
+          <p:cNvPr id="272" name="Google Shape;272;p41"/>
           <p:cNvSpPr txBox="1"/>
           <p:nvPr>
             <p:ph idx="12" type="sldNum"/>
@@ -17072,7 +17348,7 @@
       </p:sp>
       <p:graphicFrame>
         <p:nvGraphicFramePr>
-          <p:cNvPr id="266" name="Google Shape;266;p40"/>
+          <p:cNvPr id="273" name="Google Shape;273;p41"/>
           <p:cNvGraphicFramePr/>
           <p:nvPr/>
         </p:nvGraphicFramePr>
@@ -17085,7 +17361,7 @@
             <a:tbl>
               <a:tblPr>
                 <a:noFill/>
-                <a:tableStyleId>{6B152514-A711-4921-878E-315DFE35F5D9}</a:tableStyleId>
+                <a:tableStyleId>{318B765E-CCCD-40CA-A58D-B966A8F26E5C}</a:tableStyleId>
               </a:tblPr>
               <a:tblGrid>
                 <a:gridCol w="2932275"/>
@@ -17107,14 +17383,14 @@
                         <a:buNone/>
                       </a:pPr>
                       <a:r>
-                        <a:rPr b="1" lang="en" sz="1800">
+                        <a:rPr b="1" lang="en">
                           <a:solidFill>
                             <a:schemeClr val="lt1"/>
                           </a:solidFill>
                         </a:rPr>
                         <a:t>Role</a:t>
                       </a:r>
-                      <a:endParaRPr b="1" sz="1800">
+                      <a:endParaRPr b="1">
                         <a:solidFill>
                           <a:schemeClr val="lt1"/>
                         </a:solidFill>
@@ -17178,14 +17454,14 @@
                         <a:buNone/>
                       </a:pPr>
                       <a:r>
-                        <a:rPr b="1" lang="en" sz="1800">
+                        <a:rPr b="1" lang="en">
                           <a:solidFill>
                             <a:schemeClr val="lt1"/>
                           </a:solidFill>
                         </a:rPr>
                         <a:t>Responsibility</a:t>
                       </a:r>
-                      <a:endParaRPr b="1" sz="1800">
+                      <a:endParaRPr b="1">
                         <a:solidFill>
                           <a:schemeClr val="lt1"/>
                         </a:solidFill>
@@ -17679,12 +17955,12 @@
 </p:sld>
 </file>
 
-<file path=ppt/slides/slide34.xml><?xml version="1.0" encoding="utf-8"?>
+<file path=ppt/slides/slide35.xml><?xml version="1.0" encoding="utf-8"?>
 <p:sld xmlns:a="http://schemas.openxmlformats.org/drawingml/2006/main" xmlns:r="http://schemas.openxmlformats.org/officeDocument/2006/relationships" xmlns:mc="http://schemas.openxmlformats.org/markup-compatibility/2006" xmlns:mv="urn:schemas-microsoft-com:mac:vml" xmlns:p="http://schemas.openxmlformats.org/presentationml/2006/main" xmlns:c="http://schemas.openxmlformats.org/drawingml/2006/chart" xmlns:dgm="http://schemas.openxmlformats.org/drawingml/2006/diagram" xmlns:o="urn:schemas-microsoft-com:office:office" xmlns:v="urn:schemas-microsoft-com:vml" xmlns:pvml="urn:schemas-microsoft-com:office:powerpoint" xmlns:com="http://schemas.openxmlformats.org/drawingml/2006/compatibility" xmlns:p14="http://schemas.microsoft.com/office/powerpoint/2010/main" xmlns:p15="http://schemas.microsoft.com/office/powerpoint/2012/main" xmlns:ahyp="http://schemas.microsoft.com/office/drawing/2018/hyperlinkcolor">
   <p:cSld>
     <p:spTree>
       <p:nvGrpSpPr>
-        <p:cNvPr id="270" name="Shape 270"/>
+        <p:cNvPr id="277" name="Shape 277"/>
         <p:cNvGrpSpPr/>
         <p:nvPr/>
       </p:nvGrpSpPr>
@@ -17698,7 +17974,7 @@
       </p:grpSpPr>
       <p:sp>
         <p:nvSpPr>
-          <p:cNvPr id="271" name="Google Shape;271;p41"/>
+          <p:cNvPr id="278" name="Google Shape;278;p42"/>
           <p:cNvSpPr txBox="1"/>
           <p:nvPr>
             <p:ph type="title"/>
@@ -17744,12 +18020,12 @@
 </p:sld>
 </file>
 
-<file path=ppt/slides/slide35.xml><?xml version="1.0" encoding="utf-8"?>
+<file path=ppt/slides/slide36.xml><?xml version="1.0" encoding="utf-8"?>
 <p:sld xmlns:a="http://schemas.openxmlformats.org/drawingml/2006/main" xmlns:r="http://schemas.openxmlformats.org/officeDocument/2006/relationships" xmlns:mc="http://schemas.openxmlformats.org/markup-compatibility/2006" xmlns:mv="urn:schemas-microsoft-com:mac:vml" xmlns:p="http://schemas.openxmlformats.org/presentationml/2006/main" xmlns:c="http://schemas.openxmlformats.org/drawingml/2006/chart" xmlns:dgm="http://schemas.openxmlformats.org/drawingml/2006/diagram" xmlns:o="urn:schemas-microsoft-com:office:office" xmlns:v="urn:schemas-microsoft-com:vml" xmlns:pvml="urn:schemas-microsoft-com:office:powerpoint" xmlns:com="http://schemas.openxmlformats.org/drawingml/2006/compatibility" xmlns:p14="http://schemas.microsoft.com/office/powerpoint/2010/main" xmlns:p15="http://schemas.microsoft.com/office/powerpoint/2012/main" xmlns:ahyp="http://schemas.microsoft.com/office/drawing/2018/hyperlinkcolor">
   <p:cSld>
     <p:spTree>
       <p:nvGrpSpPr>
-        <p:cNvPr id="275" name="Shape 275"/>
+        <p:cNvPr id="282" name="Shape 282"/>
         <p:cNvGrpSpPr/>
         <p:nvPr/>
       </p:nvGrpSpPr>
@@ -17763,7 +18039,7 @@
       </p:grpSpPr>
       <p:sp>
         <p:nvSpPr>
-          <p:cNvPr id="276" name="Google Shape;276;p42"/>
+          <p:cNvPr id="283" name="Google Shape;283;p43"/>
           <p:cNvSpPr txBox="1"/>
           <p:nvPr>
             <p:ph type="title"/>
@@ -17803,7 +18079,7 @@
       </p:sp>
       <p:sp>
         <p:nvSpPr>
-          <p:cNvPr id="277" name="Google Shape;277;p42"/>
+          <p:cNvPr id="284" name="Google Shape;284;p43"/>
           <p:cNvSpPr txBox="1"/>
           <p:nvPr>
             <p:ph idx="12" type="sldNum"/>
@@ -17868,7 +18144,7 @@
       </p:sp>
       <p:sp>
         <p:nvSpPr>
-          <p:cNvPr id="278" name="Google Shape;278;p42"/>
+          <p:cNvPr id="285" name="Google Shape;285;p43"/>
           <p:cNvSpPr txBox="1"/>
           <p:nvPr/>
         </p:nvSpPr>
@@ -17923,7 +18199,7 @@
       </p:sp>
       <p:pic>
         <p:nvPicPr>
-          <p:cNvPr id="279" name="Google Shape;279;p42"/>
+          <p:cNvPr id="286" name="Google Shape;286;p43"/>
           <p:cNvPicPr preferRelativeResize="0"/>
           <p:nvPr/>
         </p:nvPicPr>
@@ -17939,219 +18215,6 @@
           <a:xfrm>
             <a:off x="743331" y="914400"/>
             <a:ext cx="7657338" cy="3657600"/>
-          </a:xfrm>
-          <a:prstGeom prst="rect">
-            <a:avLst/>
-          </a:prstGeom>
-          <a:noFill/>
-          <a:ln>
-            <a:noFill/>
-          </a:ln>
-        </p:spPr>
-      </p:pic>
-    </p:spTree>
-  </p:cSld>
-  <p:clrMapOvr>
-    <a:masterClrMapping/>
-  </p:clrMapOvr>
-</p:sld>
-</file>
-
-<file path=ppt/slides/slide36.xml><?xml version="1.0" encoding="utf-8"?>
-<p:sld xmlns:a="http://schemas.openxmlformats.org/drawingml/2006/main" xmlns:r="http://schemas.openxmlformats.org/officeDocument/2006/relationships" xmlns:mc="http://schemas.openxmlformats.org/markup-compatibility/2006" xmlns:mv="urn:schemas-microsoft-com:mac:vml" xmlns:p="http://schemas.openxmlformats.org/presentationml/2006/main" xmlns:c="http://schemas.openxmlformats.org/drawingml/2006/chart" xmlns:dgm="http://schemas.openxmlformats.org/drawingml/2006/diagram" xmlns:o="urn:schemas-microsoft-com:office:office" xmlns:v="urn:schemas-microsoft-com:vml" xmlns:pvml="urn:schemas-microsoft-com:office:powerpoint" xmlns:com="http://schemas.openxmlformats.org/drawingml/2006/compatibility" xmlns:p14="http://schemas.microsoft.com/office/powerpoint/2010/main" xmlns:p15="http://schemas.microsoft.com/office/powerpoint/2012/main" xmlns:ahyp="http://schemas.microsoft.com/office/drawing/2018/hyperlinkcolor">
-  <p:cSld>
-    <p:spTree>
-      <p:nvGrpSpPr>
-        <p:cNvPr id="283" name="Shape 283"/>
-        <p:cNvGrpSpPr/>
-        <p:nvPr/>
-      </p:nvGrpSpPr>
-      <p:grpSpPr>
-        <a:xfrm>
-          <a:off x="0" y="0"/>
-          <a:ext cx="0" cy="0"/>
-          <a:chOff x="0" y="0"/>
-          <a:chExt cx="0" cy="0"/>
-        </a:xfrm>
-      </p:grpSpPr>
-      <p:sp>
-        <p:nvSpPr>
-          <p:cNvPr id="284" name="Google Shape;284;p43"/>
-          <p:cNvSpPr txBox="1"/>
-          <p:nvPr>
-            <p:ph type="title"/>
-          </p:nvPr>
-        </p:nvSpPr>
-        <p:spPr>
-          <a:xfrm>
-            <a:off x="0" y="0"/>
-            <a:ext cx="9144000" cy="685800"/>
-          </a:xfrm>
-          <a:prstGeom prst="rect">
-            <a:avLst/>
-          </a:prstGeom>
-        </p:spPr>
-        <p:txBody>
-          <a:bodyPr anchorCtr="0" anchor="ctr" bIns="0" lIns="274300" spcFirstLastPara="1" rIns="0" wrap="square" tIns="0">
-            <a:noAutofit/>
-          </a:bodyPr>
-          <a:lstStyle/>
-          <a:p>
-            <a:pPr indent="0" lvl="0" marL="0" rtl="0" algn="l">
-              <a:spcBef>
-                <a:spcPts val="0"/>
-              </a:spcBef>
-              <a:spcAft>
-                <a:spcPts val="0"/>
-              </a:spcAft>
-              <a:buNone/>
-            </a:pPr>
-            <a:r>
-              <a:rPr lang="en"/>
-              <a:t>The ACM’s A.M. Turing Award [1] (1999)</a:t>
-            </a:r>
-            <a:endParaRPr/>
-          </a:p>
-        </p:txBody>
-      </p:sp>
-      <p:sp>
-        <p:nvSpPr>
-          <p:cNvPr id="285" name="Google Shape;285;p43"/>
-          <p:cNvSpPr txBox="1"/>
-          <p:nvPr>
-            <p:ph idx="12" type="sldNum"/>
-          </p:nvPr>
-        </p:nvSpPr>
-        <p:spPr>
-          <a:xfrm>
-            <a:off x="7315209" y="4229101"/>
-            <a:ext cx="1828800" cy="914400"/>
-          </a:xfrm>
-          <a:prstGeom prst="rect">
-            <a:avLst/>
-          </a:prstGeom>
-        </p:spPr>
-        <p:txBody>
-          <a:bodyPr anchorCtr="0" anchor="b" bIns="91425" lIns="91425" spcFirstLastPara="1" rIns="91425" wrap="square" tIns="91425">
-            <a:noAutofit/>
-          </a:bodyPr>
-          <a:lstStyle/>
-          <a:p>
-            <a:pPr indent="0" lvl="0" marL="0" rtl="0" algn="r">
-              <a:spcBef>
-                <a:spcPts val="0"/>
-              </a:spcBef>
-              <a:spcAft>
-                <a:spcPts val="0"/>
-              </a:spcAft>
-              <a:buNone/>
-            </a:pPr>
-            <a:fld id="{00000000-1234-1234-1234-123412341234}" type="slidenum">
-              <a:rPr lang="en"/>
-              <a:t>‹#›</a:t>
-            </a:fld>
-            <a:endParaRPr/>
-          </a:p>
-          <a:p>
-            <a:pPr indent="0" lvl="0" marL="0" rtl="0" algn="r">
-              <a:spcBef>
-                <a:spcPts val="0"/>
-              </a:spcBef>
-              <a:spcAft>
-                <a:spcPts val="0"/>
-              </a:spcAft>
-              <a:buNone/>
-            </a:pPr>
-            <a:r>
-              <a:rPr b="0" lang="en" sz="1000" u="sng">
-                <a:solidFill>
-                  <a:schemeClr val="hlink"/>
-                </a:solidFill>
-                <a:hlinkClick r:id="rId3"/>
-              </a:rPr>
-              <a:t>uni1.de/nyt</a:t>
-            </a:r>
-            <a:r>
-              <a:rPr b="0" lang="en" sz="1000"/>
-              <a:t> </a:t>
-            </a:r>
-            <a:endParaRPr b="0" sz="1000"/>
-          </a:p>
-        </p:txBody>
-      </p:sp>
-      <p:sp>
-        <p:nvSpPr>
-          <p:cNvPr id="286" name="Google Shape;286;p43"/>
-          <p:cNvSpPr txBox="1"/>
-          <p:nvPr/>
-        </p:nvSpPr>
-        <p:spPr>
-          <a:xfrm>
-            <a:off x="0" y="4229100"/>
-            <a:ext cx="7315200" cy="914400"/>
-          </a:xfrm>
-          <a:prstGeom prst="rect">
-            <a:avLst/>
-          </a:prstGeom>
-          <a:noFill/>
-          <a:ln>
-            <a:noFill/>
-          </a:ln>
-        </p:spPr>
-        <p:txBody>
-          <a:bodyPr anchorCtr="0" anchor="b" bIns="91425" lIns="91425" spcFirstLastPara="1" rIns="91425" wrap="square" tIns="91425">
-            <a:noAutofit/>
-          </a:bodyPr>
-          <a:lstStyle/>
-          <a:p>
-            <a:pPr indent="0" lvl="0" marL="0" rtl="0" algn="l">
-              <a:spcBef>
-                <a:spcPts val="0"/>
-              </a:spcBef>
-              <a:spcAft>
-                <a:spcPts val="0"/>
-              </a:spcAft>
-              <a:buNone/>
-            </a:pPr>
-            <a:r>
-              <a:rPr lang="en"/>
-              <a:t>[1] See </a:t>
-            </a:r>
-            <a:r>
-              <a:rPr lang="en" u="sng">
-                <a:solidFill>
-                  <a:schemeClr val="hlink"/>
-                </a:solidFill>
-                <a:hlinkClick r:id="rId4"/>
-              </a:rPr>
-              <a:t>https://amturing.acm.org/</a:t>
-            </a:r>
-            <a:r>
-              <a:rPr lang="en"/>
-              <a:t> </a:t>
-            </a:r>
-            <a:endParaRPr/>
-          </a:p>
-        </p:txBody>
-      </p:sp>
-      <p:pic>
-        <p:nvPicPr>
-          <p:cNvPr id="287" name="Google Shape;287;p43"/>
-          <p:cNvPicPr preferRelativeResize="0"/>
-          <p:nvPr/>
-        </p:nvPicPr>
-        <p:blipFill>
-          <a:blip r:embed="rId5">
-            <a:alphaModFix/>
-          </a:blip>
-          <a:stretch>
-            <a:fillRect/>
-          </a:stretch>
-        </p:blipFill>
-        <p:spPr>
-          <a:xfrm>
-            <a:off x="274320" y="914400"/>
-            <a:ext cx="8595359" cy="3438144"/>
           </a:xfrm>
           <a:prstGeom prst="rect">
             <a:avLst/>
@@ -18175,7 +18238,220 @@
   <p:cSld>
     <p:spTree>
       <p:nvGrpSpPr>
-        <p:cNvPr id="291" name="Shape 291"/>
+        <p:cNvPr id="290" name="Shape 290"/>
+        <p:cNvGrpSpPr/>
+        <p:nvPr/>
+      </p:nvGrpSpPr>
+      <p:grpSpPr>
+        <a:xfrm>
+          <a:off x="0" y="0"/>
+          <a:ext cx="0" cy="0"/>
+          <a:chOff x="0" y="0"/>
+          <a:chExt cx="0" cy="0"/>
+        </a:xfrm>
+      </p:grpSpPr>
+      <p:sp>
+        <p:nvSpPr>
+          <p:cNvPr id="291" name="Google Shape;291;p44"/>
+          <p:cNvSpPr txBox="1"/>
+          <p:nvPr>
+            <p:ph type="title"/>
+          </p:nvPr>
+        </p:nvSpPr>
+        <p:spPr>
+          <a:xfrm>
+            <a:off x="0" y="0"/>
+            <a:ext cx="9144000" cy="685800"/>
+          </a:xfrm>
+          <a:prstGeom prst="rect">
+            <a:avLst/>
+          </a:prstGeom>
+        </p:spPr>
+        <p:txBody>
+          <a:bodyPr anchorCtr="0" anchor="ctr" bIns="0" lIns="274300" spcFirstLastPara="1" rIns="0" wrap="square" tIns="0">
+            <a:noAutofit/>
+          </a:bodyPr>
+          <a:lstStyle/>
+          <a:p>
+            <a:pPr indent="0" lvl="0" marL="0" rtl="0" algn="l">
+              <a:spcBef>
+                <a:spcPts val="0"/>
+              </a:spcBef>
+              <a:spcAft>
+                <a:spcPts val="0"/>
+              </a:spcAft>
+              <a:buNone/>
+            </a:pPr>
+            <a:r>
+              <a:rPr lang="en"/>
+              <a:t>The ACM’s A.M. Turing Award [1] (1999)</a:t>
+            </a:r>
+            <a:endParaRPr/>
+          </a:p>
+        </p:txBody>
+      </p:sp>
+      <p:sp>
+        <p:nvSpPr>
+          <p:cNvPr id="292" name="Google Shape;292;p44"/>
+          <p:cNvSpPr txBox="1"/>
+          <p:nvPr>
+            <p:ph idx="12" type="sldNum"/>
+          </p:nvPr>
+        </p:nvSpPr>
+        <p:spPr>
+          <a:xfrm>
+            <a:off x="7315209" y="4229101"/>
+            <a:ext cx="1828800" cy="914400"/>
+          </a:xfrm>
+          <a:prstGeom prst="rect">
+            <a:avLst/>
+          </a:prstGeom>
+        </p:spPr>
+        <p:txBody>
+          <a:bodyPr anchorCtr="0" anchor="b" bIns="91425" lIns="91425" spcFirstLastPara="1" rIns="91425" wrap="square" tIns="91425">
+            <a:noAutofit/>
+          </a:bodyPr>
+          <a:lstStyle/>
+          <a:p>
+            <a:pPr indent="0" lvl="0" marL="0" rtl="0" algn="r">
+              <a:spcBef>
+                <a:spcPts val="0"/>
+              </a:spcBef>
+              <a:spcAft>
+                <a:spcPts val="0"/>
+              </a:spcAft>
+              <a:buNone/>
+            </a:pPr>
+            <a:fld id="{00000000-1234-1234-1234-123412341234}" type="slidenum">
+              <a:rPr lang="en"/>
+              <a:t>‹#›</a:t>
+            </a:fld>
+            <a:endParaRPr/>
+          </a:p>
+          <a:p>
+            <a:pPr indent="0" lvl="0" marL="0" rtl="0" algn="r">
+              <a:spcBef>
+                <a:spcPts val="0"/>
+              </a:spcBef>
+              <a:spcAft>
+                <a:spcPts val="0"/>
+              </a:spcAft>
+              <a:buNone/>
+            </a:pPr>
+            <a:r>
+              <a:rPr b="0" lang="en" sz="1000" u="sng">
+                <a:solidFill>
+                  <a:schemeClr val="hlink"/>
+                </a:solidFill>
+                <a:hlinkClick r:id="rId3"/>
+              </a:rPr>
+              <a:t>uni1.de/nyt</a:t>
+            </a:r>
+            <a:r>
+              <a:rPr b="0" lang="en" sz="1000"/>
+              <a:t> </a:t>
+            </a:r>
+            <a:endParaRPr b="0" sz="1000"/>
+          </a:p>
+        </p:txBody>
+      </p:sp>
+      <p:sp>
+        <p:nvSpPr>
+          <p:cNvPr id="293" name="Google Shape;293;p44"/>
+          <p:cNvSpPr txBox="1"/>
+          <p:nvPr/>
+        </p:nvSpPr>
+        <p:spPr>
+          <a:xfrm>
+            <a:off x="0" y="4229100"/>
+            <a:ext cx="7315200" cy="914400"/>
+          </a:xfrm>
+          <a:prstGeom prst="rect">
+            <a:avLst/>
+          </a:prstGeom>
+          <a:noFill/>
+          <a:ln>
+            <a:noFill/>
+          </a:ln>
+        </p:spPr>
+        <p:txBody>
+          <a:bodyPr anchorCtr="0" anchor="b" bIns="91425" lIns="91425" spcFirstLastPara="1" rIns="91425" wrap="square" tIns="91425">
+            <a:noAutofit/>
+          </a:bodyPr>
+          <a:lstStyle/>
+          <a:p>
+            <a:pPr indent="0" lvl="0" marL="0" rtl="0" algn="l">
+              <a:spcBef>
+                <a:spcPts val="0"/>
+              </a:spcBef>
+              <a:spcAft>
+                <a:spcPts val="0"/>
+              </a:spcAft>
+              <a:buNone/>
+            </a:pPr>
+            <a:r>
+              <a:rPr lang="en"/>
+              <a:t>[1] See </a:t>
+            </a:r>
+            <a:r>
+              <a:rPr lang="en" u="sng">
+                <a:solidFill>
+                  <a:schemeClr val="hlink"/>
+                </a:solidFill>
+                <a:hlinkClick r:id="rId4"/>
+              </a:rPr>
+              <a:t>https://amturing.acm.org/</a:t>
+            </a:r>
+            <a:r>
+              <a:rPr lang="en"/>
+              <a:t> </a:t>
+            </a:r>
+            <a:endParaRPr/>
+          </a:p>
+        </p:txBody>
+      </p:sp>
+      <p:pic>
+        <p:nvPicPr>
+          <p:cNvPr id="294" name="Google Shape;294;p44"/>
+          <p:cNvPicPr preferRelativeResize="0"/>
+          <p:nvPr/>
+        </p:nvPicPr>
+        <p:blipFill>
+          <a:blip r:embed="rId5">
+            <a:alphaModFix/>
+          </a:blip>
+          <a:stretch>
+            <a:fillRect/>
+          </a:stretch>
+        </p:blipFill>
+        <p:spPr>
+          <a:xfrm>
+            <a:off x="274320" y="914400"/>
+            <a:ext cx="8595359" cy="3438144"/>
+          </a:xfrm>
+          <a:prstGeom prst="rect">
+            <a:avLst/>
+          </a:prstGeom>
+          <a:noFill/>
+          <a:ln>
+            <a:noFill/>
+          </a:ln>
+        </p:spPr>
+      </p:pic>
+    </p:spTree>
+  </p:cSld>
+  <p:clrMapOvr>
+    <a:masterClrMapping/>
+  </p:clrMapOvr>
+</p:sld>
+</file>
+
+<file path=ppt/slides/slide38.xml><?xml version="1.0" encoding="utf-8"?>
+<p:sld xmlns:a="http://schemas.openxmlformats.org/drawingml/2006/main" xmlns:r="http://schemas.openxmlformats.org/officeDocument/2006/relationships" xmlns:mc="http://schemas.openxmlformats.org/markup-compatibility/2006" xmlns:mv="urn:schemas-microsoft-com:mac:vml" xmlns:p="http://schemas.openxmlformats.org/presentationml/2006/main" xmlns:c="http://schemas.openxmlformats.org/drawingml/2006/chart" xmlns:dgm="http://schemas.openxmlformats.org/drawingml/2006/diagram" xmlns:o="urn:schemas-microsoft-com:office:office" xmlns:v="urn:schemas-microsoft-com:vml" xmlns:pvml="urn:schemas-microsoft-com:office:powerpoint" xmlns:com="http://schemas.openxmlformats.org/drawingml/2006/compatibility" xmlns:p14="http://schemas.microsoft.com/office/powerpoint/2010/main" xmlns:p15="http://schemas.microsoft.com/office/powerpoint/2012/main" xmlns:ahyp="http://schemas.microsoft.com/office/drawing/2018/hyperlinkcolor">
+  <p:cSld>
+    <p:spTree>
+      <p:nvGrpSpPr>
+        <p:cNvPr id="298" name="Shape 298"/>
         <p:cNvGrpSpPr/>
         <p:nvPr/>
       </p:nvGrpSpPr>
@@ -18189,7 +18465,7 @@
       </p:grpSpPr>
       <p:graphicFrame>
         <p:nvGraphicFramePr>
-          <p:cNvPr id="292" name="Google Shape;292;p44"/>
+          <p:cNvPr id="299" name="Google Shape;299;p45"/>
           <p:cNvGraphicFramePr/>
           <p:nvPr/>
         </p:nvGraphicFramePr>
@@ -18202,7 +18478,7 @@
             <a:tbl>
               <a:tblPr>
                 <a:noFill/>
-                <a:tableStyleId>{6B152514-A711-4921-878E-315DFE35F5D9}</a:tableStyleId>
+                <a:tableStyleId>{318B765E-CCCD-40CA-A58D-B966A8F26E5C}</a:tableStyleId>
               </a:tblPr>
               <a:tblGrid>
                 <a:gridCol w="8595350"/>
@@ -18856,7 +19132,7 @@
       </p:graphicFrame>
       <p:sp>
         <p:nvSpPr>
-          <p:cNvPr id="293" name="Google Shape;293;p44"/>
+          <p:cNvPr id="300" name="Google Shape;300;p45"/>
           <p:cNvSpPr txBox="1"/>
           <p:nvPr/>
         </p:nvSpPr>
@@ -18911,7 +19187,7 @@
       </p:sp>
       <p:sp>
         <p:nvSpPr>
-          <p:cNvPr id="294" name="Google Shape;294;p44"/>
+          <p:cNvPr id="301" name="Google Shape;301;p45"/>
           <p:cNvSpPr txBox="1"/>
           <p:nvPr>
             <p:ph type="title"/>
@@ -18951,7 +19227,7 @@
       </p:sp>
       <p:sp>
         <p:nvSpPr>
-          <p:cNvPr id="295" name="Google Shape;295;p44"/>
+          <p:cNvPr id="302" name="Google Shape;302;p45"/>
           <p:cNvSpPr txBox="1"/>
           <p:nvPr>
             <p:ph idx="12" type="sldNum"/>
@@ -19016,7 +19292,7 @@
       </p:sp>
       <p:pic>
         <p:nvPicPr>
-          <p:cNvPr id="296" name="Google Shape;296;p44"/>
+          <p:cNvPr id="303" name="Google Shape;303;p45"/>
           <p:cNvPicPr preferRelativeResize="0"/>
           <p:nvPr/>
         </p:nvPicPr>
@@ -19050,12 +19326,12 @@
 </p:sld>
 </file>
 
-<file path=ppt/slides/slide38.xml><?xml version="1.0" encoding="utf-8"?>
+<file path=ppt/slides/slide39.xml><?xml version="1.0" encoding="utf-8"?>
 <p:sld xmlns:a="http://schemas.openxmlformats.org/drawingml/2006/main" xmlns:r="http://schemas.openxmlformats.org/officeDocument/2006/relationships" xmlns:mc="http://schemas.openxmlformats.org/markup-compatibility/2006" xmlns:mv="urn:schemas-microsoft-com:mac:vml" xmlns:p="http://schemas.openxmlformats.org/presentationml/2006/main" xmlns:c="http://schemas.openxmlformats.org/drawingml/2006/chart" xmlns:dgm="http://schemas.openxmlformats.org/drawingml/2006/diagram" xmlns:o="urn:schemas-microsoft-com:office:office" xmlns:v="urn:schemas-microsoft-com:vml" xmlns:pvml="urn:schemas-microsoft-com:office:powerpoint" xmlns:com="http://schemas.openxmlformats.org/drawingml/2006/compatibility" xmlns:p14="http://schemas.microsoft.com/office/powerpoint/2010/main" xmlns:p15="http://schemas.microsoft.com/office/powerpoint/2012/main" xmlns:ahyp="http://schemas.microsoft.com/office/drawing/2018/hyperlinkcolor">
   <p:cSld>
     <p:spTree>
       <p:nvGrpSpPr>
-        <p:cNvPr id="300" name="Shape 300"/>
+        <p:cNvPr id="307" name="Shape 307"/>
         <p:cNvGrpSpPr/>
         <p:nvPr/>
       </p:nvGrpSpPr>
@@ -19069,7 +19345,7 @@
       </p:grpSpPr>
       <p:sp>
         <p:nvSpPr>
-          <p:cNvPr id="301" name="Google Shape;301;p45"/>
+          <p:cNvPr id="308" name="Google Shape;308;p46"/>
           <p:cNvSpPr txBox="1"/>
           <p:nvPr>
             <p:ph type="title"/>
@@ -19102,192 +19378,6 @@
             <a:r>
               <a:rPr lang="en"/>
               <a:t>6. Research Ethics</a:t>
-            </a:r>
-            <a:endParaRPr/>
-          </a:p>
-        </p:txBody>
-      </p:sp>
-    </p:spTree>
-  </p:cSld>
-  <p:clrMapOvr>
-    <a:masterClrMapping/>
-  </p:clrMapOvr>
-</p:sld>
-</file>
-
-<file path=ppt/slides/slide39.xml><?xml version="1.0" encoding="utf-8"?>
-<p:sld xmlns:a="http://schemas.openxmlformats.org/drawingml/2006/main" xmlns:r="http://schemas.openxmlformats.org/officeDocument/2006/relationships" xmlns:mc="http://schemas.openxmlformats.org/markup-compatibility/2006" xmlns:mv="urn:schemas-microsoft-com:mac:vml" xmlns:p="http://schemas.openxmlformats.org/presentationml/2006/main" xmlns:c="http://schemas.openxmlformats.org/drawingml/2006/chart" xmlns:dgm="http://schemas.openxmlformats.org/drawingml/2006/diagram" xmlns:o="urn:schemas-microsoft-com:office:office" xmlns:v="urn:schemas-microsoft-com:vml" xmlns:pvml="urn:schemas-microsoft-com:office:powerpoint" xmlns:com="http://schemas.openxmlformats.org/drawingml/2006/compatibility" xmlns:p14="http://schemas.microsoft.com/office/powerpoint/2010/main" xmlns:p15="http://schemas.microsoft.com/office/powerpoint/2012/main" xmlns:ahyp="http://schemas.microsoft.com/office/drawing/2018/hyperlinkcolor">
-  <p:cSld>
-    <p:spTree>
-      <p:nvGrpSpPr>
-        <p:cNvPr id="305" name="Shape 305"/>
-        <p:cNvGrpSpPr/>
-        <p:nvPr/>
-      </p:nvGrpSpPr>
-      <p:grpSpPr>
-        <a:xfrm>
-          <a:off x="0" y="0"/>
-          <a:ext cx="0" cy="0"/>
-          <a:chOff x="0" y="0"/>
-          <a:chExt cx="0" cy="0"/>
-        </a:xfrm>
-      </p:grpSpPr>
-      <p:sp>
-        <p:nvSpPr>
-          <p:cNvPr id="306" name="Google Shape;306;p46"/>
-          <p:cNvSpPr txBox="1"/>
-          <p:nvPr>
-            <p:ph type="title"/>
-          </p:nvPr>
-        </p:nvSpPr>
-        <p:spPr>
-          <a:xfrm>
-            <a:off x="0" y="0"/>
-            <a:ext cx="9144000" cy="685800"/>
-          </a:xfrm>
-          <a:prstGeom prst="rect">
-            <a:avLst/>
-          </a:prstGeom>
-        </p:spPr>
-        <p:txBody>
-          <a:bodyPr anchorCtr="0" anchor="ctr" bIns="91425" lIns="274300" spcFirstLastPara="1" rIns="91425" wrap="square" tIns="91425">
-            <a:noAutofit/>
-          </a:bodyPr>
-          <a:lstStyle/>
-          <a:p>
-            <a:pPr indent="0" lvl="0" marL="0" rtl="0" algn="l">
-              <a:spcBef>
-                <a:spcPts val="0"/>
-              </a:spcBef>
-              <a:spcAft>
-                <a:spcPts val="0"/>
-              </a:spcAft>
-              <a:buNone/>
-            </a:pPr>
-            <a:r>
-              <a:rPr lang="en"/>
-              <a:t>Research, the Researcher, and Ethics</a:t>
-            </a:r>
-            <a:endParaRPr/>
-          </a:p>
-        </p:txBody>
-      </p:sp>
-      <p:sp>
-        <p:nvSpPr>
-          <p:cNvPr id="307" name="Google Shape;307;p46"/>
-          <p:cNvSpPr txBox="1"/>
-          <p:nvPr>
-            <p:ph idx="12" type="sldNum"/>
-          </p:nvPr>
-        </p:nvSpPr>
-        <p:spPr>
-          <a:xfrm>
-            <a:off x="7315209" y="4229101"/>
-            <a:ext cx="1828800" cy="914400"/>
-          </a:xfrm>
-          <a:prstGeom prst="rect">
-            <a:avLst/>
-          </a:prstGeom>
-        </p:spPr>
-        <p:txBody>
-          <a:bodyPr anchorCtr="0" anchor="b" bIns="91425" lIns="91425" spcFirstLastPara="1" rIns="91425" wrap="square" tIns="91425">
-            <a:noAutofit/>
-          </a:bodyPr>
-          <a:lstStyle/>
-          <a:p>
-            <a:pPr indent="0" lvl="0" marL="0" rtl="0" algn="r">
-              <a:spcBef>
-                <a:spcPts val="0"/>
-              </a:spcBef>
-              <a:spcAft>
-                <a:spcPts val="0"/>
-              </a:spcAft>
-              <a:buNone/>
-            </a:pPr>
-            <a:fld id="{00000000-1234-1234-1234-123412341234}" type="slidenum">
-              <a:rPr lang="en"/>
-              <a:t>‹#›</a:t>
-            </a:fld>
-            <a:endParaRPr/>
-          </a:p>
-          <a:p>
-            <a:pPr indent="0" lvl="0" marL="0" rtl="0" algn="r">
-              <a:spcBef>
-                <a:spcPts val="0"/>
-              </a:spcBef>
-              <a:spcAft>
-                <a:spcPts val="0"/>
-              </a:spcAft>
-              <a:buNone/>
-            </a:pPr>
-            <a:r>
-              <a:rPr b="0" lang="en" sz="1000" u="sng">
-                <a:solidFill>
-                  <a:schemeClr val="hlink"/>
-                </a:solidFill>
-                <a:hlinkClick r:id="rId3"/>
-              </a:rPr>
-              <a:t>uni1.de/nyt</a:t>
-            </a:r>
-            <a:r>
-              <a:rPr b="0" lang="en" sz="1000"/>
-              <a:t> </a:t>
-            </a:r>
-            <a:endParaRPr b="0" sz="1000"/>
-          </a:p>
-        </p:txBody>
-      </p:sp>
-      <p:sp>
-        <p:nvSpPr>
-          <p:cNvPr id="308" name="Google Shape;308;p46"/>
-          <p:cNvSpPr txBox="1"/>
-          <p:nvPr>
-            <p:ph idx="1" type="body"/>
-          </p:nvPr>
-        </p:nvSpPr>
-        <p:spPr>
-          <a:xfrm>
-            <a:off x="274320" y="914400"/>
-            <a:ext cx="8595300" cy="4114800"/>
-          </a:xfrm>
-          <a:prstGeom prst="rect">
-            <a:avLst/>
-          </a:prstGeom>
-        </p:spPr>
-        <p:txBody>
-          <a:bodyPr anchorCtr="0" anchor="t" bIns="0" lIns="0" spcFirstLastPara="1" rIns="0" wrap="square" tIns="0">
-            <a:noAutofit/>
-          </a:bodyPr>
-          <a:lstStyle/>
-          <a:p>
-            <a:pPr indent="0" lvl="0" marL="0" rtl="0" algn="l">
-              <a:spcBef>
-                <a:spcPts val="0"/>
-              </a:spcBef>
-              <a:spcAft>
-                <a:spcPts val="0"/>
-              </a:spcAft>
-              <a:buNone/>
-            </a:pPr>
-            <a:r>
-              <a:rPr lang="en"/>
-              <a:t>Your ethics as well as ethical standards provide criteria of what and what not to do</a:t>
-            </a:r>
-            <a:endParaRPr/>
-          </a:p>
-          <a:p>
-            <a:pPr indent="0" lvl="0" marL="0" rtl="0" algn="l">
-              <a:spcBef>
-                <a:spcPts val="1200"/>
-              </a:spcBef>
-              <a:spcAft>
-                <a:spcPts val="1200"/>
-              </a:spcAft>
-              <a:buNone/>
-            </a:pPr>
-            <a:r>
-              <a:rPr lang="en"/>
-              <a:t>You are your own agent and cannot delegate (or hide from) responsibility</a:t>
             </a:r>
             <a:endParaRPr/>
           </a:p>
@@ -19546,7 +19636,7 @@
             </a:pPr>
             <a:r>
               <a:rPr lang="en"/>
-              <a:t>Escalation Levels of Responsibility</a:t>
+              <a:t>Research, the Researcher, and Ethics</a:t>
             </a:r>
             <a:endParaRPr/>
           </a:p>
@@ -19617,9 +19707,195 @@
           </a:p>
         </p:txBody>
       </p:sp>
+      <p:sp>
+        <p:nvSpPr>
+          <p:cNvPr id="315" name="Google Shape;315;p47"/>
+          <p:cNvSpPr txBox="1"/>
+          <p:nvPr>
+            <p:ph idx="1" type="body"/>
+          </p:nvPr>
+        </p:nvSpPr>
+        <p:spPr>
+          <a:xfrm>
+            <a:off x="274320" y="914400"/>
+            <a:ext cx="8595300" cy="4114800"/>
+          </a:xfrm>
+          <a:prstGeom prst="rect">
+            <a:avLst/>
+          </a:prstGeom>
+        </p:spPr>
+        <p:txBody>
+          <a:bodyPr anchorCtr="0" anchor="t" bIns="0" lIns="0" spcFirstLastPara="1" rIns="0" wrap="square" tIns="0">
+            <a:noAutofit/>
+          </a:bodyPr>
+          <a:lstStyle/>
+          <a:p>
+            <a:pPr indent="0" lvl="0" marL="0" rtl="0" algn="l">
+              <a:spcBef>
+                <a:spcPts val="0"/>
+              </a:spcBef>
+              <a:spcAft>
+                <a:spcPts val="0"/>
+              </a:spcAft>
+              <a:buNone/>
+            </a:pPr>
+            <a:r>
+              <a:rPr lang="en"/>
+              <a:t>Your ethics as well as ethical standards provide criteria of what and what not to do</a:t>
+            </a:r>
+            <a:endParaRPr/>
+          </a:p>
+          <a:p>
+            <a:pPr indent="0" lvl="0" marL="0" rtl="0" algn="l">
+              <a:spcBef>
+                <a:spcPts val="1200"/>
+              </a:spcBef>
+              <a:spcAft>
+                <a:spcPts val="1200"/>
+              </a:spcAft>
+              <a:buNone/>
+            </a:pPr>
+            <a:r>
+              <a:rPr lang="en"/>
+              <a:t>You are your own agent and cannot delegate (or hide from) responsibility</a:t>
+            </a:r>
+            <a:endParaRPr/>
+          </a:p>
+        </p:txBody>
+      </p:sp>
+    </p:spTree>
+  </p:cSld>
+  <p:clrMapOvr>
+    <a:masterClrMapping/>
+  </p:clrMapOvr>
+</p:sld>
+</file>
+
+<file path=ppt/slides/slide41.xml><?xml version="1.0" encoding="utf-8"?>
+<p:sld xmlns:a="http://schemas.openxmlformats.org/drawingml/2006/main" xmlns:r="http://schemas.openxmlformats.org/officeDocument/2006/relationships" xmlns:mc="http://schemas.openxmlformats.org/markup-compatibility/2006" xmlns:mv="urn:schemas-microsoft-com:mac:vml" xmlns:p="http://schemas.openxmlformats.org/presentationml/2006/main" xmlns:c="http://schemas.openxmlformats.org/drawingml/2006/chart" xmlns:dgm="http://schemas.openxmlformats.org/drawingml/2006/diagram" xmlns:o="urn:schemas-microsoft-com:office:office" xmlns:v="urn:schemas-microsoft-com:vml" xmlns:pvml="urn:schemas-microsoft-com:office:powerpoint" xmlns:com="http://schemas.openxmlformats.org/drawingml/2006/compatibility" xmlns:p14="http://schemas.microsoft.com/office/powerpoint/2010/main" xmlns:p15="http://schemas.microsoft.com/office/powerpoint/2012/main" xmlns:ahyp="http://schemas.microsoft.com/office/drawing/2018/hyperlinkcolor">
+  <p:cSld>
+    <p:spTree>
+      <p:nvGrpSpPr>
+        <p:cNvPr id="319" name="Shape 319"/>
+        <p:cNvGrpSpPr/>
+        <p:nvPr/>
+      </p:nvGrpSpPr>
+      <p:grpSpPr>
+        <a:xfrm>
+          <a:off x="0" y="0"/>
+          <a:ext cx="0" cy="0"/>
+          <a:chOff x="0" y="0"/>
+          <a:chExt cx="0" cy="0"/>
+        </a:xfrm>
+      </p:grpSpPr>
+      <p:sp>
+        <p:nvSpPr>
+          <p:cNvPr id="320" name="Google Shape;320;p48"/>
+          <p:cNvSpPr txBox="1"/>
+          <p:nvPr>
+            <p:ph type="title"/>
+          </p:nvPr>
+        </p:nvSpPr>
+        <p:spPr>
+          <a:xfrm>
+            <a:off x="0" y="0"/>
+            <a:ext cx="9144000" cy="685800"/>
+          </a:xfrm>
+          <a:prstGeom prst="rect">
+            <a:avLst/>
+          </a:prstGeom>
+        </p:spPr>
+        <p:txBody>
+          <a:bodyPr anchorCtr="0" anchor="ctr" bIns="91425" lIns="274300" spcFirstLastPara="1" rIns="91425" wrap="square" tIns="91425">
+            <a:noAutofit/>
+          </a:bodyPr>
+          <a:lstStyle/>
+          <a:p>
+            <a:pPr indent="0" lvl="0" marL="0" rtl="0" algn="l">
+              <a:spcBef>
+                <a:spcPts val="0"/>
+              </a:spcBef>
+              <a:spcAft>
+                <a:spcPts val="0"/>
+              </a:spcAft>
+              <a:buNone/>
+            </a:pPr>
+            <a:r>
+              <a:rPr lang="en"/>
+              <a:t>Escalation Levels of Responsibility</a:t>
+            </a:r>
+            <a:endParaRPr/>
+          </a:p>
+        </p:txBody>
+      </p:sp>
+      <p:sp>
+        <p:nvSpPr>
+          <p:cNvPr id="321" name="Google Shape;321;p48"/>
+          <p:cNvSpPr txBox="1"/>
+          <p:nvPr>
+            <p:ph idx="12" type="sldNum"/>
+          </p:nvPr>
+        </p:nvSpPr>
+        <p:spPr>
+          <a:xfrm>
+            <a:off x="7315209" y="4229101"/>
+            <a:ext cx="1828800" cy="914400"/>
+          </a:xfrm>
+          <a:prstGeom prst="rect">
+            <a:avLst/>
+          </a:prstGeom>
+        </p:spPr>
+        <p:txBody>
+          <a:bodyPr anchorCtr="0" anchor="b" bIns="91425" lIns="91425" spcFirstLastPara="1" rIns="91425" wrap="square" tIns="91425">
+            <a:noAutofit/>
+          </a:bodyPr>
+          <a:lstStyle/>
+          <a:p>
+            <a:pPr indent="0" lvl="0" marL="0" rtl="0" algn="r">
+              <a:spcBef>
+                <a:spcPts val="0"/>
+              </a:spcBef>
+              <a:spcAft>
+                <a:spcPts val="0"/>
+              </a:spcAft>
+              <a:buNone/>
+            </a:pPr>
+            <a:fld id="{00000000-1234-1234-1234-123412341234}" type="slidenum">
+              <a:rPr lang="en"/>
+              <a:t>‹#›</a:t>
+            </a:fld>
+            <a:endParaRPr/>
+          </a:p>
+          <a:p>
+            <a:pPr indent="0" lvl="0" marL="0" rtl="0" algn="r">
+              <a:spcBef>
+                <a:spcPts val="0"/>
+              </a:spcBef>
+              <a:spcAft>
+                <a:spcPts val="0"/>
+              </a:spcAft>
+              <a:buNone/>
+            </a:pPr>
+            <a:r>
+              <a:rPr b="0" lang="en" sz="1000" u="sng">
+                <a:solidFill>
+                  <a:schemeClr val="hlink"/>
+                </a:solidFill>
+                <a:hlinkClick r:id="rId3"/>
+              </a:rPr>
+              <a:t>uni1.de/nyt</a:t>
+            </a:r>
+            <a:r>
+              <a:rPr b="0" lang="en" sz="1000"/>
+              <a:t> </a:t>
+            </a:r>
+            <a:endParaRPr b="0" sz="1000"/>
+          </a:p>
+        </p:txBody>
+      </p:sp>
       <p:graphicFrame>
         <p:nvGraphicFramePr>
-          <p:cNvPr id="315" name="Google Shape;315;p47"/>
+          <p:cNvPr id="322" name="Google Shape;322;p48"/>
           <p:cNvGraphicFramePr/>
           <p:nvPr/>
         </p:nvGraphicFramePr>
@@ -19632,7 +19908,7 @@
             <a:tbl>
               <a:tblPr>
                 <a:noFill/>
-                <a:tableStyleId>{6B152514-A711-4921-878E-315DFE35F5D9}</a:tableStyleId>
+                <a:tableStyleId>{318B765E-CCCD-40CA-A58D-B966A8F26E5C}</a:tableStyleId>
               </a:tblPr>
               <a:tblGrid>
                 <a:gridCol w="2468925"/>
@@ -19657,14 +19933,14 @@
                         <a:buNone/>
                       </a:pPr>
                       <a:r>
-                        <a:rPr b="1" lang="en" sz="1800">
+                        <a:rPr b="1" lang="en">
                           <a:solidFill>
                             <a:schemeClr val="lt1"/>
                           </a:solidFill>
                         </a:rPr>
                         <a:t>Party</a:t>
                       </a:r>
-                      <a:endParaRPr b="1" sz="1800">
+                      <a:endParaRPr b="1">
                         <a:solidFill>
                           <a:schemeClr val="lt1"/>
                         </a:solidFill>
@@ -19728,14 +20004,14 @@
                         <a:buNone/>
                       </a:pPr>
                       <a:r>
-                        <a:rPr b="1" lang="en" sz="1800">
+                        <a:rPr b="1" lang="en">
                           <a:solidFill>
                             <a:schemeClr val="lt1"/>
                           </a:solidFill>
                         </a:rPr>
                         <a:t>Country</a:t>
                       </a:r>
-                      <a:endParaRPr b="1" sz="1800">
+                      <a:endParaRPr b="1">
                         <a:solidFill>
                           <a:schemeClr val="lt1"/>
                         </a:solidFill>
@@ -19799,14 +20075,14 @@
                         <a:buNone/>
                       </a:pPr>
                       <a:r>
-                        <a:rPr b="1" lang="en" sz="1800">
+                        <a:rPr b="1" lang="en">
                           <a:solidFill>
                             <a:schemeClr val="lt1"/>
                           </a:solidFill>
                         </a:rPr>
                         <a:t>Program sponsor</a:t>
                       </a:r>
-                      <a:endParaRPr b="1" sz="1800">
+                      <a:endParaRPr b="1">
                         <a:solidFill>
                           <a:schemeClr val="lt1"/>
                         </a:solidFill>
@@ -19870,14 +20146,14 @@
                         <a:buNone/>
                       </a:pPr>
                       <a:r>
-                        <a:rPr b="1" lang="en" sz="1800">
+                        <a:rPr b="1" lang="en">
                           <a:solidFill>
                             <a:schemeClr val="lt1"/>
                           </a:solidFill>
                         </a:rPr>
                         <a:t>Principal investigator</a:t>
                       </a:r>
-                      <a:endParaRPr b="1" sz="1800">
+                      <a:endParaRPr b="1">
                         <a:solidFill>
                           <a:schemeClr val="lt1"/>
                         </a:solidFill>
@@ -19941,14 +20217,14 @@
                         <a:buNone/>
                       </a:pPr>
                       <a:r>
-                        <a:rPr b="1" lang="en" sz="1800">
+                        <a:rPr b="1" lang="en">
                           <a:solidFill>
                             <a:schemeClr val="lt1"/>
                           </a:solidFill>
                         </a:rPr>
                         <a:t>Individual researcher</a:t>
                       </a:r>
-                      <a:endParaRPr b="1" sz="1800">
+                      <a:endParaRPr b="1">
                         <a:solidFill>
                           <a:schemeClr val="lt1"/>
                         </a:solidFill>
@@ -20077,10 +20353,10 @@
                         <a:buNone/>
                       </a:pPr>
                       <a:r>
-                        <a:rPr b="1" lang="en" sz="1800"/>
+                        <a:rPr b="1" lang="en"/>
                         <a:t>x</a:t>
                       </a:r>
-                      <a:endParaRPr b="1" sz="1800"/>
+                      <a:endParaRPr b="1"/>
                     </a:p>
                   </a:txBody>
                   <a:tcPr marT="91425" marB="91425" marR="91425" marL="91425" anchor="ctr">
@@ -20140,10 +20416,10 @@
                         <a:buNone/>
                       </a:pPr>
                       <a:r>
-                        <a:rPr b="1" lang="en" sz="1800"/>
+                        <a:rPr b="1" lang="en"/>
                         <a:t>x</a:t>
                       </a:r>
-                      <a:endParaRPr b="1" sz="1800"/>
+                      <a:endParaRPr b="1"/>
                     </a:p>
                   </a:txBody>
                   <a:tcPr marT="91425" marB="91425" marR="91425" marL="91425" anchor="ctr">
@@ -20203,10 +20479,10 @@
                         <a:buNone/>
                       </a:pPr>
                       <a:r>
-                        <a:rPr b="1" lang="en" sz="1800"/>
+                        <a:rPr b="1" lang="en"/>
                         <a:t>x</a:t>
                       </a:r>
-                      <a:endParaRPr b="1" sz="1800"/>
+                      <a:endParaRPr b="1"/>
                     </a:p>
                   </a:txBody>
                   <a:tcPr marT="91425" marB="91425" marR="91425" marL="91425" anchor="ctr">
@@ -20266,10 +20542,10 @@
                         <a:buNone/>
                       </a:pPr>
                       <a:r>
-                        <a:rPr b="1" lang="en" sz="1800"/>
+                        <a:rPr b="1" lang="en"/>
                         <a:t>x</a:t>
                       </a:r>
-                      <a:endParaRPr b="1" sz="1800"/>
+                      <a:endParaRPr b="1"/>
                     </a:p>
                   </a:txBody>
                   <a:tcPr marT="91425" marB="91425" marR="91425" marL="91425" anchor="ctr">
@@ -20396,7 +20672,7 @@
                       <a:r>
                         <a:t/>
                       </a:r>
-                      <a:endParaRPr b="1" sz="1800"/>
+                      <a:endParaRPr b="1"/>
                     </a:p>
                   </a:txBody>
                   <a:tcPr marT="91425" marB="91425" marR="91425" marL="91425" anchor="ctr">
@@ -20456,10 +20732,10 @@
                         <a:buNone/>
                       </a:pPr>
                       <a:r>
-                        <a:rPr b="1" lang="en" sz="1800"/>
+                        <a:rPr b="1" lang="en"/>
                         <a:t>x</a:t>
                       </a:r>
-                      <a:endParaRPr b="1" sz="1800"/>
+                      <a:endParaRPr b="1"/>
                     </a:p>
                   </a:txBody>
                   <a:tcPr marT="91425" marB="91425" marR="91425" marL="91425" anchor="ctr">
@@ -20519,10 +20795,10 @@
                         <a:buNone/>
                       </a:pPr>
                       <a:r>
-                        <a:rPr b="1" lang="en" sz="1800"/>
+                        <a:rPr b="1" lang="en"/>
                         <a:t>x</a:t>
                       </a:r>
-                      <a:endParaRPr b="1" sz="1800"/>
+                      <a:endParaRPr b="1"/>
                     </a:p>
                   </a:txBody>
                   <a:tcPr marT="91425" marB="91425" marR="91425" marL="91425" anchor="ctr">
@@ -20582,10 +20858,10 @@
                         <a:buNone/>
                       </a:pPr>
                       <a:r>
-                        <a:rPr b="1" lang="en" sz="1800"/>
+                        <a:rPr b="1" lang="en"/>
                         <a:t>x</a:t>
                       </a:r>
-                      <a:endParaRPr b="1" sz="1800"/>
+                      <a:endParaRPr b="1"/>
                     </a:p>
                   </a:txBody>
                   <a:tcPr marT="91425" marB="91425" marR="91425" marL="91425" anchor="ctr">
@@ -20712,7 +20988,7 @@
                       <a:r>
                         <a:t/>
                       </a:r>
-                      <a:endParaRPr sz="1800"/>
+                      <a:endParaRPr/>
                     </a:p>
                   </a:txBody>
                   <a:tcPr marT="91425" marB="91425" marR="91425" marL="91425" anchor="ctr">
@@ -20774,7 +21050,7 @@
                       <a:r>
                         <a:t/>
                       </a:r>
-                      <a:endParaRPr sz="1800"/>
+                      <a:endParaRPr/>
                     </a:p>
                   </a:txBody>
                   <a:tcPr marT="91425" marB="91425" marR="91425" marL="91425" anchor="ctr">
@@ -20834,10 +21110,10 @@
                         <a:buNone/>
                       </a:pPr>
                       <a:r>
-                        <a:rPr b="1" lang="en" sz="1800"/>
+                        <a:rPr b="1" lang="en"/>
                         <a:t>x</a:t>
                       </a:r>
-                      <a:endParaRPr b="1" sz="1800"/>
+                      <a:endParaRPr b="1"/>
                     </a:p>
                   </a:txBody>
                   <a:tcPr marT="91425" marB="91425" marR="91425" marL="91425" anchor="ctr">
@@ -20897,10 +21173,10 @@
                         <a:buNone/>
                       </a:pPr>
                       <a:r>
-                        <a:rPr b="1" lang="en" sz="1800"/>
+                        <a:rPr b="1" lang="en"/>
                         <a:t>x</a:t>
                       </a:r>
-                      <a:endParaRPr b="1" sz="1800"/>
+                      <a:endParaRPr b="1"/>
                     </a:p>
                   </a:txBody>
                   <a:tcPr marT="91425" marB="91425" marR="91425" marL="91425" anchor="ctr">
@@ -21027,7 +21303,7 @@
                       <a:r>
                         <a:t/>
                       </a:r>
-                      <a:endParaRPr b="1" sz="1800"/>
+                      <a:endParaRPr b="1"/>
                     </a:p>
                   </a:txBody>
                   <a:tcPr marT="91425" marB="91425" marR="91425" marL="91425" anchor="ctr">
@@ -21089,7 +21365,7 @@
                       <a:r>
                         <a:t/>
                       </a:r>
-                      <a:endParaRPr b="1" sz="1800"/>
+                      <a:endParaRPr b="1"/>
                     </a:p>
                   </a:txBody>
                   <a:tcPr marT="91425" marB="91425" marR="91425" marL="91425" anchor="ctr">
@@ -21151,7 +21427,7 @@
                       <a:r>
                         <a:t/>
                       </a:r>
-                      <a:endParaRPr b="1" sz="1800"/>
+                      <a:endParaRPr b="1"/>
                     </a:p>
                   </a:txBody>
                   <a:tcPr marT="91425" marB="91425" marR="91425" marL="91425" anchor="ctr">
@@ -21211,10 +21487,10 @@
                         <a:buNone/>
                       </a:pPr>
                       <a:r>
-                        <a:rPr b="1" lang="en" sz="1800"/>
+                        <a:rPr b="1" lang="en"/>
                         <a:t>x</a:t>
                       </a:r>
-                      <a:endParaRPr b="1" sz="1800"/>
+                      <a:endParaRPr b="1"/>
                     </a:p>
                   </a:txBody>
                   <a:tcPr marT="91425" marB="91425" marR="91425" marL="91425" anchor="ctr">
@@ -21272,12 +21548,12 @@
 </p:sld>
 </file>
 
-<file path=ppt/slides/slide41.xml><?xml version="1.0" encoding="utf-8"?>
+<file path=ppt/slides/slide42.xml><?xml version="1.0" encoding="utf-8"?>
 <p:sld xmlns:a="http://schemas.openxmlformats.org/drawingml/2006/main" xmlns:r="http://schemas.openxmlformats.org/officeDocument/2006/relationships" xmlns:mc="http://schemas.openxmlformats.org/markup-compatibility/2006" xmlns:mv="urn:schemas-microsoft-com:mac:vml" xmlns:p="http://schemas.openxmlformats.org/presentationml/2006/main" xmlns:c="http://schemas.openxmlformats.org/drawingml/2006/chart" xmlns:dgm="http://schemas.openxmlformats.org/drawingml/2006/diagram" xmlns:o="urn:schemas-microsoft-com:office:office" xmlns:v="urn:schemas-microsoft-com:vml" xmlns:pvml="urn:schemas-microsoft-com:office:powerpoint" xmlns:com="http://schemas.openxmlformats.org/drawingml/2006/compatibility" xmlns:p14="http://schemas.microsoft.com/office/powerpoint/2010/main" xmlns:p15="http://schemas.microsoft.com/office/powerpoint/2012/main" xmlns:ahyp="http://schemas.microsoft.com/office/drawing/2018/hyperlinkcolor">
   <p:cSld>
     <p:spTree>
       <p:nvGrpSpPr>
-        <p:cNvPr id="319" name="Shape 319"/>
+        <p:cNvPr id="326" name="Shape 326"/>
         <p:cNvGrpSpPr/>
         <p:nvPr/>
       </p:nvGrpSpPr>
@@ -21291,7 +21567,7 @@
       </p:grpSpPr>
       <p:sp>
         <p:nvSpPr>
-          <p:cNvPr id="320" name="Google Shape;320;p48"/>
+          <p:cNvPr id="327" name="Google Shape;327;p49"/>
           <p:cNvSpPr txBox="1"/>
           <p:nvPr>
             <p:ph idx="1" type="body"/>
@@ -21359,12 +21635,16 @@
               <a:buNone/>
             </a:pPr>
             <a:r>
+              <a:rPr lang="en"/>
+              <a:t>(Sufficient) </a:t>
+            </a:r>
+            <a:r>
               <a:rPr b="1" lang="en"/>
-              <a:t>Scientific value </a:t>
-            </a:r>
-            <a:r>
-              <a:rPr lang="en"/>
-              <a:t>is given</a:t>
+              <a:t>confidentiality</a:t>
+            </a:r>
+            <a:r>
+              <a:rPr lang="en"/>
+              <a:t> is given</a:t>
             </a:r>
             <a:endParaRPr/>
           </a:p>
@@ -21381,7 +21661,22 @@
             </a:pPr>
             <a:r>
               <a:rPr lang="en"/>
-              <a:t>When relative to other work the combined rigor and relevance outweighs the competition</a:t>
+              <a:t>When participants remain anonymous and data confidential to the extent possible  </a:t>
+            </a:r>
+            <a:endParaRPr/>
+          </a:p>
+          <a:p>
+            <a:pPr indent="0" lvl="0" marL="0" rtl="0" algn="l">
+              <a:spcBef>
+                <a:spcPts val="1200"/>
+              </a:spcBef>
+              <a:spcAft>
+                <a:spcPts val="1200"/>
+              </a:spcAft>
+              <a:buNone/>
+            </a:pPr>
+            <a:r>
+              <a:t/>
             </a:r>
             <a:endParaRPr/>
           </a:p>
@@ -21389,7 +21684,7 @@
       </p:sp>
       <p:sp>
         <p:nvSpPr>
-          <p:cNvPr id="321" name="Google Shape;321;p48"/>
+          <p:cNvPr id="328" name="Google Shape;328;p49"/>
           <p:cNvSpPr txBox="1"/>
           <p:nvPr>
             <p:ph type="title"/>
@@ -21429,7 +21724,7 @@
       </p:sp>
       <p:sp>
         <p:nvSpPr>
-          <p:cNvPr id="322" name="Google Shape;322;p48"/>
+          <p:cNvPr id="329" name="Google Shape;329;p49"/>
           <p:cNvSpPr txBox="1"/>
           <p:nvPr>
             <p:ph idx="12" type="sldNum"/>
@@ -21494,7 +21789,7 @@
       </p:sp>
       <p:sp>
         <p:nvSpPr>
-          <p:cNvPr id="323" name="Google Shape;323;p48"/>
+          <p:cNvPr id="330" name="Google Shape;330;p49"/>
           <p:cNvSpPr txBox="1"/>
           <p:nvPr>
             <p:ph idx="2" type="body"/>
@@ -21526,11 +21821,11 @@
             </a:pPr>
             <a:r>
               <a:rPr b="1" lang="en"/>
-              <a:t>Beneficence</a:t>
-            </a:r>
-            <a:r>
-              <a:rPr lang="en"/>
-              <a:t> is given</a:t>
+              <a:t>Scientific value </a:t>
+            </a:r>
+            <a:r>
+              <a:rPr lang="en"/>
+              <a:t>is given</a:t>
             </a:r>
             <a:endParaRPr/>
           </a:p>
@@ -21547,7 +21842,7 @@
             </a:pPr>
             <a:r>
               <a:rPr lang="en"/>
-              <a:t>When the expected gains far outweigh any harms that might result from the research</a:t>
+              <a:t>When relative to other work the combined rigor and relevance outweighs the competition</a:t>
             </a:r>
             <a:endParaRPr/>
           </a:p>
@@ -21562,12 +21857,8 @@
               <a:buNone/>
             </a:pPr>
             <a:r>
-              <a:rPr lang="en"/>
-              <a:t>(Sufficient) </a:t>
-            </a:r>
-            <a:r>
               <a:rPr b="1" lang="en"/>
-              <a:t>confidentiality</a:t>
+              <a:t>Beneficence</a:t>
             </a:r>
             <a:r>
               <a:rPr lang="en"/>
@@ -21588,7 +21879,7 @@
             </a:pPr>
             <a:r>
               <a:rPr lang="en"/>
-              <a:t>When participants remain anonymous and data confidential to the extent possible  </a:t>
+              <a:t>When the expected gains far outweigh any harms that might result from the research</a:t>
             </a:r>
             <a:endParaRPr/>
           </a:p>
@@ -21596,14 +21887,14 @@
       </p:sp>
       <p:sp>
         <p:nvSpPr>
-          <p:cNvPr id="324" name="Google Shape;324;p48"/>
+          <p:cNvPr id="331" name="Google Shape;331;p49"/>
           <p:cNvSpPr txBox="1"/>
           <p:nvPr/>
         </p:nvSpPr>
         <p:spPr>
           <a:xfrm>
-            <a:off x="0" y="4233672"/>
-            <a:ext cx="7315200" cy="914400"/>
+            <a:off x="0" y="4233675"/>
+            <a:ext cx="9144000" cy="914400"/>
           </a:xfrm>
           <a:prstGeom prst="rect">
             <a:avLst/>
@@ -21633,505 +21924,17 @@
               <a:t>[1] See </a:t>
             </a:r>
             <a:r>
-              <a:rPr lang="en"/>
-              <a:t>Singer &amp; Vinson (2002): Ethical issues in empirical studies of software engineering.</a:t>
-            </a:r>
-            <a:endParaRPr/>
-          </a:p>
-        </p:txBody>
-      </p:sp>
-    </p:spTree>
-  </p:cSld>
-  <p:clrMapOvr>
-    <a:masterClrMapping/>
-  </p:clrMapOvr>
-</p:sld>
-</file>
-
-<file path=ppt/slides/slide42.xml><?xml version="1.0" encoding="utf-8"?>
-<p:sld xmlns:a="http://schemas.openxmlformats.org/drawingml/2006/main" xmlns:r="http://schemas.openxmlformats.org/officeDocument/2006/relationships" xmlns:mc="http://schemas.openxmlformats.org/markup-compatibility/2006" xmlns:mv="urn:schemas-microsoft-com:mac:vml" xmlns:p="http://schemas.openxmlformats.org/presentationml/2006/main" xmlns:c="http://schemas.openxmlformats.org/drawingml/2006/chart" xmlns:dgm="http://schemas.openxmlformats.org/drawingml/2006/diagram" xmlns:o="urn:schemas-microsoft-com:office:office" xmlns:v="urn:schemas-microsoft-com:vml" xmlns:pvml="urn:schemas-microsoft-com:office:powerpoint" xmlns:com="http://schemas.openxmlformats.org/drawingml/2006/compatibility" xmlns:p14="http://schemas.microsoft.com/office/powerpoint/2010/main" xmlns:p15="http://schemas.microsoft.com/office/powerpoint/2012/main" xmlns:ahyp="http://schemas.microsoft.com/office/drawing/2018/hyperlinkcolor">
-  <p:cSld>
-    <p:spTree>
-      <p:nvGrpSpPr>
-        <p:cNvPr id="328" name="Shape 328"/>
-        <p:cNvGrpSpPr/>
-        <p:nvPr/>
-      </p:nvGrpSpPr>
-      <p:grpSpPr>
-        <a:xfrm>
-          <a:off x="0" y="0"/>
-          <a:ext cx="0" cy="0"/>
-          <a:chOff x="0" y="0"/>
-          <a:chExt cx="0" cy="0"/>
-        </a:xfrm>
-      </p:grpSpPr>
-      <p:sp>
-        <p:nvSpPr>
-          <p:cNvPr id="329" name="Google Shape;329;p49"/>
-          <p:cNvSpPr txBox="1"/>
-          <p:nvPr>
-            <p:ph type="title"/>
-          </p:nvPr>
-        </p:nvSpPr>
-        <p:spPr>
-          <a:xfrm>
-            <a:off x="0" y="0"/>
-            <a:ext cx="9144000" cy="685800"/>
-          </a:xfrm>
-          <a:prstGeom prst="rect">
-            <a:avLst/>
-          </a:prstGeom>
-        </p:spPr>
-        <p:txBody>
-          <a:bodyPr anchorCtr="0" anchor="ctr" bIns="0" lIns="274300" spcFirstLastPara="1" rIns="0" wrap="square" tIns="0">
-            <a:noAutofit/>
-          </a:bodyPr>
-          <a:lstStyle/>
-          <a:p>
-            <a:pPr indent="0" lvl="0" marL="0" rtl="0" algn="l">
-              <a:spcBef>
-                <a:spcPts val="0"/>
-              </a:spcBef>
-              <a:spcAft>
-                <a:spcPts val="0"/>
-              </a:spcAft>
-              <a:buNone/>
-            </a:pPr>
-            <a:r>
-              <a:rPr lang="en"/>
-              <a:t>DFG’s Safeguarding Good Scientific Practice [1]</a:t>
-            </a:r>
-            <a:endParaRPr/>
-          </a:p>
-        </p:txBody>
-      </p:sp>
-      <p:sp>
-        <p:nvSpPr>
-          <p:cNvPr id="330" name="Google Shape;330;p49"/>
-          <p:cNvSpPr txBox="1"/>
-          <p:nvPr>
-            <p:ph idx="12" type="sldNum"/>
-          </p:nvPr>
-        </p:nvSpPr>
-        <p:spPr>
-          <a:xfrm>
-            <a:off x="7315209" y="4229101"/>
-            <a:ext cx="1828800" cy="914400"/>
-          </a:xfrm>
-          <a:prstGeom prst="rect">
-            <a:avLst/>
-          </a:prstGeom>
-        </p:spPr>
-        <p:txBody>
-          <a:bodyPr anchorCtr="0" anchor="b" bIns="91425" lIns="91425" spcFirstLastPara="1" rIns="91425" wrap="square" tIns="91425">
-            <a:noAutofit/>
-          </a:bodyPr>
-          <a:lstStyle/>
-          <a:p>
-            <a:pPr indent="0" lvl="0" marL="0" rtl="0" algn="r">
-              <a:spcBef>
-                <a:spcPts val="0"/>
-              </a:spcBef>
-              <a:spcAft>
-                <a:spcPts val="0"/>
-              </a:spcAft>
-              <a:buNone/>
-            </a:pPr>
-            <a:fld id="{00000000-1234-1234-1234-123412341234}" type="slidenum">
-              <a:rPr lang="en"/>
-              <a:t>‹#›</a:t>
-            </a:fld>
-            <a:endParaRPr/>
-          </a:p>
-          <a:p>
-            <a:pPr indent="0" lvl="0" marL="0" rtl="0" algn="r">
-              <a:spcBef>
-                <a:spcPts val="0"/>
-              </a:spcBef>
-              <a:spcAft>
-                <a:spcPts val="0"/>
-              </a:spcAft>
-              <a:buNone/>
-            </a:pPr>
-            <a:r>
-              <a:rPr b="0" lang="en" sz="1000" u="sng">
+              <a:rPr lang="en" u="sng">
                 <a:solidFill>
                   <a:schemeClr val="hlink"/>
                 </a:solidFill>
-                <a:hlinkClick r:id="rId3"/>
+                <a:hlinkClick r:id="rId4"/>
               </a:rPr>
-              <a:t>uni1.de/nyt</a:t>
-            </a:r>
-            <a:r>
-              <a:rPr b="0" lang="en" sz="1000"/>
-              <a:t> </a:t>
-            </a:r>
-            <a:endParaRPr b="0" sz="1000"/>
-          </a:p>
-        </p:txBody>
-      </p:sp>
-      <p:sp>
-        <p:nvSpPr>
-          <p:cNvPr id="331" name="Google Shape;331;p49"/>
-          <p:cNvSpPr txBox="1"/>
-          <p:nvPr>
-            <p:ph idx="1" type="body"/>
-          </p:nvPr>
-        </p:nvSpPr>
-        <p:spPr>
-          <a:xfrm>
-            <a:off x="274326" y="914400"/>
-            <a:ext cx="4572000" cy="4114800"/>
-          </a:xfrm>
-          <a:prstGeom prst="rect">
-            <a:avLst/>
-          </a:prstGeom>
-        </p:spPr>
-        <p:txBody>
-          <a:bodyPr anchorCtr="0" anchor="t" bIns="91425" lIns="0" spcFirstLastPara="1" rIns="91425" wrap="square" tIns="0">
-            <a:normAutofit/>
-          </a:bodyPr>
-          <a:lstStyle/>
-          <a:p>
-            <a:pPr indent="-342900" lvl="0" marL="457200" rtl="0" algn="l">
-              <a:spcBef>
-                <a:spcPts val="0"/>
-              </a:spcBef>
-              <a:spcAft>
-                <a:spcPts val="0"/>
-              </a:spcAft>
-              <a:buSzPts val="1800"/>
-              <a:buAutoNum type="arabicPeriod"/>
-            </a:pPr>
-            <a:r>
-              <a:rPr lang="en"/>
-              <a:t>Good scientific practice</a:t>
-            </a:r>
-            <a:endParaRPr/>
-          </a:p>
-          <a:p>
-            <a:pPr indent="-342900" lvl="0" marL="457200" rtl="0" algn="l">
-              <a:spcBef>
-                <a:spcPts val="0"/>
-              </a:spcBef>
-              <a:spcAft>
-                <a:spcPts val="0"/>
-              </a:spcAft>
-              <a:buSzPts val="1800"/>
-              <a:buAutoNum type="arabicPeriod"/>
-            </a:pPr>
-            <a:r>
-              <a:rPr lang="en"/>
-              <a:t>Institutional rules</a:t>
-            </a:r>
-            <a:endParaRPr/>
-          </a:p>
-          <a:p>
-            <a:pPr indent="-342900" lvl="0" marL="457200" rtl="0" algn="l">
-              <a:spcBef>
-                <a:spcPts val="0"/>
-              </a:spcBef>
-              <a:spcAft>
-                <a:spcPts val="0"/>
-              </a:spcAft>
-              <a:buSzPts val="1800"/>
-              <a:buAutoNum type="arabicPeriod"/>
-            </a:pPr>
-            <a:r>
-              <a:rPr lang="en"/>
-              <a:t>Organization</a:t>
-            </a:r>
-            <a:endParaRPr/>
-          </a:p>
-          <a:p>
-            <a:pPr indent="-342900" lvl="0" marL="457200" rtl="0" algn="l">
-              <a:spcBef>
-                <a:spcPts val="0"/>
-              </a:spcBef>
-              <a:spcAft>
-                <a:spcPts val="0"/>
-              </a:spcAft>
-              <a:buSzPts val="1800"/>
-              <a:buAutoNum type="arabicPeriod"/>
-            </a:pPr>
-            <a:r>
-              <a:rPr lang="en"/>
-              <a:t>Young scientists</a:t>
-            </a:r>
-            <a:endParaRPr/>
-          </a:p>
-          <a:p>
-            <a:pPr indent="-342900" lvl="0" marL="457200" rtl="0" algn="l">
-              <a:spcBef>
-                <a:spcPts val="0"/>
-              </a:spcBef>
-              <a:spcAft>
-                <a:spcPts val="0"/>
-              </a:spcAft>
-              <a:buSzPts val="1800"/>
-              <a:buAutoNum type="arabicPeriod"/>
-            </a:pPr>
-            <a:r>
-              <a:rPr lang="en"/>
-              <a:t>Impartial counselors</a:t>
-            </a:r>
-            <a:endParaRPr/>
-          </a:p>
-          <a:p>
-            <a:pPr indent="-342900" lvl="0" marL="457200" rtl="0" algn="l">
-              <a:spcBef>
-                <a:spcPts val="0"/>
-              </a:spcBef>
-              <a:spcAft>
-                <a:spcPts val="0"/>
-              </a:spcAft>
-              <a:buSzPts val="1800"/>
-              <a:buAutoNum type="arabicPeriod"/>
-            </a:pPr>
-            <a:r>
-              <a:rPr lang="en"/>
-              <a:t>Performance evaluation</a:t>
-            </a:r>
-            <a:endParaRPr/>
-          </a:p>
-          <a:p>
-            <a:pPr indent="-342900" lvl="0" marL="457200" rtl="0" algn="l">
-              <a:spcBef>
-                <a:spcPts val="0"/>
-              </a:spcBef>
-              <a:spcAft>
-                <a:spcPts val="0"/>
-              </a:spcAft>
-              <a:buSzPts val="1800"/>
-              <a:buAutoNum type="arabicPeriod"/>
-            </a:pPr>
-            <a:r>
-              <a:rPr lang="en"/>
-              <a:t>Data handling</a:t>
-            </a:r>
-            <a:endParaRPr/>
-          </a:p>
-          <a:p>
-            <a:pPr indent="-342900" lvl="0" marL="457200" rtl="0" algn="l">
-              <a:spcBef>
-                <a:spcPts val="0"/>
-              </a:spcBef>
-              <a:spcAft>
-                <a:spcPts val="0"/>
-              </a:spcAft>
-              <a:buSzPts val="1800"/>
-              <a:buAutoNum type="arabicPeriod"/>
-            </a:pPr>
-            <a:r>
-              <a:rPr lang="en"/>
-              <a:t>Procedure for suspected misconduct</a:t>
-            </a:r>
-            <a:endParaRPr/>
-          </a:p>
-        </p:txBody>
-      </p:sp>
-      <p:sp>
-        <p:nvSpPr>
-          <p:cNvPr id="332" name="Google Shape;332;p49"/>
-          <p:cNvSpPr txBox="1"/>
-          <p:nvPr>
-            <p:ph idx="2" type="body"/>
-          </p:nvPr>
-        </p:nvSpPr>
-        <p:spPr>
-          <a:xfrm>
-            <a:off x="4846320" y="914400"/>
-            <a:ext cx="4114800" cy="4114800"/>
-          </a:xfrm>
-          <a:prstGeom prst="rect">
-            <a:avLst/>
-          </a:prstGeom>
-        </p:spPr>
-        <p:txBody>
-          <a:bodyPr anchorCtr="0" anchor="t" bIns="0" lIns="0" spcFirstLastPara="1" rIns="0" wrap="square" tIns="0">
-            <a:noAutofit/>
-          </a:bodyPr>
-          <a:lstStyle/>
-          <a:p>
-            <a:pPr indent="-342900" lvl="0" marL="457200" rtl="0" algn="l">
-              <a:spcBef>
-                <a:spcPts val="0"/>
-              </a:spcBef>
-              <a:spcAft>
-                <a:spcPts val="0"/>
-              </a:spcAft>
-              <a:buSzPts val="1800"/>
-              <a:buAutoNum type="arabicPeriod" startAt="9"/>
-            </a:pPr>
-            <a:r>
-              <a:rPr lang="en"/>
-              <a:t>Cooperation of institutes</a:t>
-            </a:r>
-            <a:endParaRPr/>
-          </a:p>
-          <a:p>
-            <a:pPr indent="-342900" lvl="0" marL="457200" rtl="0" algn="l">
-              <a:spcBef>
-                <a:spcPts val="0"/>
-              </a:spcBef>
-              <a:spcAft>
-                <a:spcPts val="0"/>
-              </a:spcAft>
-              <a:buSzPts val="1800"/>
-              <a:buAutoNum type="arabicPeriod" startAt="9"/>
-            </a:pPr>
-            <a:r>
-              <a:rPr lang="en"/>
-              <a:t>Learned societies</a:t>
-            </a:r>
-            <a:endParaRPr/>
-          </a:p>
-          <a:p>
-            <a:pPr indent="-342900" lvl="0" marL="457200" rtl="0" algn="l">
-              <a:spcBef>
-                <a:spcPts val="0"/>
-              </a:spcBef>
-              <a:spcAft>
-                <a:spcPts val="0"/>
-              </a:spcAft>
-              <a:buSzPts val="1800"/>
-              <a:buAutoNum type="arabicPeriod" startAt="9"/>
-            </a:pPr>
-            <a:r>
-              <a:rPr lang="en"/>
-              <a:t>Authorship</a:t>
-            </a:r>
-            <a:endParaRPr/>
-          </a:p>
-          <a:p>
-            <a:pPr indent="-342900" lvl="0" marL="457200" rtl="0" algn="l">
-              <a:spcBef>
-                <a:spcPts val="0"/>
-              </a:spcBef>
-              <a:spcAft>
-                <a:spcPts val="0"/>
-              </a:spcAft>
-              <a:buSzPts val="1800"/>
-              <a:buAutoNum type="arabicPeriod" startAt="9"/>
-            </a:pPr>
-            <a:r>
-              <a:rPr lang="en"/>
-              <a:t>Scientific journals</a:t>
-            </a:r>
-            <a:endParaRPr/>
-          </a:p>
-          <a:p>
-            <a:pPr indent="-342900" lvl="0" marL="457200" rtl="0" algn="l">
-              <a:spcBef>
-                <a:spcPts val="0"/>
-              </a:spcBef>
-              <a:spcAft>
-                <a:spcPts val="0"/>
-              </a:spcAft>
-              <a:buSzPts val="1800"/>
-              <a:buAutoNum type="arabicPeriod" startAt="9"/>
-            </a:pPr>
-            <a:r>
-              <a:rPr lang="en"/>
-              <a:t>Guidelines for research proposals</a:t>
-            </a:r>
-            <a:endParaRPr/>
-          </a:p>
-          <a:p>
-            <a:pPr indent="-342900" lvl="0" marL="457200" rtl="0" algn="l">
-              <a:spcBef>
-                <a:spcPts val="0"/>
-              </a:spcBef>
-              <a:spcAft>
-                <a:spcPts val="0"/>
-              </a:spcAft>
-              <a:buSzPts val="1800"/>
-              <a:buAutoNum type="arabicPeriod" startAt="9"/>
-            </a:pPr>
-            <a:r>
-              <a:rPr lang="en"/>
-              <a:t>Rules for the use of funds</a:t>
-            </a:r>
-            <a:endParaRPr/>
-          </a:p>
-          <a:p>
-            <a:pPr indent="-342900" lvl="0" marL="457200" rtl="0" algn="l">
-              <a:spcBef>
-                <a:spcPts val="0"/>
-              </a:spcBef>
-              <a:spcAft>
-                <a:spcPts val="0"/>
-              </a:spcAft>
-              <a:buSzPts val="1800"/>
-              <a:buAutoNum type="arabicPeriod" startAt="9"/>
-            </a:pPr>
-            <a:r>
-              <a:rPr lang="en"/>
-              <a:t>Reviewers</a:t>
-            </a:r>
-            <a:endParaRPr/>
-          </a:p>
-          <a:p>
-            <a:pPr indent="-342900" lvl="0" marL="457200" rtl="0" algn="l">
-              <a:spcBef>
-                <a:spcPts val="0"/>
-              </a:spcBef>
-              <a:spcAft>
-                <a:spcPts val="0"/>
-              </a:spcAft>
-              <a:buSzPts val="1800"/>
-              <a:buAutoNum type="arabicPeriod" startAt="9"/>
-            </a:pPr>
-            <a:r>
-              <a:rPr lang="en"/>
-              <a:t>Ombudsman for science</a:t>
-            </a:r>
-            <a:endParaRPr/>
-          </a:p>
-        </p:txBody>
-      </p:sp>
-      <p:sp>
-        <p:nvSpPr>
-          <p:cNvPr id="333" name="Google Shape;333;p49"/>
-          <p:cNvSpPr txBox="1"/>
-          <p:nvPr/>
-        </p:nvSpPr>
-        <p:spPr>
-          <a:xfrm>
-            <a:off x="0" y="4233672"/>
-            <a:ext cx="7315200" cy="914400"/>
-          </a:xfrm>
-          <a:prstGeom prst="rect">
-            <a:avLst/>
-          </a:prstGeom>
-          <a:noFill/>
-          <a:ln>
-            <a:noFill/>
-          </a:ln>
-        </p:spPr>
-        <p:txBody>
-          <a:bodyPr anchorCtr="0" anchor="b" bIns="91425" lIns="91425" spcFirstLastPara="1" rIns="91425" wrap="square" tIns="91425">
-            <a:noAutofit/>
-          </a:bodyPr>
-          <a:lstStyle/>
-          <a:p>
-            <a:pPr indent="0" lvl="0" marL="0" rtl="0" algn="l">
-              <a:spcBef>
-                <a:spcPts val="0"/>
-              </a:spcBef>
-              <a:spcAft>
-                <a:spcPts val="0"/>
-              </a:spcAft>
-              <a:buClr>
-                <a:schemeClr val="dk1"/>
-              </a:buClr>
-              <a:buSzPts val="1100"/>
-              <a:buFont typeface="Arial"/>
-              <a:buNone/>
-            </a:pPr>
-            <a:r>
-              <a:rPr lang="en"/>
-              <a:t>[1] See DFG (1998): Vorschläge zur Sicherung guter wissenschaftlicher Praxis.</a:t>
+              <a:t>Singer &amp; Vinson (2002)</a:t>
+            </a:r>
+            <a:r>
+              <a:rPr lang="en"/>
+              <a:t>: Ethical issues in empirical studies of software engineering.</a:t>
             </a:r>
             <a:endParaRPr/>
           </a:p>
@@ -22150,7 +21953,7 @@
   <p:cSld>
     <p:spTree>
       <p:nvGrpSpPr>
-        <p:cNvPr id="337" name="Shape 337"/>
+        <p:cNvPr id="335" name="Shape 335"/>
         <p:cNvGrpSpPr/>
         <p:nvPr/>
       </p:nvGrpSpPr>
@@ -22164,7 +21967,7 @@
       </p:grpSpPr>
       <p:sp>
         <p:nvSpPr>
-          <p:cNvPr id="338" name="Google Shape;338;p50"/>
+          <p:cNvPr id="336" name="Google Shape;336;p50"/>
           <p:cNvSpPr txBox="1"/>
           <p:nvPr>
             <p:ph type="title"/>
@@ -22180,7 +21983,7 @@
           </a:prstGeom>
         </p:spPr>
         <p:txBody>
-          <a:bodyPr anchorCtr="0" anchor="ctr" bIns="91425" lIns="274300" spcFirstLastPara="1" rIns="91425" wrap="square" tIns="91425">
+          <a:bodyPr anchorCtr="0" anchor="ctr" bIns="0" lIns="274300" spcFirstLastPara="1" rIns="0" wrap="square" tIns="0">
             <a:noAutofit/>
           </a:bodyPr>
           <a:lstStyle/>
@@ -22196,7 +21999,232 @@
             </a:pPr>
             <a:r>
               <a:rPr lang="en"/>
-              <a:t>MPG’s Rules for Safeguarding Scientific Practice [1]</a:t>
+              <a:t>DFG’s Safeguarding Good Scientific Practice [1]</a:t>
+            </a:r>
+            <a:endParaRPr/>
+          </a:p>
+        </p:txBody>
+      </p:sp>
+      <p:sp>
+        <p:nvSpPr>
+          <p:cNvPr id="337" name="Google Shape;337;p50"/>
+          <p:cNvSpPr txBox="1"/>
+          <p:nvPr>
+            <p:ph idx="12" type="sldNum"/>
+          </p:nvPr>
+        </p:nvSpPr>
+        <p:spPr>
+          <a:xfrm>
+            <a:off x="7315209" y="4229101"/>
+            <a:ext cx="1828800" cy="914400"/>
+          </a:xfrm>
+          <a:prstGeom prst="rect">
+            <a:avLst/>
+          </a:prstGeom>
+        </p:spPr>
+        <p:txBody>
+          <a:bodyPr anchorCtr="0" anchor="b" bIns="91425" lIns="91425" spcFirstLastPara="1" rIns="91425" wrap="square" tIns="91425">
+            <a:noAutofit/>
+          </a:bodyPr>
+          <a:lstStyle/>
+          <a:p>
+            <a:pPr indent="0" lvl="0" marL="0" rtl="0" algn="r">
+              <a:spcBef>
+                <a:spcPts val="0"/>
+              </a:spcBef>
+              <a:spcAft>
+                <a:spcPts val="0"/>
+              </a:spcAft>
+              <a:buNone/>
+            </a:pPr>
+            <a:fld id="{00000000-1234-1234-1234-123412341234}" type="slidenum">
+              <a:rPr lang="en"/>
+              <a:t>‹#›</a:t>
+            </a:fld>
+            <a:endParaRPr/>
+          </a:p>
+          <a:p>
+            <a:pPr indent="0" lvl="0" marL="0" rtl="0" algn="r">
+              <a:spcBef>
+                <a:spcPts val="0"/>
+              </a:spcBef>
+              <a:spcAft>
+                <a:spcPts val="0"/>
+              </a:spcAft>
+              <a:buNone/>
+            </a:pPr>
+            <a:r>
+              <a:rPr b="0" lang="en" sz="1000" u="sng">
+                <a:solidFill>
+                  <a:schemeClr val="hlink"/>
+                </a:solidFill>
+                <a:hlinkClick r:id="rId3"/>
+              </a:rPr>
+              <a:t>uni1.de/nyt</a:t>
+            </a:r>
+            <a:r>
+              <a:rPr b="0" lang="en" sz="1000"/>
+              <a:t> </a:t>
+            </a:r>
+            <a:endParaRPr b="0" sz="1000"/>
+          </a:p>
+        </p:txBody>
+      </p:sp>
+      <p:sp>
+        <p:nvSpPr>
+          <p:cNvPr id="338" name="Google Shape;338;p50"/>
+          <p:cNvSpPr txBox="1"/>
+          <p:nvPr>
+            <p:ph idx="1" type="body"/>
+          </p:nvPr>
+        </p:nvSpPr>
+        <p:spPr>
+          <a:xfrm>
+            <a:off x="274326" y="914400"/>
+            <a:ext cx="4572000" cy="4114800"/>
+          </a:xfrm>
+          <a:prstGeom prst="rect">
+            <a:avLst/>
+          </a:prstGeom>
+        </p:spPr>
+        <p:txBody>
+          <a:bodyPr anchorCtr="0" anchor="t" bIns="91425" lIns="0" spcFirstLastPara="1" rIns="91425" wrap="square" tIns="0">
+            <a:normAutofit/>
+          </a:bodyPr>
+          <a:lstStyle/>
+          <a:p>
+            <a:pPr indent="-342900" lvl="0" marL="457200" rtl="0" algn="l">
+              <a:spcBef>
+                <a:spcPts val="0"/>
+              </a:spcBef>
+              <a:spcAft>
+                <a:spcPts val="0"/>
+              </a:spcAft>
+              <a:buSzPts val="1800"/>
+              <a:buAutoNum type="arabicPeriod"/>
+            </a:pPr>
+            <a:r>
+              <a:rPr lang="en"/>
+              <a:t>Good scientific practice</a:t>
+            </a:r>
+            <a:endParaRPr/>
+          </a:p>
+          <a:p>
+            <a:pPr indent="-342900" lvl="0" marL="457200" rtl="0" algn="l">
+              <a:spcBef>
+                <a:spcPts val="0"/>
+              </a:spcBef>
+              <a:spcAft>
+                <a:spcPts val="0"/>
+              </a:spcAft>
+              <a:buSzPts val="1800"/>
+              <a:buAutoNum type="arabicPeriod"/>
+            </a:pPr>
+            <a:r>
+              <a:rPr lang="en"/>
+              <a:t>Institutional rules</a:t>
+            </a:r>
+            <a:endParaRPr/>
+          </a:p>
+          <a:p>
+            <a:pPr indent="-342900" lvl="0" marL="457200" rtl="0" algn="l">
+              <a:spcBef>
+                <a:spcPts val="0"/>
+              </a:spcBef>
+              <a:spcAft>
+                <a:spcPts val="0"/>
+              </a:spcAft>
+              <a:buSzPts val="1800"/>
+              <a:buAutoNum type="arabicPeriod"/>
+            </a:pPr>
+            <a:r>
+              <a:rPr lang="en"/>
+              <a:t>Organization</a:t>
+            </a:r>
+            <a:endParaRPr/>
+          </a:p>
+          <a:p>
+            <a:pPr indent="-342900" lvl="0" marL="457200" rtl="0" algn="l">
+              <a:spcBef>
+                <a:spcPts val="0"/>
+              </a:spcBef>
+              <a:spcAft>
+                <a:spcPts val="0"/>
+              </a:spcAft>
+              <a:buSzPts val="1800"/>
+              <a:buAutoNum type="arabicPeriod"/>
+            </a:pPr>
+            <a:r>
+              <a:rPr lang="en"/>
+              <a:t>Young scientists</a:t>
+            </a:r>
+            <a:endParaRPr/>
+          </a:p>
+          <a:p>
+            <a:pPr indent="-342900" lvl="0" marL="457200" rtl="0" algn="l">
+              <a:spcBef>
+                <a:spcPts val="0"/>
+              </a:spcBef>
+              <a:spcAft>
+                <a:spcPts val="0"/>
+              </a:spcAft>
+              <a:buSzPts val="1800"/>
+              <a:buAutoNum type="arabicPeriod"/>
+            </a:pPr>
+            <a:r>
+              <a:rPr lang="en"/>
+              <a:t>Impartial counselors</a:t>
+            </a:r>
+            <a:endParaRPr/>
+          </a:p>
+          <a:p>
+            <a:pPr indent="-342900" lvl="0" marL="457200" rtl="0" algn="l">
+              <a:spcBef>
+                <a:spcPts val="0"/>
+              </a:spcBef>
+              <a:spcAft>
+                <a:spcPts val="0"/>
+              </a:spcAft>
+              <a:buSzPts val="1800"/>
+              <a:buAutoNum type="arabicPeriod"/>
+            </a:pPr>
+            <a:r>
+              <a:rPr lang="en"/>
+              <a:t>Performance evaluation</a:t>
+            </a:r>
+            <a:endParaRPr/>
+          </a:p>
+          <a:p>
+            <a:pPr indent="-342900" lvl="0" marL="457200" rtl="0" algn="l">
+              <a:spcBef>
+                <a:spcPts val="0"/>
+              </a:spcBef>
+              <a:spcAft>
+                <a:spcPts val="0"/>
+              </a:spcAft>
+              <a:buSzPts val="1800"/>
+              <a:buAutoNum type="arabicPeriod"/>
+            </a:pPr>
+            <a:r>
+              <a:rPr lang="en"/>
+              <a:t>Data handling</a:t>
+            </a:r>
+            <a:endParaRPr/>
+          </a:p>
+          <a:p>
+            <a:pPr indent="-342900" lvl="0" marL="457200" rtl="0" algn="l">
+              <a:spcBef>
+                <a:spcPts val="0"/>
+              </a:spcBef>
+              <a:spcAft>
+                <a:spcPts val="0"/>
+              </a:spcAft>
+              <a:buSzPts val="1800"/>
+              <a:buAutoNum type="arabicPeriod"/>
+            </a:pPr>
+            <a:r>
+              <a:rPr lang="en"/>
+              <a:t>Procedure for suspected misconduct</a:t>
             </a:r>
             <a:endParaRPr/>
           </a:p>
@@ -22207,13 +22235,13 @@
           <p:cNvPr id="339" name="Google Shape;339;p50"/>
           <p:cNvSpPr txBox="1"/>
           <p:nvPr>
-            <p:ph idx="1" type="body"/>
+            <p:ph idx="2" type="body"/>
           </p:nvPr>
         </p:nvSpPr>
         <p:spPr>
           <a:xfrm>
-            <a:off x="274320" y="914400"/>
-            <a:ext cx="8595300" cy="4114800"/>
+            <a:off x="4846320" y="914400"/>
+            <a:ext cx="4114800" cy="4114800"/>
           </a:xfrm>
           <a:prstGeom prst="rect">
             <a:avLst/>
@@ -22233,11 +22261,11 @@
                 <a:spcPts val="0"/>
               </a:spcAft>
               <a:buSzPts val="1800"/>
-              <a:buAutoNum type="arabicPeriod"/>
-            </a:pPr>
-            <a:r>
-              <a:rPr lang="en"/>
-              <a:t>General principles of scientific practice</a:t>
+              <a:buAutoNum type="arabicPeriod" startAt="9"/>
+            </a:pPr>
+            <a:r>
+              <a:rPr lang="en"/>
+              <a:t>Cooperation of institutes</a:t>
             </a:r>
             <a:endParaRPr/>
           </a:p>
@@ -22250,11 +22278,11 @@
                 <a:spcPts val="0"/>
               </a:spcAft>
               <a:buSzPts val="1800"/>
-              <a:buAutoNum type="arabicPeriod"/>
-            </a:pPr>
-            <a:r>
-              <a:rPr lang="en"/>
-              <a:t>Cooperation and leadership responsibility within working groups</a:t>
+              <a:buAutoNum type="arabicPeriod" startAt="9"/>
+            </a:pPr>
+            <a:r>
+              <a:rPr lang="en"/>
+              <a:t>Learned societies</a:t>
             </a:r>
             <a:endParaRPr/>
           </a:p>
@@ -22267,11 +22295,11 @@
                 <a:spcPts val="0"/>
               </a:spcAft>
               <a:buSzPts val="1800"/>
-              <a:buAutoNum type="arabicPeriod"/>
-            </a:pPr>
-            <a:r>
-              <a:rPr lang="en"/>
-              <a:t>Guidance to junior scientists</a:t>
+              <a:buAutoNum type="arabicPeriod" startAt="9"/>
+            </a:pPr>
+            <a:r>
+              <a:rPr lang="en"/>
+              <a:t>Authorship</a:t>
             </a:r>
             <a:endParaRPr/>
           </a:p>
@@ -22284,11 +22312,11 @@
                 <a:spcPts val="0"/>
               </a:spcAft>
               <a:buSzPts val="1800"/>
-              <a:buAutoNum type="arabicPeriod"/>
-            </a:pPr>
-            <a:r>
-              <a:rPr lang="en"/>
-              <a:t>Securing and storing primary data</a:t>
+              <a:buAutoNum type="arabicPeriod" startAt="9"/>
+            </a:pPr>
+            <a:r>
+              <a:rPr lang="en"/>
+              <a:t>Scientific journals</a:t>
             </a:r>
             <a:endParaRPr/>
           </a:p>
@@ -22301,11 +22329,11 @@
                 <a:spcPts val="0"/>
               </a:spcAft>
               <a:buSzPts val="1800"/>
-              <a:buAutoNum type="arabicPeriod"/>
-            </a:pPr>
-            <a:r>
-              <a:rPr lang="en"/>
-              <a:t>Data protection</a:t>
+              <a:buAutoNum type="arabicPeriod" startAt="9"/>
+            </a:pPr>
+            <a:r>
+              <a:rPr lang="en"/>
+              <a:t>Guidelines for research proposals</a:t>
             </a:r>
             <a:endParaRPr/>
           </a:p>
@@ -22318,11 +22346,11 @@
                 <a:spcPts val="0"/>
               </a:spcAft>
               <a:buSzPts val="1800"/>
-              <a:buAutoNum type="arabicPeriod"/>
-            </a:pPr>
-            <a:r>
-              <a:rPr lang="en"/>
-              <a:t>Scientific publications</a:t>
+              <a:buAutoNum type="arabicPeriod" startAt="9"/>
+            </a:pPr>
+            <a:r>
+              <a:rPr lang="en"/>
+              <a:t>Rules for the use of funds</a:t>
             </a:r>
             <a:endParaRPr/>
           </a:p>
@@ -22335,11 +22363,11 @@
                 <a:spcPts val="0"/>
               </a:spcAft>
               <a:buSzPts val="1800"/>
-              <a:buAutoNum type="arabicPeriod"/>
-            </a:pPr>
-            <a:r>
-              <a:rPr lang="en"/>
-              <a:t>Conflicts of interest between science and industry</a:t>
+              <a:buAutoNum type="arabicPeriod" startAt="9"/>
+            </a:pPr>
+            <a:r>
+              <a:rPr lang="en"/>
+              <a:t>Reviewers</a:t>
             </a:r>
             <a:endParaRPr/>
           </a:p>
@@ -22352,28 +22380,11 @@
                 <a:spcPts val="0"/>
               </a:spcAft>
               <a:buSzPts val="1800"/>
-              <a:buAutoNum type="arabicPeriod"/>
-            </a:pPr>
-            <a:r>
-              <a:rPr lang="en"/>
-              <a:t>Appointing ombudspersons</a:t>
-            </a:r>
-            <a:endParaRPr/>
-          </a:p>
-          <a:p>
-            <a:pPr indent="-342900" lvl="0" marL="457200" rtl="0" algn="l">
-              <a:spcBef>
-                <a:spcPts val="0"/>
-              </a:spcBef>
-              <a:spcAft>
-                <a:spcPts val="0"/>
-              </a:spcAft>
-              <a:buSzPts val="1800"/>
-              <a:buAutoNum type="arabicPeriod"/>
-            </a:pPr>
-            <a:r>
-              <a:rPr lang="en"/>
-              <a:t>Whistleblower protection </a:t>
+              <a:buAutoNum type="arabicPeriod" startAt="9"/>
+            </a:pPr>
+            <a:r>
+              <a:rPr lang="en"/>
+              <a:t>Ombudsman for science</a:t>
             </a:r>
             <a:endParaRPr/>
           </a:p>
@@ -22382,71 +22393,6 @@
       <p:sp>
         <p:nvSpPr>
           <p:cNvPr id="340" name="Google Shape;340;p50"/>
-          <p:cNvSpPr txBox="1"/>
-          <p:nvPr>
-            <p:ph idx="12" type="sldNum"/>
-          </p:nvPr>
-        </p:nvSpPr>
-        <p:spPr>
-          <a:xfrm>
-            <a:off x="7315209" y="4229101"/>
-            <a:ext cx="1828800" cy="914400"/>
-          </a:xfrm>
-          <a:prstGeom prst="rect">
-            <a:avLst/>
-          </a:prstGeom>
-        </p:spPr>
-        <p:txBody>
-          <a:bodyPr anchorCtr="0" anchor="b" bIns="91425" lIns="91425" spcFirstLastPara="1" rIns="91425" wrap="square" tIns="91425">
-            <a:noAutofit/>
-          </a:bodyPr>
-          <a:lstStyle/>
-          <a:p>
-            <a:pPr indent="0" lvl="0" marL="0" rtl="0" algn="r">
-              <a:spcBef>
-                <a:spcPts val="0"/>
-              </a:spcBef>
-              <a:spcAft>
-                <a:spcPts val="0"/>
-              </a:spcAft>
-              <a:buNone/>
-            </a:pPr>
-            <a:fld id="{00000000-1234-1234-1234-123412341234}" type="slidenum">
-              <a:rPr lang="en"/>
-              <a:t>‹#›</a:t>
-            </a:fld>
-            <a:endParaRPr/>
-          </a:p>
-          <a:p>
-            <a:pPr indent="0" lvl="0" marL="0" rtl="0" algn="r">
-              <a:spcBef>
-                <a:spcPts val="0"/>
-              </a:spcBef>
-              <a:spcAft>
-                <a:spcPts val="0"/>
-              </a:spcAft>
-              <a:buNone/>
-            </a:pPr>
-            <a:r>
-              <a:rPr b="0" lang="en" sz="1000" u="sng">
-                <a:solidFill>
-                  <a:schemeClr val="hlink"/>
-                </a:solidFill>
-                <a:hlinkClick r:id="rId3"/>
-              </a:rPr>
-              <a:t>uni1.de/nyt</a:t>
-            </a:r>
-            <a:r>
-              <a:rPr b="0" lang="en" sz="1000"/>
-              <a:t> </a:t>
-            </a:r>
-            <a:endParaRPr b="0" sz="1000"/>
-          </a:p>
-        </p:txBody>
-      </p:sp>
-      <p:sp>
-        <p:nvSpPr>
-          <p:cNvPr id="341" name="Google Shape;341;p50"/>
           <p:cNvSpPr txBox="1"/>
           <p:nvPr/>
         </p:nvSpPr>
@@ -22476,11 +22422,29 @@
               <a:spcAft>
                 <a:spcPts val="0"/>
               </a:spcAft>
-              <a:buNone/>
-            </a:pPr>
-            <a:r>
-              <a:rPr lang="en"/>
-              <a:t>[1] See MPG (2009): Regeln zur Sicherung guter wissenschaftlicher Praxis.</a:t>
+              <a:buClr>
+                <a:schemeClr val="dk1"/>
+              </a:buClr>
+              <a:buSzPts val="1100"/>
+              <a:buFont typeface="Arial"/>
+              <a:buNone/>
+            </a:pPr>
+            <a:r>
+              <a:rPr lang="en"/>
+              <a:t>[1] See </a:t>
+            </a:r>
+            <a:r>
+              <a:rPr lang="en" u="sng">
+                <a:solidFill>
+                  <a:schemeClr val="hlink"/>
+                </a:solidFill>
+                <a:hlinkClick r:id="rId4"/>
+              </a:rPr>
+              <a:t>DFG (2019)</a:t>
+            </a:r>
+            <a:r>
+              <a:rPr lang="en"/>
+              <a:t>: Guidelines for safeguarding good research practice: Code of conduct.</a:t>
             </a:r>
             <a:endParaRPr/>
           </a:p>
@@ -22499,7 +22463,7 @@
   <p:cSld>
     <p:spTree>
       <p:nvGrpSpPr>
-        <p:cNvPr id="345" name="Shape 345"/>
+        <p:cNvPr id="344" name="Shape 344"/>
         <p:cNvGrpSpPr/>
         <p:nvPr/>
       </p:nvGrpSpPr>
@@ -22513,7 +22477,7 @@
       </p:grpSpPr>
       <p:sp>
         <p:nvSpPr>
-          <p:cNvPr id="346" name="Google Shape;346;p51"/>
+          <p:cNvPr id="345" name="Google Shape;345;p51"/>
           <p:cNvSpPr txBox="1"/>
           <p:nvPr>
             <p:ph type="title"/>
@@ -22545,7 +22509,184 @@
             </a:pPr>
             <a:r>
               <a:rPr lang="en"/>
-              <a:t>Summary</a:t>
+              <a:t>MPG’s Rules for Safeguarding Scientific Practice [1]</a:t>
+            </a:r>
+            <a:endParaRPr/>
+          </a:p>
+        </p:txBody>
+      </p:sp>
+      <p:sp>
+        <p:nvSpPr>
+          <p:cNvPr id="346" name="Google Shape;346;p51"/>
+          <p:cNvSpPr txBox="1"/>
+          <p:nvPr>
+            <p:ph idx="1" type="body"/>
+          </p:nvPr>
+        </p:nvSpPr>
+        <p:spPr>
+          <a:xfrm>
+            <a:off x="274320" y="914400"/>
+            <a:ext cx="8595300" cy="4114800"/>
+          </a:xfrm>
+          <a:prstGeom prst="rect">
+            <a:avLst/>
+          </a:prstGeom>
+        </p:spPr>
+        <p:txBody>
+          <a:bodyPr anchorCtr="0" anchor="t" bIns="0" lIns="0" spcFirstLastPara="1" rIns="0" wrap="square" tIns="0">
+            <a:noAutofit/>
+          </a:bodyPr>
+          <a:lstStyle/>
+          <a:p>
+            <a:pPr indent="-342900" lvl="0" marL="457200" rtl="0" algn="l">
+              <a:spcBef>
+                <a:spcPts val="0"/>
+              </a:spcBef>
+              <a:spcAft>
+                <a:spcPts val="0"/>
+              </a:spcAft>
+              <a:buSzPts val="1800"/>
+              <a:buAutoNum type="arabicPeriod"/>
+            </a:pPr>
+            <a:r>
+              <a:rPr lang="en"/>
+              <a:t>General principles of scientific practice</a:t>
+            </a:r>
+            <a:endParaRPr/>
+          </a:p>
+          <a:p>
+            <a:pPr indent="-342900" lvl="0" marL="457200" rtl="0" algn="l">
+              <a:spcBef>
+                <a:spcPts val="0"/>
+              </a:spcBef>
+              <a:spcAft>
+                <a:spcPts val="0"/>
+              </a:spcAft>
+              <a:buSzPts val="1800"/>
+              <a:buAutoNum type="arabicPeriod"/>
+            </a:pPr>
+            <a:r>
+              <a:rPr lang="en"/>
+              <a:t>Cooperation and leadership responsibility within working groups</a:t>
+            </a:r>
+            <a:endParaRPr/>
+          </a:p>
+          <a:p>
+            <a:pPr indent="-342900" lvl="0" marL="457200" rtl="0" algn="l">
+              <a:spcBef>
+                <a:spcPts val="0"/>
+              </a:spcBef>
+              <a:spcAft>
+                <a:spcPts val="0"/>
+              </a:spcAft>
+              <a:buSzPts val="1800"/>
+              <a:buAutoNum type="arabicPeriod"/>
+            </a:pPr>
+            <a:r>
+              <a:rPr lang="en"/>
+              <a:t>Guidance to junior scientists</a:t>
+            </a:r>
+            <a:endParaRPr/>
+          </a:p>
+          <a:p>
+            <a:pPr indent="-342900" lvl="0" marL="457200" rtl="0" algn="l">
+              <a:spcBef>
+                <a:spcPts val="0"/>
+              </a:spcBef>
+              <a:spcAft>
+                <a:spcPts val="0"/>
+              </a:spcAft>
+              <a:buSzPts val="1800"/>
+              <a:buAutoNum type="arabicPeriod"/>
+            </a:pPr>
+            <a:r>
+              <a:rPr lang="en"/>
+              <a:t>Securing and storing primary data</a:t>
+            </a:r>
+            <a:endParaRPr/>
+          </a:p>
+          <a:p>
+            <a:pPr indent="-342900" lvl="0" marL="457200" rtl="0" algn="l">
+              <a:spcBef>
+                <a:spcPts val="0"/>
+              </a:spcBef>
+              <a:spcAft>
+                <a:spcPts val="0"/>
+              </a:spcAft>
+              <a:buSzPts val="1800"/>
+              <a:buAutoNum type="arabicPeriod"/>
+            </a:pPr>
+            <a:r>
+              <a:rPr lang="en"/>
+              <a:t>Data protection</a:t>
+            </a:r>
+            <a:endParaRPr/>
+          </a:p>
+          <a:p>
+            <a:pPr indent="-342900" lvl="0" marL="457200" rtl="0" algn="l">
+              <a:spcBef>
+                <a:spcPts val="0"/>
+              </a:spcBef>
+              <a:spcAft>
+                <a:spcPts val="0"/>
+              </a:spcAft>
+              <a:buSzPts val="1800"/>
+              <a:buAutoNum type="arabicPeriod"/>
+            </a:pPr>
+            <a:r>
+              <a:rPr lang="en"/>
+              <a:t>Scientific publications</a:t>
+            </a:r>
+            <a:endParaRPr/>
+          </a:p>
+          <a:p>
+            <a:pPr indent="-342900" lvl="0" marL="457200" rtl="0" algn="l">
+              <a:spcBef>
+                <a:spcPts val="0"/>
+              </a:spcBef>
+              <a:spcAft>
+                <a:spcPts val="0"/>
+              </a:spcAft>
+              <a:buSzPts val="1800"/>
+              <a:buAutoNum type="arabicPeriod"/>
+            </a:pPr>
+            <a:r>
+              <a:rPr lang="en"/>
+              <a:t>Conflicts of interest between science and industry</a:t>
+            </a:r>
+            <a:endParaRPr/>
+          </a:p>
+          <a:p>
+            <a:pPr indent="-342900" lvl="0" marL="457200" rtl="0" algn="l">
+              <a:spcBef>
+                <a:spcPts val="0"/>
+              </a:spcBef>
+              <a:spcAft>
+                <a:spcPts val="0"/>
+              </a:spcAft>
+              <a:buSzPts val="1800"/>
+              <a:buAutoNum type="arabicPeriod"/>
+            </a:pPr>
+            <a:r>
+              <a:rPr lang="en"/>
+              <a:t>Appointing ombudspersons</a:t>
+            </a:r>
+            <a:endParaRPr/>
+          </a:p>
+          <a:p>
+            <a:pPr indent="-342900" lvl="0" marL="457200" rtl="0" algn="l">
+              <a:spcBef>
+                <a:spcPts val="0"/>
+              </a:spcBef>
+              <a:spcAft>
+                <a:spcPts val="0"/>
+              </a:spcAft>
+              <a:buSzPts val="1800"/>
+              <a:buAutoNum type="arabicPeriod"/>
+            </a:pPr>
+            <a:r>
+              <a:rPr lang="en"/>
+              <a:t>Whistleblower protection </a:t>
             </a:r>
             <a:endParaRPr/>
           </a:p>
@@ -22620,138 +22761,52 @@
         <p:nvSpPr>
           <p:cNvPr id="348" name="Google Shape;348;p51"/>
           <p:cNvSpPr txBox="1"/>
-          <p:nvPr>
-            <p:ph idx="1" type="body"/>
-          </p:nvPr>
+          <p:nvPr/>
         </p:nvSpPr>
         <p:spPr>
           <a:xfrm>
-            <a:off x="274320" y="914400"/>
-            <a:ext cx="8595300" cy="4114800"/>
+            <a:off x="0" y="4233672"/>
+            <a:ext cx="7315200" cy="914400"/>
           </a:xfrm>
           <a:prstGeom prst="rect">
             <a:avLst/>
           </a:prstGeom>
+          <a:noFill/>
+          <a:ln>
+            <a:noFill/>
+          </a:ln>
         </p:spPr>
         <p:txBody>
-          <a:bodyPr anchorCtr="0" anchor="t" bIns="0" lIns="0" spcFirstLastPara="1" rIns="0" wrap="square" tIns="0">
+          <a:bodyPr anchorCtr="0" anchor="b" bIns="91425" lIns="91425" spcFirstLastPara="1" rIns="91425" wrap="square" tIns="91425">
             <a:noAutofit/>
           </a:bodyPr>
           <a:lstStyle/>
           <a:p>
-            <a:pPr indent="-342900" lvl="0" marL="457200" rtl="0" algn="l">
-              <a:spcBef>
-                <a:spcPts val="0"/>
-              </a:spcBef>
-              <a:spcAft>
-                <a:spcPts val="0"/>
-              </a:spcAft>
-              <a:buSzPts val="1800"/>
-              <a:buAutoNum type="arabicPeriod"/>
-            </a:pPr>
-            <a:r>
-              <a:rPr lang="en"/>
-              <a:t>What is science?</a:t>
-            </a:r>
-            <a:endParaRPr/>
-          </a:p>
-          <a:p>
-            <a:pPr indent="-342900" lvl="0" marL="457200" rtl="0" algn="l">
-              <a:spcBef>
-                <a:spcPts val="0"/>
-              </a:spcBef>
-              <a:spcAft>
-                <a:spcPts val="0"/>
-              </a:spcAft>
-              <a:buSzPts val="1800"/>
-              <a:buAutoNum type="arabicPeriod"/>
-            </a:pPr>
-            <a:r>
-              <a:rPr lang="en"/>
-              <a:t>Theory building and validation</a:t>
-            </a:r>
-            <a:endParaRPr/>
-          </a:p>
-          <a:p>
-            <a:pPr indent="-342900" lvl="0" marL="457200" rtl="0" algn="l">
-              <a:spcBef>
-                <a:spcPts val="0"/>
-              </a:spcBef>
-              <a:spcAft>
-                <a:spcPts val="0"/>
-              </a:spcAft>
-              <a:buSzPts val="1800"/>
-              <a:buAutoNum type="arabicPeriod"/>
-            </a:pPr>
-            <a:r>
-              <a:rPr lang="en"/>
-              <a:t>Science as a social system</a:t>
-            </a:r>
-            <a:endParaRPr/>
-          </a:p>
-          <a:p>
-            <a:pPr indent="-342900" lvl="0" marL="457200" rtl="0" algn="l">
-              <a:spcBef>
-                <a:spcPts val="0"/>
-              </a:spcBef>
-              <a:spcAft>
-                <a:spcPts val="0"/>
-              </a:spcAft>
-              <a:buSzPts val="1800"/>
-              <a:buAutoNum type="arabicPeriod"/>
-            </a:pPr>
-            <a:r>
-              <a:rPr lang="en"/>
-              <a:t>Programs and projects</a:t>
-            </a:r>
-            <a:endParaRPr/>
-          </a:p>
-          <a:p>
-            <a:pPr indent="-342900" lvl="0" marL="457200" rtl="0" algn="l">
-              <a:spcBef>
-                <a:spcPts val="0"/>
-              </a:spcBef>
-              <a:spcAft>
-                <a:spcPts val="0"/>
-              </a:spcAft>
-              <a:buSzPts val="1800"/>
-              <a:buAutoNum type="arabicPeriod"/>
-            </a:pPr>
-            <a:r>
-              <a:rPr lang="en"/>
-              <a:t>Science and society</a:t>
-            </a:r>
-            <a:endParaRPr/>
-          </a:p>
-          <a:p>
-            <a:pPr indent="-342900" lvl="0" marL="457200" rtl="0" algn="l">
-              <a:spcBef>
-                <a:spcPts val="0"/>
-              </a:spcBef>
-              <a:spcAft>
-                <a:spcPts val="0"/>
-              </a:spcAft>
-              <a:buSzPts val="1800"/>
-              <a:buAutoNum type="arabicPeriod"/>
-            </a:pPr>
-            <a:r>
-              <a:rPr lang="en"/>
-              <a:t>Research ethics</a:t>
-            </a:r>
-            <a:endParaRPr/>
-          </a:p>
-          <a:p>
             <a:pPr indent="0" lvl="0" marL="0" rtl="0" algn="l">
               <a:spcBef>
-                <a:spcPts val="1200"/>
-              </a:spcBef>
-              <a:spcAft>
-                <a:spcPts val="1200"/>
-              </a:spcAft>
-              <a:buNone/>
-            </a:pPr>
-            <a:r>
-              <a:t/>
+                <a:spcPts val="0"/>
+              </a:spcBef>
+              <a:spcAft>
+                <a:spcPts val="0"/>
+              </a:spcAft>
+              <a:buNone/>
+            </a:pPr>
+            <a:r>
+              <a:rPr lang="en"/>
+              <a:t>[1] See </a:t>
+            </a:r>
+            <a:r>
+              <a:rPr lang="en" u="sng">
+                <a:solidFill>
+                  <a:schemeClr val="hlink"/>
+                </a:solidFill>
+                <a:hlinkClick r:id="rId4"/>
+              </a:rPr>
+              <a:t>MPG (2009)</a:t>
+            </a:r>
+            <a:r>
+              <a:rPr lang="en"/>
+              <a:t>: Regeln zur Sicherung guter wissenschaftlicher Praxis.</a:t>
             </a:r>
             <a:endParaRPr/>
           </a:p>
@@ -22787,36 +22842,36 @@
           <p:cNvPr id="353" name="Google Shape;353;p52"/>
           <p:cNvSpPr txBox="1"/>
           <p:nvPr>
-            <p:ph type="ctrTitle"/>
+            <p:ph type="title"/>
           </p:nvPr>
         </p:nvSpPr>
         <p:spPr>
           <a:xfrm>
             <a:off x="0" y="0"/>
-            <a:ext cx="9144000" cy="2388900"/>
+            <a:ext cx="9144000" cy="685800"/>
           </a:xfrm>
           <a:prstGeom prst="rect">
             <a:avLst/>
           </a:prstGeom>
         </p:spPr>
         <p:txBody>
-          <a:bodyPr anchorCtr="0" anchor="b" bIns="274300" lIns="91425" spcFirstLastPara="1" rIns="91425" wrap="square" tIns="91425">
+          <a:bodyPr anchorCtr="0" anchor="ctr" bIns="91425" lIns="274300" spcFirstLastPara="1" rIns="91425" wrap="square" tIns="91425">
             <a:noAutofit/>
           </a:bodyPr>
           <a:lstStyle/>
           <a:p>
-            <a:pPr indent="0" lvl="0" marL="0" rtl="0" algn="ctr">
-              <a:spcBef>
-                <a:spcPts val="0"/>
-              </a:spcBef>
-              <a:spcAft>
-                <a:spcPts val="0"/>
-              </a:spcAft>
-              <a:buNone/>
-            </a:pPr>
-            <a:r>
-              <a:rPr lang="en"/>
-              <a:t>Thank you! Any questions?</a:t>
+            <a:pPr indent="0" lvl="0" marL="0" rtl="0" algn="l">
+              <a:spcBef>
+                <a:spcPts val="0"/>
+              </a:spcBef>
+              <a:spcAft>
+                <a:spcPts val="0"/>
+              </a:spcAft>
+              <a:buNone/>
+            </a:pPr>
+            <a:r>
+              <a:rPr lang="en"/>
+              <a:t>Summary</a:t>
             </a:r>
             <a:endParaRPr/>
           </a:p>
@@ -22827,117 +22882,204 @@
           <p:cNvPr id="354" name="Google Shape;354;p52"/>
           <p:cNvSpPr txBox="1"/>
           <p:nvPr>
-            <p:ph idx="1" type="subTitle"/>
+            <p:ph idx="12" type="sldNum"/>
           </p:nvPr>
         </p:nvSpPr>
         <p:spPr>
           <a:xfrm>
-            <a:off x="0" y="2569475"/>
-            <a:ext cx="9144000" cy="2574000"/>
+            <a:off x="7315209" y="4229101"/>
+            <a:ext cx="1828800" cy="914400"/>
           </a:xfrm>
           <a:prstGeom prst="rect">
             <a:avLst/>
           </a:prstGeom>
         </p:spPr>
         <p:txBody>
-          <a:bodyPr anchorCtr="0" anchor="t" bIns="91425" lIns="91425" spcFirstLastPara="1" rIns="91425" wrap="square" tIns="274300">
+          <a:bodyPr anchorCtr="0" anchor="b" bIns="91425" lIns="91425" spcFirstLastPara="1" rIns="91425" wrap="square" tIns="91425">
             <a:noAutofit/>
           </a:bodyPr>
           <a:lstStyle/>
           <a:p>
-            <a:pPr indent="0" lvl="0" marL="0" rtl="0" algn="ctr">
-              <a:lnSpc>
-                <a:spcPct val="150000"/>
-              </a:lnSpc>
-              <a:spcBef>
-                <a:spcPts val="0"/>
-              </a:spcBef>
-              <a:spcAft>
-                <a:spcPts val="0"/>
-              </a:spcAft>
-              <a:buNone/>
-            </a:pPr>
-            <a:r>
-              <a:rPr lang="en" u="sng">
+            <a:pPr indent="0" lvl="0" marL="0" rtl="0" algn="r">
+              <a:spcBef>
+                <a:spcPts val="0"/>
+              </a:spcBef>
+              <a:spcAft>
+                <a:spcPts val="0"/>
+              </a:spcAft>
+              <a:buNone/>
+            </a:pPr>
+            <a:fld id="{00000000-1234-1234-1234-123412341234}" type="slidenum">
+              <a:rPr lang="en"/>
+              <a:t>‹#›</a:t>
+            </a:fld>
+            <a:endParaRPr/>
+          </a:p>
+          <a:p>
+            <a:pPr indent="0" lvl="0" marL="0" rtl="0" algn="r">
+              <a:spcBef>
+                <a:spcPts val="0"/>
+              </a:spcBef>
+              <a:spcAft>
+                <a:spcPts val="0"/>
+              </a:spcAft>
+              <a:buNone/>
+            </a:pPr>
+            <a:r>
+              <a:rPr b="0" lang="en" sz="1000" u="sng">
                 <a:solidFill>
                   <a:schemeClr val="hlink"/>
                 </a:solidFill>
                 <a:hlinkClick r:id="rId3"/>
               </a:rPr>
-              <a:t>dirk.riehle@fau.de</a:t>
-            </a:r>
-            <a:r>
-              <a:rPr lang="en"/>
+              <a:t>uni1.de/nyt</a:t>
+            </a:r>
+            <a:r>
+              <a:rPr b="0" lang="en" sz="1000"/>
               <a:t> </a:t>
             </a:r>
-            <a:r>
-              <a:rPr lang="en" sz="2400"/>
-              <a:t>–</a:t>
-            </a:r>
-            <a:r>
-              <a:rPr lang="en"/>
-              <a:t> </a:t>
-            </a:r>
-            <a:r>
-              <a:rPr lang="en" u="sng">
-                <a:solidFill>
-                  <a:schemeClr val="hlink"/>
-                </a:solidFill>
-                <a:hlinkClick r:id="rId4"/>
-              </a:rPr>
-              <a:t>https://oss.cs.fau.de</a:t>
-            </a:r>
-            <a:endParaRPr/>
-          </a:p>
-          <a:p>
-            <a:pPr indent="0" lvl="0" marL="0" rtl="0" algn="ctr">
-              <a:lnSpc>
-                <a:spcPct val="150000"/>
-              </a:lnSpc>
-              <a:spcBef>
-                <a:spcPts val="0"/>
-              </a:spcBef>
-              <a:spcAft>
-                <a:spcPts val="0"/>
-              </a:spcAft>
-              <a:buNone/>
-            </a:pPr>
-            <a:r>
-              <a:rPr lang="en" sz="2400" u="sng">
-                <a:solidFill>
-                  <a:schemeClr val="hlink"/>
-                </a:solidFill>
-                <a:hlinkClick r:id="rId5"/>
-              </a:rPr>
-              <a:t>dirk@riehle.org</a:t>
-            </a:r>
-            <a:r>
-              <a:rPr lang="en" sz="2400"/>
-              <a:t> – </a:t>
-            </a:r>
-            <a:r>
-              <a:rPr lang="en" sz="2400" u="sng">
-                <a:solidFill>
-                  <a:schemeClr val="hlink"/>
-                </a:solidFill>
-                <a:hlinkClick r:id="rId6"/>
-              </a:rPr>
-              <a:t>https://dirkriehle.com</a:t>
-            </a:r>
-            <a:r>
-              <a:rPr lang="en" sz="2400"/>
-              <a:t> – </a:t>
-            </a:r>
-            <a:r>
-              <a:rPr lang="en" sz="2400" u="sng">
-                <a:solidFill>
-                  <a:schemeClr val="hlink"/>
-                </a:solidFill>
-                <a:hlinkClick r:id="rId7"/>
-              </a:rPr>
-              <a:t>@dirkriehle</a:t>
-            </a:r>
-            <a:endParaRPr sz="2400"/>
+            <a:endParaRPr b="0" sz="1000"/>
+          </a:p>
+        </p:txBody>
+      </p:sp>
+      <p:sp>
+        <p:nvSpPr>
+          <p:cNvPr id="355" name="Google Shape;355;p52"/>
+          <p:cNvSpPr txBox="1"/>
+          <p:nvPr>
+            <p:ph idx="1" type="body"/>
+          </p:nvPr>
+        </p:nvSpPr>
+        <p:spPr>
+          <a:xfrm>
+            <a:off x="274320" y="914400"/>
+            <a:ext cx="8595300" cy="4114800"/>
+          </a:xfrm>
+          <a:prstGeom prst="rect">
+            <a:avLst/>
+          </a:prstGeom>
+        </p:spPr>
+        <p:txBody>
+          <a:bodyPr anchorCtr="0" anchor="t" bIns="0" lIns="0" spcFirstLastPara="1" rIns="0" wrap="square" tIns="0">
+            <a:noAutofit/>
+          </a:bodyPr>
+          <a:lstStyle/>
+          <a:p>
+            <a:pPr indent="-342900" lvl="0" marL="457200" rtl="0" algn="l">
+              <a:spcBef>
+                <a:spcPts val="0"/>
+              </a:spcBef>
+              <a:spcAft>
+                <a:spcPts val="0"/>
+              </a:spcAft>
+              <a:buSzPts val="1800"/>
+              <a:buAutoNum type="arabicPeriod"/>
+            </a:pPr>
+            <a:r>
+              <a:rPr lang="en"/>
+              <a:t>What is science?</a:t>
+            </a:r>
+            <a:endParaRPr/>
+          </a:p>
+          <a:p>
+            <a:pPr indent="-342900" lvl="0" marL="457200" rtl="0" algn="l">
+              <a:spcBef>
+                <a:spcPts val="0"/>
+              </a:spcBef>
+              <a:spcAft>
+                <a:spcPts val="0"/>
+              </a:spcAft>
+              <a:buSzPts val="1800"/>
+              <a:buAutoNum type="arabicPeriod"/>
+            </a:pPr>
+            <a:r>
+              <a:rPr lang="en"/>
+              <a:t>Theory building and validation</a:t>
+            </a:r>
+            <a:endParaRPr/>
+          </a:p>
+          <a:p>
+            <a:pPr indent="-342900" lvl="0" marL="457200" rtl="0" algn="l">
+              <a:spcBef>
+                <a:spcPts val="0"/>
+              </a:spcBef>
+              <a:spcAft>
+                <a:spcPts val="0"/>
+              </a:spcAft>
+              <a:buSzPts val="1800"/>
+              <a:buAutoNum type="arabicPeriod"/>
+            </a:pPr>
+            <a:r>
+              <a:rPr lang="en"/>
+              <a:t>Science as a social system</a:t>
+            </a:r>
+            <a:endParaRPr/>
+          </a:p>
+          <a:p>
+            <a:pPr indent="-342900" lvl="0" marL="457200" rtl="0" algn="l">
+              <a:spcBef>
+                <a:spcPts val="0"/>
+              </a:spcBef>
+              <a:spcAft>
+                <a:spcPts val="0"/>
+              </a:spcAft>
+              <a:buSzPts val="1800"/>
+              <a:buAutoNum type="arabicPeriod"/>
+            </a:pPr>
+            <a:r>
+              <a:rPr lang="en"/>
+              <a:t>Programs and projects</a:t>
+            </a:r>
+            <a:endParaRPr/>
+          </a:p>
+          <a:p>
+            <a:pPr indent="-342900" lvl="0" marL="457200" rtl="0" algn="l">
+              <a:spcBef>
+                <a:spcPts val="0"/>
+              </a:spcBef>
+              <a:spcAft>
+                <a:spcPts val="0"/>
+              </a:spcAft>
+              <a:buSzPts val="1800"/>
+              <a:buAutoNum type="arabicPeriod"/>
+            </a:pPr>
+            <a:r>
+              <a:rPr lang="en"/>
+              <a:t>Science and society</a:t>
+            </a:r>
+            <a:endParaRPr/>
+          </a:p>
+          <a:p>
+            <a:pPr indent="-342900" lvl="0" marL="457200" rtl="0" algn="l">
+              <a:spcBef>
+                <a:spcPts val="0"/>
+              </a:spcBef>
+              <a:spcAft>
+                <a:spcPts val="0"/>
+              </a:spcAft>
+              <a:buSzPts val="1800"/>
+              <a:buAutoNum type="arabicPeriod"/>
+            </a:pPr>
+            <a:r>
+              <a:rPr lang="en"/>
+              <a:t>Research ethics</a:t>
+            </a:r>
+            <a:endParaRPr/>
+          </a:p>
+          <a:p>
+            <a:pPr indent="0" lvl="0" marL="0" rtl="0" algn="l">
+              <a:spcBef>
+                <a:spcPts val="1200"/>
+              </a:spcBef>
+              <a:spcAft>
+                <a:spcPts val="1200"/>
+              </a:spcAft>
+              <a:buNone/>
+            </a:pPr>
+            <a:r>
+              <a:t/>
+            </a:r>
+            <a:endParaRPr/>
           </a:p>
         </p:txBody>
       </p:sp>
@@ -22954,7 +23096,7 @@
   <p:cSld>
     <p:spTree>
       <p:nvGrpSpPr>
-        <p:cNvPr id="358" name="Shape 358"/>
+        <p:cNvPr id="359" name="Shape 359"/>
         <p:cNvGrpSpPr/>
         <p:nvPr/>
       </p:nvGrpSpPr>
@@ -22968,114 +23110,41 @@
       </p:grpSpPr>
       <p:sp>
         <p:nvSpPr>
-          <p:cNvPr id="359" name="Google Shape;359;p53"/>
+          <p:cNvPr id="360" name="Google Shape;360;p53"/>
           <p:cNvSpPr txBox="1"/>
           <p:nvPr>
-            <p:ph type="title"/>
+            <p:ph type="ctrTitle"/>
           </p:nvPr>
         </p:nvSpPr>
         <p:spPr>
           <a:xfrm>
             <a:off x="0" y="0"/>
-            <a:ext cx="9144000" cy="685800"/>
+            <a:ext cx="9144000" cy="2388900"/>
           </a:xfrm>
           <a:prstGeom prst="rect">
             <a:avLst/>
           </a:prstGeom>
         </p:spPr>
         <p:txBody>
-          <a:bodyPr anchorCtr="0" anchor="ctr" bIns="91425" lIns="274300" spcFirstLastPara="1" rIns="91425" wrap="square" tIns="91425">
+          <a:bodyPr anchorCtr="0" anchor="b" bIns="274300" lIns="91425" spcFirstLastPara="1" rIns="91425" wrap="square" tIns="91425">
             <a:noAutofit/>
           </a:bodyPr>
           <a:lstStyle/>
           <a:p>
-            <a:pPr indent="0" lvl="0" marL="0" rtl="0" algn="l">
-              <a:spcBef>
-                <a:spcPts val="0"/>
-              </a:spcBef>
-              <a:spcAft>
-                <a:spcPts val="0"/>
-              </a:spcAft>
-              <a:buNone/>
-            </a:pPr>
-            <a:r>
-              <a:rPr lang="en"/>
-              <a:t>Legal Notices</a:t>
-            </a:r>
-            <a:endParaRPr/>
-          </a:p>
-        </p:txBody>
-      </p:sp>
-      <p:sp>
-        <p:nvSpPr>
-          <p:cNvPr id="360" name="Google Shape;360;p53"/>
-          <p:cNvSpPr txBox="1"/>
-          <p:nvPr>
-            <p:ph idx="12" type="sldNum"/>
-          </p:nvPr>
-        </p:nvSpPr>
-        <p:spPr>
-          <a:xfrm>
-            <a:off x="7315209" y="4229101"/>
-            <a:ext cx="1828800" cy="914400"/>
-          </a:xfrm>
-          <a:prstGeom prst="rect">
-            <a:avLst/>
-          </a:prstGeom>
-        </p:spPr>
-        <p:txBody>
-          <a:bodyPr anchorCtr="0" anchor="b" bIns="91425" lIns="91425" spcFirstLastPara="1" rIns="91425" wrap="square" tIns="91425">
-            <a:noAutofit/>
-          </a:bodyPr>
-          <a:lstStyle/>
-          <a:p>
-            <a:pPr indent="0" lvl="0" marL="0" rtl="0" algn="r">
-              <a:spcBef>
-                <a:spcPts val="0"/>
-              </a:spcBef>
-              <a:spcAft>
-                <a:spcPts val="0"/>
-              </a:spcAft>
-              <a:buNone/>
-            </a:pPr>
-            <a:fld id="{00000000-1234-1234-1234-123412341234}" type="slidenum">
-              <a:rPr lang="en"/>
-              <a:t>‹#›</a:t>
-            </a:fld>
-            <a:endParaRPr/>
-          </a:p>
-          <a:p>
-            <a:pPr indent="0" lvl="0" marL="0" rtl="0" algn="r">
-              <a:spcBef>
-                <a:spcPts val="0"/>
-              </a:spcBef>
-              <a:spcAft>
-                <a:spcPts val="0"/>
-              </a:spcAft>
-              <a:buNone/>
-            </a:pPr>
-            <a:r>
-              <a:rPr b="0" lang="en" sz="900" u="sng">
-                <a:solidFill>
-                  <a:schemeClr val="hlink"/>
-                </a:solidFill>
-                <a:hlinkClick r:id="rId3"/>
-              </a:rPr>
-              <a:t>https://profriehle.com</a:t>
-            </a:r>
-            <a:r>
-              <a:rPr b="0" lang="en" sz="900">
-                <a:solidFill>
-                  <a:schemeClr val="dk2"/>
-                </a:solidFill>
-              </a:rPr>
-              <a:t> </a:t>
-            </a:r>
-            <a:endParaRPr b="0" sz="900">
-              <a:solidFill>
-                <a:schemeClr val="dk2"/>
-              </a:solidFill>
-            </a:endParaRPr>
+            <a:pPr indent="0" lvl="0" marL="0" rtl="0" algn="ctr">
+              <a:spcBef>
+                <a:spcPts val="0"/>
+              </a:spcBef>
+              <a:spcAft>
+                <a:spcPts val="0"/>
+              </a:spcAft>
+              <a:buNone/>
+            </a:pPr>
+            <a:r>
+              <a:rPr lang="en"/>
+              <a:t>Thank you! Any questions?</a:t>
+            </a:r>
+            <a:endParaRPr/>
           </a:p>
         </p:txBody>
       </p:sp>
@@ -23084,6 +23153,255 @@
           <p:cNvPr id="361" name="Google Shape;361;p53"/>
           <p:cNvSpPr txBox="1"/>
           <p:nvPr>
+            <p:ph idx="1" type="subTitle"/>
+          </p:nvPr>
+        </p:nvSpPr>
+        <p:spPr>
+          <a:xfrm>
+            <a:off x="0" y="2569475"/>
+            <a:ext cx="9144000" cy="2574000"/>
+          </a:xfrm>
+          <a:prstGeom prst="rect">
+            <a:avLst/>
+          </a:prstGeom>
+        </p:spPr>
+        <p:txBody>
+          <a:bodyPr anchorCtr="0" anchor="t" bIns="91425" lIns="91425" spcFirstLastPara="1" rIns="91425" wrap="square" tIns="274300">
+            <a:noAutofit/>
+          </a:bodyPr>
+          <a:lstStyle/>
+          <a:p>
+            <a:pPr indent="0" lvl="0" marL="0" rtl="0" algn="ctr">
+              <a:lnSpc>
+                <a:spcPct val="150000"/>
+              </a:lnSpc>
+              <a:spcBef>
+                <a:spcPts val="0"/>
+              </a:spcBef>
+              <a:spcAft>
+                <a:spcPts val="0"/>
+              </a:spcAft>
+              <a:buNone/>
+            </a:pPr>
+            <a:r>
+              <a:rPr lang="en" u="sng">
+                <a:solidFill>
+                  <a:schemeClr val="hlink"/>
+                </a:solidFill>
+                <a:hlinkClick r:id="rId3"/>
+              </a:rPr>
+              <a:t>dirk.riehle@fau.de</a:t>
+            </a:r>
+            <a:r>
+              <a:rPr lang="en"/>
+              <a:t> </a:t>
+            </a:r>
+            <a:r>
+              <a:rPr lang="en" sz="2400"/>
+              <a:t>–</a:t>
+            </a:r>
+            <a:r>
+              <a:rPr lang="en"/>
+              <a:t> </a:t>
+            </a:r>
+            <a:r>
+              <a:rPr lang="en" u="sng">
+                <a:solidFill>
+                  <a:schemeClr val="hlink"/>
+                </a:solidFill>
+                <a:hlinkClick r:id="rId4"/>
+              </a:rPr>
+              <a:t>https://oss.cs.fau.de</a:t>
+            </a:r>
+            <a:endParaRPr/>
+          </a:p>
+          <a:p>
+            <a:pPr indent="0" lvl="0" marL="0" rtl="0" algn="ctr">
+              <a:lnSpc>
+                <a:spcPct val="150000"/>
+              </a:lnSpc>
+              <a:spcBef>
+                <a:spcPts val="0"/>
+              </a:spcBef>
+              <a:spcAft>
+                <a:spcPts val="0"/>
+              </a:spcAft>
+              <a:buNone/>
+            </a:pPr>
+            <a:r>
+              <a:rPr lang="en" sz="2400" u="sng">
+                <a:solidFill>
+                  <a:schemeClr val="hlink"/>
+                </a:solidFill>
+                <a:hlinkClick r:id="rId5"/>
+              </a:rPr>
+              <a:t>dirk@riehle.org</a:t>
+            </a:r>
+            <a:r>
+              <a:rPr lang="en" sz="2400"/>
+              <a:t> – </a:t>
+            </a:r>
+            <a:r>
+              <a:rPr lang="en" sz="2400" u="sng">
+                <a:solidFill>
+                  <a:schemeClr val="hlink"/>
+                </a:solidFill>
+                <a:hlinkClick r:id="rId6"/>
+              </a:rPr>
+              <a:t>https://dirkriehle.com</a:t>
+            </a:r>
+            <a:r>
+              <a:rPr lang="en" sz="2400"/>
+              <a:t> – </a:t>
+            </a:r>
+            <a:r>
+              <a:rPr lang="en" sz="2400" u="sng">
+                <a:solidFill>
+                  <a:schemeClr val="hlink"/>
+                </a:solidFill>
+                <a:hlinkClick r:id="rId7"/>
+              </a:rPr>
+              <a:t>@dirkriehle</a:t>
+            </a:r>
+            <a:endParaRPr sz="2400"/>
+          </a:p>
+        </p:txBody>
+      </p:sp>
+    </p:spTree>
+  </p:cSld>
+  <p:clrMapOvr>
+    <a:masterClrMapping/>
+  </p:clrMapOvr>
+</p:sld>
+</file>
+
+<file path=ppt/slides/slide47.xml><?xml version="1.0" encoding="utf-8"?>
+<p:sld xmlns:a="http://schemas.openxmlformats.org/drawingml/2006/main" xmlns:r="http://schemas.openxmlformats.org/officeDocument/2006/relationships" xmlns:mc="http://schemas.openxmlformats.org/markup-compatibility/2006" xmlns:mv="urn:schemas-microsoft-com:mac:vml" xmlns:p="http://schemas.openxmlformats.org/presentationml/2006/main" xmlns:c="http://schemas.openxmlformats.org/drawingml/2006/chart" xmlns:dgm="http://schemas.openxmlformats.org/drawingml/2006/diagram" xmlns:o="urn:schemas-microsoft-com:office:office" xmlns:v="urn:schemas-microsoft-com:vml" xmlns:pvml="urn:schemas-microsoft-com:office:powerpoint" xmlns:com="http://schemas.openxmlformats.org/drawingml/2006/compatibility" xmlns:p14="http://schemas.microsoft.com/office/powerpoint/2010/main" xmlns:p15="http://schemas.microsoft.com/office/powerpoint/2012/main" xmlns:ahyp="http://schemas.microsoft.com/office/drawing/2018/hyperlinkcolor">
+  <p:cSld>
+    <p:spTree>
+      <p:nvGrpSpPr>
+        <p:cNvPr id="365" name="Shape 365"/>
+        <p:cNvGrpSpPr/>
+        <p:nvPr/>
+      </p:nvGrpSpPr>
+      <p:grpSpPr>
+        <a:xfrm>
+          <a:off x="0" y="0"/>
+          <a:ext cx="0" cy="0"/>
+          <a:chOff x="0" y="0"/>
+          <a:chExt cx="0" cy="0"/>
+        </a:xfrm>
+      </p:grpSpPr>
+      <p:sp>
+        <p:nvSpPr>
+          <p:cNvPr id="366" name="Google Shape;366;p54"/>
+          <p:cNvSpPr txBox="1"/>
+          <p:nvPr>
+            <p:ph type="title"/>
+          </p:nvPr>
+        </p:nvSpPr>
+        <p:spPr>
+          <a:xfrm>
+            <a:off x="0" y="0"/>
+            <a:ext cx="9144000" cy="685800"/>
+          </a:xfrm>
+          <a:prstGeom prst="rect">
+            <a:avLst/>
+          </a:prstGeom>
+        </p:spPr>
+        <p:txBody>
+          <a:bodyPr anchorCtr="0" anchor="ctr" bIns="91425" lIns="274300" spcFirstLastPara="1" rIns="91425" wrap="square" tIns="91425">
+            <a:noAutofit/>
+          </a:bodyPr>
+          <a:lstStyle/>
+          <a:p>
+            <a:pPr indent="0" lvl="0" marL="0" rtl="0" algn="l">
+              <a:spcBef>
+                <a:spcPts val="0"/>
+              </a:spcBef>
+              <a:spcAft>
+                <a:spcPts val="0"/>
+              </a:spcAft>
+              <a:buNone/>
+            </a:pPr>
+            <a:r>
+              <a:rPr lang="en"/>
+              <a:t>Legal Notices</a:t>
+            </a:r>
+            <a:endParaRPr/>
+          </a:p>
+        </p:txBody>
+      </p:sp>
+      <p:sp>
+        <p:nvSpPr>
+          <p:cNvPr id="367" name="Google Shape;367;p54"/>
+          <p:cNvSpPr txBox="1"/>
+          <p:nvPr>
+            <p:ph idx="12" type="sldNum"/>
+          </p:nvPr>
+        </p:nvSpPr>
+        <p:spPr>
+          <a:xfrm>
+            <a:off x="7315209" y="4229101"/>
+            <a:ext cx="1828800" cy="914400"/>
+          </a:xfrm>
+          <a:prstGeom prst="rect">
+            <a:avLst/>
+          </a:prstGeom>
+        </p:spPr>
+        <p:txBody>
+          <a:bodyPr anchorCtr="0" anchor="b" bIns="91425" lIns="91425" spcFirstLastPara="1" rIns="91425" wrap="square" tIns="91425">
+            <a:noAutofit/>
+          </a:bodyPr>
+          <a:lstStyle/>
+          <a:p>
+            <a:pPr indent="0" lvl="0" marL="0" rtl="0" algn="r">
+              <a:spcBef>
+                <a:spcPts val="0"/>
+              </a:spcBef>
+              <a:spcAft>
+                <a:spcPts val="0"/>
+              </a:spcAft>
+              <a:buNone/>
+            </a:pPr>
+            <a:fld id="{00000000-1234-1234-1234-123412341234}" type="slidenum">
+              <a:rPr lang="en"/>
+              <a:t>‹#›</a:t>
+            </a:fld>
+            <a:endParaRPr/>
+          </a:p>
+          <a:p>
+            <a:pPr indent="0" lvl="0" marL="0" rtl="0" algn="r">
+              <a:spcBef>
+                <a:spcPts val="0"/>
+              </a:spcBef>
+              <a:spcAft>
+                <a:spcPts val="0"/>
+              </a:spcAft>
+              <a:buNone/>
+            </a:pPr>
+            <a:r>
+              <a:rPr b="0" lang="en" sz="1000" u="sng">
+                <a:solidFill>
+                  <a:schemeClr val="hlink"/>
+                </a:solidFill>
+                <a:hlinkClick r:id="rId3"/>
+              </a:rPr>
+              <a:t>uni1.de/nyt</a:t>
+            </a:r>
+            <a:r>
+              <a:rPr b="0" lang="en" sz="1000"/>
+              <a:t> </a:t>
+            </a:r>
+            <a:endParaRPr b="0" sz="1000"/>
+          </a:p>
+        </p:txBody>
+      </p:sp>
+      <p:sp>
+        <p:nvSpPr>
+          <p:cNvPr id="368" name="Google Shape;368;p54"/>
+          <p:cNvSpPr txBox="1"/>
+          <p:nvPr>
             <p:ph idx="1" type="body"/>
           </p:nvPr>
         </p:nvSpPr>
@@ -23176,7 +23494,7 @@
             </a:pPr>
             <a:r>
               <a:rPr lang="en"/>
-              <a:t>© 2012, 2023, 2024 Dirk Riehle, some rights reserved</a:t>
+              <a:t>© 2025 Dirk Riehle, some rights reserved</a:t>
             </a:r>
             <a:endParaRPr/>
           </a:p>
@@ -23344,7 +23662,7 @@
         <p:spPr>
           <a:xfrm>
             <a:off x="274320" y="914400"/>
-            <a:ext cx="8595360" cy="3502840"/>
+            <a:ext cx="8595360" cy="3493598"/>
           </a:xfrm>
           <a:prstGeom prst="rect">
             <a:avLst/>
@@ -24018,7 +24336,7 @@
         <p:spPr>
           <a:xfrm>
             <a:off x="274320" y="914400"/>
-            <a:ext cx="8595360" cy="3502840"/>
+            <a:ext cx="8595360" cy="3493598"/>
           </a:xfrm>
           <a:prstGeom prst="rect">
             <a:avLst/>
@@ -24088,7 +24406,11 @@
             </a:pPr>
             <a:r>
               <a:rPr lang="en"/>
-              <a:t>Maxwell’s Equations [1] of (Classic) Electromagnetism</a:t>
+              <a:t>Maxwell’s Equations of (Classic) Electromagnetism</a:t>
+            </a:r>
+            <a:r>
+              <a:rPr lang="en"/>
+              <a:t> [1]</a:t>
             </a:r>
             <a:endParaRPr/>
           </a:p>
@@ -24251,6 +24573,285 @@
 </file>
 
 <file path=ppt/theme/theme1.xml><?xml version="1.0" encoding="utf-8"?>
+<a:theme xmlns:a="http://schemas.openxmlformats.org/drawingml/2006/main" xmlns:r="http://schemas.openxmlformats.org/officeDocument/2006/relationships">
+  <a:themeElements>
+    <a:clrScheme name="Default">
+      <a:dk1>
+        <a:srgbClr val="000000"/>
+      </a:dk1>
+      <a:lt1>
+        <a:srgbClr val="FFFFFF"/>
+      </a:lt1>
+      <a:dk2>
+        <a:srgbClr val="158158"/>
+      </a:dk2>
+      <a:lt2>
+        <a:srgbClr val="F3F3F3"/>
+      </a:lt2>
+      <a:accent1>
+        <a:srgbClr val="058DC7"/>
+      </a:accent1>
+      <a:accent2>
+        <a:srgbClr val="50B432"/>
+      </a:accent2>
+      <a:accent3>
+        <a:srgbClr val="ED561B"/>
+      </a:accent3>
+      <a:accent4>
+        <a:srgbClr val="EDEF00"/>
+      </a:accent4>
+      <a:accent5>
+        <a:srgbClr val="24CBE5"/>
+      </a:accent5>
+      <a:accent6>
+        <a:srgbClr val="64E572"/>
+      </a:accent6>
+      <a:hlink>
+        <a:srgbClr val="2200CC"/>
+      </a:hlink>
+      <a:folHlink>
+        <a:srgbClr val="551A8B"/>
+      </a:folHlink>
+    </a:clrScheme>
+    <a:fontScheme name="Office">
+      <a:majorFont>
+        <a:latin typeface="Arial"/>
+        <a:ea typeface=""/>
+        <a:cs typeface=""/>
+        <a:font script="Jpan" typeface="ＭＳ Ｐゴシック"/>
+        <a:font script="Hang" typeface="맑은 고딕"/>
+        <a:font script="Hans" typeface="宋体"/>
+        <a:font script="Hant" typeface="新細明體"/>
+        <a:font script="Arab" typeface="Times New Roman"/>
+        <a:font script="Hebr" typeface="Times New Roman"/>
+        <a:font script="Thai" typeface="Angsana New"/>
+        <a:font script="Ethi" typeface="Nyala"/>
+        <a:font script="Beng" typeface="Vrinda"/>
+        <a:font script="Gujr" typeface="Shruti"/>
+        <a:font script="Khmr" typeface="MoolBoran"/>
+        <a:font script="Knda" typeface="Tunga"/>
+        <a:font script="Guru" typeface="Raavi"/>
+        <a:font script="Cans" typeface="Euphemia"/>
+        <a:font script="Cher" typeface="Plantagenet Cherokee"/>
+        <a:font script="Yiii" typeface="Microsoft Yi Baiti"/>
+        <a:font script="Tibt" typeface="Microsoft Himalaya"/>
+        <a:font script="Thaa" typeface="MV Boli"/>
+        <a:font script="Deva" typeface="Mangal"/>
+        <a:font script="Telu" typeface="Gautami"/>
+        <a:font script="Taml" typeface="Latha"/>
+        <a:font script="Syrc" typeface="Estrangelo Edessa"/>
+        <a:font script="Orya" typeface="Kalinga"/>
+        <a:font script="Mlym" typeface="Kartika"/>
+        <a:font script="Laoo" typeface="DokChampa"/>
+        <a:font script="Sinh" typeface="Iskoola Pota"/>
+        <a:font script="Mong" typeface="Mongolian Baiti"/>
+        <a:font script="Viet" typeface="Times New Roman"/>
+        <a:font script="Uigh" typeface="Microsoft Uighur"/>
+        <a:font script="Geor" typeface="Sylfaen"/>
+      </a:majorFont>
+      <a:minorFont>
+        <a:latin typeface="Arial"/>
+        <a:ea typeface=""/>
+        <a:cs typeface=""/>
+        <a:font script="Jpan" typeface="ＭＳ Ｐゴシック"/>
+        <a:font script="Hang" typeface="맑은 고딕"/>
+        <a:font script="Hans" typeface="宋体"/>
+        <a:font script="Hant" typeface="新細明體"/>
+        <a:font script="Arab" typeface="Arial"/>
+        <a:font script="Hebr" typeface="Arial"/>
+        <a:font script="Thai" typeface="Cordia New"/>
+        <a:font script="Ethi" typeface="Nyala"/>
+        <a:font script="Beng" typeface="Vrinda"/>
+        <a:font script="Gujr" typeface="Shruti"/>
+        <a:font script="Khmr" typeface="DaunPenh"/>
+        <a:font script="Knda" typeface="Tunga"/>
+        <a:font script="Guru" typeface="Raavi"/>
+        <a:font script="Cans" typeface="Euphemia"/>
+        <a:font script="Cher" typeface="Plantagenet Cherokee"/>
+        <a:font script="Yiii" typeface="Microsoft Yi Baiti"/>
+        <a:font script="Tibt" typeface="Microsoft Himalaya"/>
+        <a:font script="Thaa" typeface="MV Boli"/>
+        <a:font script="Deva" typeface="Mangal"/>
+        <a:font script="Telu" typeface="Gautami"/>
+        <a:font script="Taml" typeface="Latha"/>
+        <a:font script="Syrc" typeface="Estrangelo Edessa"/>
+        <a:font script="Orya" typeface="Kalinga"/>
+        <a:font script="Mlym" typeface="Kartika"/>
+        <a:font script="Laoo" typeface="DokChampa"/>
+        <a:font script="Sinh" typeface="Iskoola Pota"/>
+        <a:font script="Mong" typeface="Mongolian Baiti"/>
+        <a:font script="Viet" typeface="Arial"/>
+        <a:font script="Uigh" typeface="Microsoft Uighur"/>
+        <a:font script="Geor" typeface="Sylfaen"/>
+      </a:minorFont>
+    </a:fontScheme>
+    <a:fmtScheme name="Office">
+      <a:fillStyleLst>
+        <a:solidFill>
+          <a:schemeClr val="phClr"/>
+        </a:solidFill>
+        <a:gradFill rotWithShape="1">
+          <a:gsLst>
+            <a:gs pos="0">
+              <a:schemeClr val="phClr">
+                <a:tint val="50000"/>
+                <a:satMod val="300000"/>
+              </a:schemeClr>
+            </a:gs>
+            <a:gs pos="35000">
+              <a:schemeClr val="phClr">
+                <a:tint val="37000"/>
+                <a:satMod val="300000"/>
+              </a:schemeClr>
+            </a:gs>
+            <a:gs pos="100000">
+              <a:schemeClr val="phClr">
+                <a:tint val="15000"/>
+                <a:satMod val="350000"/>
+              </a:schemeClr>
+            </a:gs>
+          </a:gsLst>
+          <a:lin ang="16200000" scaled="1"/>
+        </a:gradFill>
+        <a:gradFill rotWithShape="1">
+          <a:gsLst>
+            <a:gs pos="0">
+              <a:schemeClr val="phClr">
+                <a:tint val="100000"/>
+                <a:shade val="100000"/>
+                <a:satMod val="130000"/>
+              </a:schemeClr>
+            </a:gs>
+            <a:gs pos="100000">
+              <a:schemeClr val="phClr">
+                <a:tint val="50000"/>
+                <a:shade val="100000"/>
+                <a:satMod val="350000"/>
+              </a:schemeClr>
+            </a:gs>
+          </a:gsLst>
+          <a:lin ang="16200000" scaled="0"/>
+        </a:gradFill>
+      </a:fillStyleLst>
+      <a:lnStyleLst>
+        <a:ln w="9525" cap="flat" cmpd="sng" algn="ctr">
+          <a:solidFill>
+            <a:schemeClr val="phClr">
+              <a:shade val="95000"/>
+              <a:satMod val="105000"/>
+            </a:schemeClr>
+          </a:solidFill>
+          <a:prstDash val="solid"/>
+        </a:ln>
+        <a:ln w="25400" cap="flat" cmpd="sng" algn="ctr">
+          <a:solidFill>
+            <a:schemeClr val="phClr"/>
+          </a:solidFill>
+          <a:prstDash val="solid"/>
+        </a:ln>
+        <a:ln w="38100" cap="flat" cmpd="sng" algn="ctr">
+          <a:solidFill>
+            <a:schemeClr val="phClr"/>
+          </a:solidFill>
+          <a:prstDash val="solid"/>
+        </a:ln>
+      </a:lnStyleLst>
+      <a:effectStyleLst>
+        <a:effectStyle>
+          <a:effectLst>
+            <a:outerShdw blurRad="40000" dist="20000" dir="5400000" rotWithShape="0">
+              <a:srgbClr val="000000">
+                <a:alpha val="38000"/>
+              </a:srgbClr>
+            </a:outerShdw>
+          </a:effectLst>
+        </a:effectStyle>
+        <a:effectStyle>
+          <a:effectLst>
+            <a:outerShdw blurRad="40000" dist="23000" dir="5400000" rotWithShape="0">
+              <a:srgbClr val="000000">
+                <a:alpha val="35000"/>
+              </a:srgbClr>
+            </a:outerShdw>
+          </a:effectLst>
+        </a:effectStyle>
+        <a:effectStyle>
+          <a:effectLst>
+            <a:outerShdw blurRad="40000" dist="23000" dir="5400000" rotWithShape="0">
+              <a:srgbClr val="000000">
+                <a:alpha val="35000"/>
+              </a:srgbClr>
+            </a:outerShdw>
+          </a:effectLst>
+          <a:scene3d>
+            <a:camera prst="orthographicFront">
+              <a:rot lat="0" lon="0" rev="0"/>
+            </a:camera>
+            <a:lightRig rig="threePt" dir="t">
+              <a:rot lat="0" lon="0" rev="1200000"/>
+            </a:lightRig>
+          </a:scene3d>
+          <a:sp3d>
+            <a:bevelT w="63500" h="25400"/>
+          </a:sp3d>
+        </a:effectStyle>
+      </a:effectStyleLst>
+      <a:bgFillStyleLst>
+        <a:solidFill>
+          <a:schemeClr val="phClr"/>
+        </a:solidFill>
+        <a:gradFill rotWithShape="1">
+          <a:gsLst>
+            <a:gs pos="0">
+              <a:schemeClr val="phClr">
+                <a:tint val="40000"/>
+                <a:satMod val="350000"/>
+              </a:schemeClr>
+            </a:gs>
+            <a:gs pos="40000">
+              <a:schemeClr val="phClr">
+                <a:tint val="45000"/>
+                <a:shade val="99000"/>
+                <a:satMod val="350000"/>
+              </a:schemeClr>
+            </a:gs>
+            <a:gs pos="100000">
+              <a:schemeClr val="phClr">
+                <a:shade val="20000"/>
+                <a:satMod val="255000"/>
+              </a:schemeClr>
+            </a:gs>
+          </a:gsLst>
+          <a:path path="circle">
+            <a:fillToRect l="50000" t="-80000" r="50000" b="180000"/>
+          </a:path>
+        </a:gradFill>
+        <a:gradFill rotWithShape="1">
+          <a:gsLst>
+            <a:gs pos="0">
+              <a:schemeClr val="phClr">
+                <a:tint val="80000"/>
+                <a:satMod val="300000"/>
+              </a:schemeClr>
+            </a:gs>
+            <a:gs pos="100000">
+              <a:schemeClr val="phClr">
+                <a:shade val="30000"/>
+                <a:satMod val="200000"/>
+              </a:schemeClr>
+            </a:gs>
+          </a:gsLst>
+          <a:path path="circle">
+            <a:fillToRect l="50000" t="50000" r="50000" b="50000"/>
+          </a:path>
+        </a:gradFill>
+      </a:bgFillStyleLst>
+    </a:fmtScheme>
+  </a:themeElements>
+</a:theme>
+</file>
+
+<file path=ppt/theme/theme2.xml><?xml version="1.0" encoding="utf-8"?>
 <a:theme xmlns:a="http://schemas.openxmlformats.org/drawingml/2006/main" xmlns:r="http://schemas.openxmlformats.org/officeDocument/2006/relationships" name="NYT Slides Template">
   <a:themeElements>
     <a:clrScheme name="Simple Light">
@@ -24527,283 +25128,4 @@
     </a:fmtScheme>
   </a:themeElements>
 </a:theme>
-</file>
-
-<file path=ppt/theme/theme2.xml><?xml version="1.0" encoding="utf-8"?>
-<a:theme xmlns:a="http://schemas.openxmlformats.org/drawingml/2006/main" xmlns:r="http://schemas.openxmlformats.org/officeDocument/2006/relationships">
-  <a:themeElements>
-    <a:clrScheme name="Default">
-      <a:dk1>
-        <a:srgbClr val="000000"/>
-      </a:dk1>
-      <a:lt1>
-        <a:srgbClr val="FFFFFF"/>
-      </a:lt1>
-      <a:dk2>
-        <a:srgbClr val="158158"/>
-      </a:dk2>
-      <a:lt2>
-        <a:srgbClr val="F3F3F3"/>
-      </a:lt2>
-      <a:accent1>
-        <a:srgbClr val="058DC7"/>
-      </a:accent1>
-      <a:accent2>
-        <a:srgbClr val="50B432"/>
-      </a:accent2>
-      <a:accent3>
-        <a:srgbClr val="ED561B"/>
-      </a:accent3>
-      <a:accent4>
-        <a:srgbClr val="EDEF00"/>
-      </a:accent4>
-      <a:accent5>
-        <a:srgbClr val="24CBE5"/>
-      </a:accent5>
-      <a:accent6>
-        <a:srgbClr val="64E572"/>
-      </a:accent6>
-      <a:hlink>
-        <a:srgbClr val="2200CC"/>
-      </a:hlink>
-      <a:folHlink>
-        <a:srgbClr val="551A8B"/>
-      </a:folHlink>
-    </a:clrScheme>
-    <a:fontScheme name="Office">
-      <a:majorFont>
-        <a:latin typeface="Arial"/>
-        <a:ea typeface=""/>
-        <a:cs typeface=""/>
-        <a:font script="Jpan" typeface="ＭＳ Ｐゴシック"/>
-        <a:font script="Hang" typeface="맑은 고딕"/>
-        <a:font script="Hans" typeface="宋体"/>
-        <a:font script="Hant" typeface="新細明體"/>
-        <a:font script="Arab" typeface="Times New Roman"/>
-        <a:font script="Hebr" typeface="Times New Roman"/>
-        <a:font script="Thai" typeface="Angsana New"/>
-        <a:font script="Ethi" typeface="Nyala"/>
-        <a:font script="Beng" typeface="Vrinda"/>
-        <a:font script="Gujr" typeface="Shruti"/>
-        <a:font script="Khmr" typeface="MoolBoran"/>
-        <a:font script="Knda" typeface="Tunga"/>
-        <a:font script="Guru" typeface="Raavi"/>
-        <a:font script="Cans" typeface="Euphemia"/>
-        <a:font script="Cher" typeface="Plantagenet Cherokee"/>
-        <a:font script="Yiii" typeface="Microsoft Yi Baiti"/>
-        <a:font script="Tibt" typeface="Microsoft Himalaya"/>
-        <a:font script="Thaa" typeface="MV Boli"/>
-        <a:font script="Deva" typeface="Mangal"/>
-        <a:font script="Telu" typeface="Gautami"/>
-        <a:font script="Taml" typeface="Latha"/>
-        <a:font script="Syrc" typeface="Estrangelo Edessa"/>
-        <a:font script="Orya" typeface="Kalinga"/>
-        <a:font script="Mlym" typeface="Kartika"/>
-        <a:font script="Laoo" typeface="DokChampa"/>
-        <a:font script="Sinh" typeface="Iskoola Pota"/>
-        <a:font script="Mong" typeface="Mongolian Baiti"/>
-        <a:font script="Viet" typeface="Times New Roman"/>
-        <a:font script="Uigh" typeface="Microsoft Uighur"/>
-        <a:font script="Geor" typeface="Sylfaen"/>
-      </a:majorFont>
-      <a:minorFont>
-        <a:latin typeface="Arial"/>
-        <a:ea typeface=""/>
-        <a:cs typeface=""/>
-        <a:font script="Jpan" typeface="ＭＳ Ｐゴシック"/>
-        <a:font script="Hang" typeface="맑은 고딕"/>
-        <a:font script="Hans" typeface="宋体"/>
-        <a:font script="Hant" typeface="新細明體"/>
-        <a:font script="Arab" typeface="Arial"/>
-        <a:font script="Hebr" typeface="Arial"/>
-        <a:font script="Thai" typeface="Cordia New"/>
-        <a:font script="Ethi" typeface="Nyala"/>
-        <a:font script="Beng" typeface="Vrinda"/>
-        <a:font script="Gujr" typeface="Shruti"/>
-        <a:font script="Khmr" typeface="DaunPenh"/>
-        <a:font script="Knda" typeface="Tunga"/>
-        <a:font script="Guru" typeface="Raavi"/>
-        <a:font script="Cans" typeface="Euphemia"/>
-        <a:font script="Cher" typeface="Plantagenet Cherokee"/>
-        <a:font script="Yiii" typeface="Microsoft Yi Baiti"/>
-        <a:font script="Tibt" typeface="Microsoft Himalaya"/>
-        <a:font script="Thaa" typeface="MV Boli"/>
-        <a:font script="Deva" typeface="Mangal"/>
-        <a:font script="Telu" typeface="Gautami"/>
-        <a:font script="Taml" typeface="Latha"/>
-        <a:font script="Syrc" typeface="Estrangelo Edessa"/>
-        <a:font script="Orya" typeface="Kalinga"/>
-        <a:font script="Mlym" typeface="Kartika"/>
-        <a:font script="Laoo" typeface="DokChampa"/>
-        <a:font script="Sinh" typeface="Iskoola Pota"/>
-        <a:font script="Mong" typeface="Mongolian Baiti"/>
-        <a:font script="Viet" typeface="Arial"/>
-        <a:font script="Uigh" typeface="Microsoft Uighur"/>
-        <a:font script="Geor" typeface="Sylfaen"/>
-      </a:minorFont>
-    </a:fontScheme>
-    <a:fmtScheme name="Office">
-      <a:fillStyleLst>
-        <a:solidFill>
-          <a:schemeClr val="phClr"/>
-        </a:solidFill>
-        <a:gradFill rotWithShape="1">
-          <a:gsLst>
-            <a:gs pos="0">
-              <a:schemeClr val="phClr">
-                <a:tint val="50000"/>
-                <a:satMod val="300000"/>
-              </a:schemeClr>
-            </a:gs>
-            <a:gs pos="35000">
-              <a:schemeClr val="phClr">
-                <a:tint val="37000"/>
-                <a:satMod val="300000"/>
-              </a:schemeClr>
-            </a:gs>
-            <a:gs pos="100000">
-              <a:schemeClr val="phClr">
-                <a:tint val="15000"/>
-                <a:satMod val="350000"/>
-              </a:schemeClr>
-            </a:gs>
-          </a:gsLst>
-          <a:lin ang="16200000" scaled="1"/>
-        </a:gradFill>
-        <a:gradFill rotWithShape="1">
-          <a:gsLst>
-            <a:gs pos="0">
-              <a:schemeClr val="phClr">
-                <a:tint val="100000"/>
-                <a:shade val="100000"/>
-                <a:satMod val="130000"/>
-              </a:schemeClr>
-            </a:gs>
-            <a:gs pos="100000">
-              <a:schemeClr val="phClr">
-                <a:tint val="50000"/>
-                <a:shade val="100000"/>
-                <a:satMod val="350000"/>
-              </a:schemeClr>
-            </a:gs>
-          </a:gsLst>
-          <a:lin ang="16200000" scaled="0"/>
-        </a:gradFill>
-      </a:fillStyleLst>
-      <a:lnStyleLst>
-        <a:ln w="9525" cap="flat" cmpd="sng" algn="ctr">
-          <a:solidFill>
-            <a:schemeClr val="phClr">
-              <a:shade val="95000"/>
-              <a:satMod val="105000"/>
-            </a:schemeClr>
-          </a:solidFill>
-          <a:prstDash val="solid"/>
-        </a:ln>
-        <a:ln w="25400" cap="flat" cmpd="sng" algn="ctr">
-          <a:solidFill>
-            <a:schemeClr val="phClr"/>
-          </a:solidFill>
-          <a:prstDash val="solid"/>
-        </a:ln>
-        <a:ln w="38100" cap="flat" cmpd="sng" algn="ctr">
-          <a:solidFill>
-            <a:schemeClr val="phClr"/>
-          </a:solidFill>
-          <a:prstDash val="solid"/>
-        </a:ln>
-      </a:lnStyleLst>
-      <a:effectStyleLst>
-        <a:effectStyle>
-          <a:effectLst>
-            <a:outerShdw blurRad="40000" dist="20000" dir="5400000" rotWithShape="0">
-              <a:srgbClr val="000000">
-                <a:alpha val="38000"/>
-              </a:srgbClr>
-            </a:outerShdw>
-          </a:effectLst>
-        </a:effectStyle>
-        <a:effectStyle>
-          <a:effectLst>
-            <a:outerShdw blurRad="40000" dist="23000" dir="5400000" rotWithShape="0">
-              <a:srgbClr val="000000">
-                <a:alpha val="35000"/>
-              </a:srgbClr>
-            </a:outerShdw>
-          </a:effectLst>
-        </a:effectStyle>
-        <a:effectStyle>
-          <a:effectLst>
-            <a:outerShdw blurRad="40000" dist="23000" dir="5400000" rotWithShape="0">
-              <a:srgbClr val="000000">
-                <a:alpha val="35000"/>
-              </a:srgbClr>
-            </a:outerShdw>
-          </a:effectLst>
-          <a:scene3d>
-            <a:camera prst="orthographicFront">
-              <a:rot lat="0" lon="0" rev="0"/>
-            </a:camera>
-            <a:lightRig rig="threePt" dir="t">
-              <a:rot lat="0" lon="0" rev="1200000"/>
-            </a:lightRig>
-          </a:scene3d>
-          <a:sp3d>
-            <a:bevelT w="63500" h="25400"/>
-          </a:sp3d>
-        </a:effectStyle>
-      </a:effectStyleLst>
-      <a:bgFillStyleLst>
-        <a:solidFill>
-          <a:schemeClr val="phClr"/>
-        </a:solidFill>
-        <a:gradFill rotWithShape="1">
-          <a:gsLst>
-            <a:gs pos="0">
-              <a:schemeClr val="phClr">
-                <a:tint val="40000"/>
-                <a:satMod val="350000"/>
-              </a:schemeClr>
-            </a:gs>
-            <a:gs pos="40000">
-              <a:schemeClr val="phClr">
-                <a:tint val="45000"/>
-                <a:shade val="99000"/>
-                <a:satMod val="350000"/>
-              </a:schemeClr>
-            </a:gs>
-            <a:gs pos="100000">
-              <a:schemeClr val="phClr">
-                <a:shade val="20000"/>
-                <a:satMod val="255000"/>
-              </a:schemeClr>
-            </a:gs>
-          </a:gsLst>
-          <a:path path="circle">
-            <a:fillToRect l="50000" t="-80000" r="50000" b="180000"/>
-          </a:path>
-        </a:gradFill>
-        <a:gradFill rotWithShape="1">
-          <a:gsLst>
-            <a:gs pos="0">
-              <a:schemeClr val="phClr">
-                <a:tint val="80000"/>
-                <a:satMod val="300000"/>
-              </a:schemeClr>
-            </a:gs>
-            <a:gs pos="100000">
-              <a:schemeClr val="phClr">
-                <a:shade val="30000"/>
-                <a:satMod val="200000"/>
-              </a:schemeClr>
-            </a:gs>
-          </a:gsLst>
-          <a:path path="circle">
-            <a:fillToRect l="50000" t="50000" r="50000" b="50000"/>
-          </a:path>
-        </a:gradFill>
-      </a:bgFillStyleLst>
-    </a:fmtScheme>
-  </a:themeElements>
-</a:theme>
 </file>